--- a/deliverables/ceo_sales_review.pptx
+++ b/deliverables/ceo_sales_review.pptx
@@ -141,6 +141,7 @@
               </c:strCache>
             </c:strRef>
           </c:tx>
+          <c:invertIfNegative val="0"/>
           <c:cat>
             <c:strRef>
               <c:f>Sheet1!$A$2:$A$5</c:f>
@@ -197,6 +198,7 @@
               </c:strCache>
             </c:strRef>
           </c:tx>
+          <c:invertIfNegative val="0"/>
           <c:cat>
             <c:strRef>
               <c:f>Sheet1!$A$2:$A$5</c:f>
@@ -253,6 +255,7 @@
               </c:strCache>
             </c:strRef>
           </c:tx>
+          <c:invertIfNegative val="0"/>
           <c:cat>
             <c:strRef>
               <c:f>Sheet1!$A$2:$A$5</c:f>
@@ -349,6 +352,15 @@
     <c:legend>
       <c:legendPos val="b"/>
       <c:overlay val="0"/>
+      <c:txPr>
+        <a:bodyPr/>
+        <a:lstStyle/>
+        <a:p>
+          <a:pPr>
+            <a:defRPr sz="1000"/>
+          </a:pPr>
+        </a:p>
+      </c:txPr>
     </c:legend>
     <c:dispBlanksAs val="gap"/>
   </c:chart>
@@ -374,6 +386,304 @@
   <c:chart>
     <c:autoTitleDeleted val="0"/>
     <c:plotArea>
+      <c:barChart>
+        <c:barDir val="bar"/>
+        <c:grouping val="clustered"/>
+        <c:ser>
+          <c:idx val="0"/>
+          <c:order val="0"/>
+          <c:tx>
+            <c:strRef>
+              <c:f>Sheet1!$B$1</c:f>
+              <c:strCache>
+                <c:ptCount val="1"/>
+                <c:pt idx="0">
+                  <c:v>Volume ($k)</c:v>
+                </c:pt>
+              </c:strCache>
+            </c:strRef>
+          </c:tx>
+          <c:invertIfNegative val="0"/>
+          <c:cat>
+            <c:strRef>
+              <c:f>Sheet1!$A$2:$A$7</c:f>
+              <c:strCache>
+                <c:ptCount val="6"/>
+                <c:pt idx="0">
+                  <c:v>Household</c:v>
+                </c:pt>
+                <c:pt idx="1">
+                  <c:v>Dining</c:v>
+                </c:pt>
+                <c:pt idx="2">
+                  <c:v>Kitchen</c:v>
+                </c:pt>
+                <c:pt idx="3">
+                  <c:v>Furniture</c:v>
+                </c:pt>
+                <c:pt idx="4">
+                  <c:v>Electronics</c:v>
+                </c:pt>
+                <c:pt idx="5">
+                  <c:v>Sports</c:v>
+                </c:pt>
+              </c:strCache>
+            </c:strRef>
+          </c:cat>
+          <c:val>
+            <c:numRef>
+              <c:f>Sheet1!$B$2:$B$7</c:f>
+              <c:numCache>
+                <c:formatCode>General</c:formatCode>
+                <c:ptCount val="6"/>
+                <c:pt idx="0">
+                  <c:v>228</c:v>
+                </c:pt>
+                <c:pt idx="1">
+                  <c:v>172</c:v>
+                </c:pt>
+                <c:pt idx="2">
+                  <c:v>145</c:v>
+                </c:pt>
+                <c:pt idx="3">
+                  <c:v>202</c:v>
+                </c:pt>
+                <c:pt idx="4">
+                  <c:v>380</c:v>
+                </c:pt>
+                <c:pt idx="5">
+                  <c:v>30</c:v>
+                </c:pt>
+              </c:numCache>
+            </c:numRef>
+          </c:val>
+        </c:ser>
+        <c:ser>
+          <c:idx val="1"/>
+          <c:order val="1"/>
+          <c:tx>
+            <c:strRef>
+              <c:f>Sheet1!$C$1</c:f>
+              <c:strCache>
+                <c:ptCount val="1"/>
+                <c:pt idx="0">
+                  <c:v>Location mix, mainly California ($k)</c:v>
+                </c:pt>
+              </c:strCache>
+            </c:strRef>
+          </c:tx>
+          <c:invertIfNegative val="0"/>
+          <c:cat>
+            <c:strRef>
+              <c:f>Sheet1!$A$2:$A$7</c:f>
+              <c:strCache>
+                <c:ptCount val="6"/>
+                <c:pt idx="0">
+                  <c:v>Household</c:v>
+                </c:pt>
+                <c:pt idx="1">
+                  <c:v>Dining</c:v>
+                </c:pt>
+                <c:pt idx="2">
+                  <c:v>Kitchen</c:v>
+                </c:pt>
+                <c:pt idx="3">
+                  <c:v>Furniture</c:v>
+                </c:pt>
+                <c:pt idx="4">
+                  <c:v>Electronics</c:v>
+                </c:pt>
+                <c:pt idx="5">
+                  <c:v>Sports</c:v>
+                </c:pt>
+              </c:strCache>
+            </c:strRef>
+          </c:cat>
+          <c:val>
+            <c:numRef>
+              <c:f>Sheet1!$C$2:$C$7</c:f>
+              <c:numCache>
+                <c:formatCode>General</c:formatCode>
+                <c:ptCount val="6"/>
+                <c:pt idx="0">
+                  <c:v>26</c:v>
+                </c:pt>
+                <c:pt idx="1">
+                  <c:v>14</c:v>
+                </c:pt>
+                <c:pt idx="2">
+                  <c:v>9</c:v>
+                </c:pt>
+                <c:pt idx="3">
+                  <c:v>26</c:v>
+                </c:pt>
+                <c:pt idx="4">
+                  <c:v>60</c:v>
+                </c:pt>
+                <c:pt idx="5">
+                  <c:v>3</c:v>
+                </c:pt>
+              </c:numCache>
+            </c:numRef>
+          </c:val>
+        </c:ser>
+        <c:ser>
+          <c:idx val="2"/>
+          <c:order val="2"/>
+          <c:tx>
+            <c:strRef>
+              <c:f>Sheet1!$D$1</c:f>
+              <c:strCache>
+                <c:ptCount val="1"/>
+                <c:pt idx="0">
+                  <c:v>Like-for-like price ($k)</c:v>
+                </c:pt>
+              </c:strCache>
+            </c:strRef>
+          </c:tx>
+          <c:invertIfNegative val="0"/>
+          <c:cat>
+            <c:strRef>
+              <c:f>Sheet1!$A$2:$A$7</c:f>
+              <c:strCache>
+                <c:ptCount val="6"/>
+                <c:pt idx="0">
+                  <c:v>Household</c:v>
+                </c:pt>
+                <c:pt idx="1">
+                  <c:v>Dining</c:v>
+                </c:pt>
+                <c:pt idx="2">
+                  <c:v>Kitchen</c:v>
+                </c:pt>
+                <c:pt idx="3">
+                  <c:v>Furniture</c:v>
+                </c:pt>
+                <c:pt idx="4">
+                  <c:v>Electronics</c:v>
+                </c:pt>
+                <c:pt idx="5">
+                  <c:v>Sports</c:v>
+                </c:pt>
+              </c:strCache>
+            </c:strRef>
+          </c:cat>
+          <c:val>
+            <c:numRef>
+              <c:f>Sheet1!$D$2:$D$7</c:f>
+              <c:numCache>
+                <c:formatCode>General</c:formatCode>
+                <c:ptCount val="6"/>
+                <c:pt idx="0">
+                  <c:v>75</c:v>
+                </c:pt>
+                <c:pt idx="1">
+                  <c:v>69</c:v>
+                </c:pt>
+                <c:pt idx="2">
+                  <c:v>50</c:v>
+                </c:pt>
+                <c:pt idx="3">
+                  <c:v>-29</c:v>
+                </c:pt>
+                <c:pt idx="4">
+                  <c:v>-253</c:v>
+                </c:pt>
+                <c:pt idx="5">
+                  <c:v>12</c:v>
+                </c:pt>
+              </c:numCache>
+            </c:numRef>
+          </c:val>
+        </c:ser>
+        <c:dLbls>
+          <c:txPr>
+            <a:bodyPr/>
+            <a:lstStyle/>
+            <a:p>
+              <a:pPr>
+                <a:defRPr sz="900"/>
+              </a:pPr>
+            </a:p>
+          </c:txPr>
+          <c:showLegendKey val="0"/>
+          <c:showVal val="1"/>
+          <c:showCatName val="0"/>
+          <c:showSerName val="0"/>
+          <c:showPercent val="0"/>
+          <c:showBubbleSize val="0"/>
+          <c:showLeaderLines val="1"/>
+        </c:dLbls>
+        <c:axId val="-2068027336"/>
+        <c:axId val="-2113994440"/>
+      </c:barChart>
+      <c:catAx>
+        <c:axId val="-2068027336"/>
+        <c:scaling>
+          <c:orientation val="minMax"/>
+        </c:scaling>
+        <c:delete val="0"/>
+        <c:axPos val="l"/>
+        <c:majorTickMark val="out"/>
+        <c:minorTickMark val="none"/>
+        <c:tickLblPos val="low"/>
+        <c:crossAx val="-2113994440"/>
+        <c:crosses val="autoZero"/>
+        <c:auto val="1"/>
+        <c:lblAlgn val="ctr"/>
+        <c:lblOffset val="100"/>
+        <c:noMultiLvlLbl val="0"/>
+      </c:catAx>
+      <c:valAx>
+        <c:axId val="-2113994440"/>
+        <c:scaling/>
+        <c:delete val="0"/>
+        <c:axPos val="b"/>
+        <c:majorGridlines/>
+        <c:majorTickMark val="out"/>
+        <c:minorTickMark val="none"/>
+        <c:tickLblPos val="nextTo"/>
+        <c:crossAx val="-2068027336"/>
+        <c:crosses val="autoZero"/>
+      </c:valAx>
+    </c:plotArea>
+    <c:legend>
+      <c:legendPos val="b"/>
+      <c:overlay val="0"/>
+      <c:txPr>
+        <a:bodyPr/>
+        <a:lstStyle/>
+        <a:p>
+          <a:pPr>
+            <a:defRPr sz="1000"/>
+          </a:pPr>
+        </a:p>
+      </c:txPr>
+    </c:legend>
+    <c:dispBlanksAs val="gap"/>
+  </c:chart>
+  <c:txPr>
+    <a:bodyPr/>
+    <a:lstStyle/>
+    <a:p>
+      <a:pPr>
+        <a:defRPr sz="1800"/>
+      </a:pPr>
+      <a:endParaRPr lang="en-US"/>
+    </a:p>
+  </c:txPr>
+  <c:externalData r:id="rId1">
+    <c:autoUpdate val="0"/>
+  </c:externalData>
+</c:chartSpace>
+</file>
+
+<file path=ppt/charts/chart3.xml><?xml version="1.0" encoding="utf-8"?>
+<c:chartSpace xmlns:c="http://schemas.openxmlformats.org/drawingml/2006/chart" xmlns:a="http://schemas.openxmlformats.org/drawingml/2006/main" xmlns:r="http://schemas.openxmlformats.org/officeDocument/2006/relationships">
+  <c:date1904 val="0"/>
+  <c:chart>
+    <c:autoTitleDeleted val="0"/>
+    <c:plotArea>
       <c:lineChart>
         <c:grouping val="standard"/>
         <c:varyColors val="0"/>
@@ -386,7 +696,7 @@
               <c:strCache>
                 <c:ptCount val="1"/>
                 <c:pt idx="0">
-                  <c:v>Furniture GM% — landed cost (actual)</c:v>
+                  <c:v>Dining Furniture: list price ÷ landed cost</c:v>
                 </c:pt>
               </c:strCache>
             </c:strRef>
@@ -478,253 +788,76 @@
                 <c:formatCode>General</c:formatCode>
                 <c:ptCount val="24"/>
                 <c:pt idx="0">
-                  <c:v>28.1</c:v>
+                  <c:v>2.12</c:v>
                 </c:pt>
                 <c:pt idx="1">
-                  <c:v>32.0</c:v>
+                  <c:v>2.12</c:v>
                 </c:pt>
                 <c:pt idx="2">
-                  <c:v>32.5</c:v>
+                  <c:v>2.12</c:v>
                 </c:pt>
                 <c:pt idx="3">
-                  <c:v>32.6</c:v>
+                  <c:v>2.12</c:v>
                 </c:pt>
                 <c:pt idx="4">
-                  <c:v>31.4</c:v>
+                  <c:v>2.12</c:v>
                 </c:pt>
                 <c:pt idx="5">
-                  <c:v>33.8</c:v>
+                  <c:v>2.12</c:v>
                 </c:pt>
                 <c:pt idx="6">
-                  <c:v>33.4</c:v>
+                  <c:v>2.12</c:v>
                 </c:pt>
                 <c:pt idx="7">
-                  <c:v>32.8</c:v>
+                  <c:v>2.12</c:v>
                 </c:pt>
                 <c:pt idx="8">
-                  <c:v>31.9</c:v>
+                  <c:v>2.12</c:v>
                 </c:pt>
                 <c:pt idx="9">
-                  <c:v>32.2</c:v>
+                  <c:v>2.12</c:v>
                 </c:pt>
                 <c:pt idx="10">
-                  <c:v>33.8</c:v>
+                  <c:v>2.12</c:v>
                 </c:pt>
                 <c:pt idx="11">
-                  <c:v>32.3</c:v>
+                  <c:v>2.12</c:v>
                 </c:pt>
                 <c:pt idx="12">
-                  <c:v>4.1</c:v>
+                  <c:v>1.56</c:v>
                 </c:pt>
                 <c:pt idx="13">
-                  <c:v>8.2</c:v>
+                  <c:v>1.56</c:v>
                 </c:pt>
                 <c:pt idx="14">
-                  <c:v>8.7</c:v>
+                  <c:v>1.56</c:v>
                 </c:pt>
                 <c:pt idx="15">
-                  <c:v>7.5</c:v>
+                  <c:v>1.56</c:v>
                 </c:pt>
                 <c:pt idx="16">
-                  <c:v>5.9</c:v>
+                  <c:v>1.56</c:v>
                 </c:pt>
                 <c:pt idx="17">
-                  <c:v>11.0</c:v>
+                  <c:v>1.56</c:v>
                 </c:pt>
                 <c:pt idx="18">
-                  <c:v>7.8</c:v>
+                  <c:v>1.56</c:v>
                 </c:pt>
                 <c:pt idx="19">
-                  <c:v>6.2</c:v>
+                  <c:v>1.56</c:v>
                 </c:pt>
                 <c:pt idx="20">
-                  <c:v>7.1</c:v>
+                  <c:v>1.56</c:v>
                 </c:pt>
                 <c:pt idx="21">
-                  <c:v>7.2</c:v>
+                  <c:v>1.56</c:v>
                 </c:pt>
                 <c:pt idx="22">
-                  <c:v>8.7</c:v>
+                  <c:v>1.56</c:v>
                 </c:pt>
                 <c:pt idx="23">
-                  <c:v>6.8</c:v>
-                </c:pt>
-              </c:numCache>
-            </c:numRef>
-          </c:val>
-          <c:smooth val="0"/>
-        </c:ser>
-        <c:ser>
-          <c:idx val="1"/>
-          <c:order val="1"/>
-          <c:tx>
-            <c:strRef>
-              <c:f>Sheet1!$C$1</c:f>
-              <c:strCache>
-                <c:ptCount val="1"/>
-                <c:pt idx="0">
-                  <c:v>Furniture GM% — standard cost (budget view)</c:v>
-                </c:pt>
-              </c:strCache>
-            </c:strRef>
-          </c:tx>
-          <c:cat>
-            <c:strRef>
-              <c:f>Sheet1!$A$2:$A$25</c:f>
-              <c:strCache>
-                <c:ptCount val="24"/>
-                <c:pt idx="0">
-                  <c:v>2021-01</c:v>
-                </c:pt>
-                <c:pt idx="1">
-                  <c:v>2021-02</c:v>
-                </c:pt>
-                <c:pt idx="2">
-                  <c:v>2021-03</c:v>
-                </c:pt>
-                <c:pt idx="3">
-                  <c:v>2021-04</c:v>
-                </c:pt>
-                <c:pt idx="4">
-                  <c:v>2021-05</c:v>
-                </c:pt>
-                <c:pt idx="5">
-                  <c:v>2021-06</c:v>
-                </c:pt>
-                <c:pt idx="6">
-                  <c:v>2021-07</c:v>
-                </c:pt>
-                <c:pt idx="7">
-                  <c:v>2021-08</c:v>
-                </c:pt>
-                <c:pt idx="8">
-                  <c:v>2021-09</c:v>
-                </c:pt>
-                <c:pt idx="9">
-                  <c:v>2021-10</c:v>
-                </c:pt>
-                <c:pt idx="10">
-                  <c:v>2021-11</c:v>
-                </c:pt>
-                <c:pt idx="11">
-                  <c:v>2021-12</c:v>
-                </c:pt>
-                <c:pt idx="12">
-                  <c:v>2022-01</c:v>
-                </c:pt>
-                <c:pt idx="13">
-                  <c:v>2022-02</c:v>
-                </c:pt>
-                <c:pt idx="14">
-                  <c:v>2022-03</c:v>
-                </c:pt>
-                <c:pt idx="15">
-                  <c:v>2022-04</c:v>
-                </c:pt>
-                <c:pt idx="16">
-                  <c:v>2022-05</c:v>
-                </c:pt>
-                <c:pt idx="17">
-                  <c:v>2022-06</c:v>
-                </c:pt>
-                <c:pt idx="18">
-                  <c:v>2022-07</c:v>
-                </c:pt>
-                <c:pt idx="19">
-                  <c:v>2022-08</c:v>
-                </c:pt>
-                <c:pt idx="20">
-                  <c:v>2022-09</c:v>
-                </c:pt>
-                <c:pt idx="21">
-                  <c:v>2022-10</c:v>
-                </c:pt>
-                <c:pt idx="22">
-                  <c:v>2022-11</c:v>
-                </c:pt>
-                <c:pt idx="23">
-                  <c:v>2022-12</c:v>
-                </c:pt>
-              </c:strCache>
-            </c:strRef>
-          </c:cat>
-          <c:val>
-            <c:numRef>
-              <c:f>Sheet1!$C$2:$C$25</c:f>
-              <c:numCache>
-                <c:formatCode>General</c:formatCode>
-                <c:ptCount val="24"/>
-                <c:pt idx="0">
-                  <c:v>28.1</c:v>
-                </c:pt>
-                <c:pt idx="1">
-                  <c:v>32.0</c:v>
-                </c:pt>
-                <c:pt idx="2">
-                  <c:v>32.5</c:v>
-                </c:pt>
-                <c:pt idx="3">
-                  <c:v>32.5</c:v>
-                </c:pt>
-                <c:pt idx="4">
-                  <c:v>31.4</c:v>
-                </c:pt>
-                <c:pt idx="5">
-                  <c:v>33.7</c:v>
-                </c:pt>
-                <c:pt idx="6">
-                  <c:v>33.3</c:v>
-                </c:pt>
-                <c:pt idx="7">
-                  <c:v>32.8</c:v>
-                </c:pt>
-                <c:pt idx="8">
-                  <c:v>31.9</c:v>
-                </c:pt>
-                <c:pt idx="9">
-                  <c:v>32.2</c:v>
-                </c:pt>
-                <c:pt idx="10">
-                  <c:v>33.6</c:v>
-                </c:pt>
-                <c:pt idx="11">
-                  <c:v>32.3</c:v>
-                </c:pt>
-                <c:pt idx="12">
-                  <c:v>21.5</c:v>
-                </c:pt>
-                <c:pt idx="13">
-                  <c:v>24.0</c:v>
-                </c:pt>
-                <c:pt idx="14">
-                  <c:v>23.9</c:v>
-                </c:pt>
-                <c:pt idx="15">
-                  <c:v>24.3</c:v>
-                </c:pt>
-                <c:pt idx="16">
-                  <c:v>23.8</c:v>
-                </c:pt>
-                <c:pt idx="17">
-                  <c:v>24.3</c:v>
-                </c:pt>
-                <c:pt idx="18">
-                  <c:v>24.1</c:v>
-                </c:pt>
-                <c:pt idx="19">
-                  <c:v>22.7</c:v>
-                </c:pt>
-                <c:pt idx="20">
-                  <c:v>22.8</c:v>
-                </c:pt>
-                <c:pt idx="21">
-                  <c:v>23.2</c:v>
-                </c:pt>
-                <c:pt idx="22">
-                  <c:v>22.9</c:v>
-                </c:pt>
-                <c:pt idx="23">
-                  <c:v>23.4</c:v>
+                  <c:v>1.56</c:v>
                 </c:pt>
               </c:numCache>
             </c:numRef>
@@ -770,422 +903,19 @@
       <c:legendPos val="b"/>
       <c:layout/>
       <c:overlay val="0"/>
+      <c:txPr>
+        <a:bodyPr/>
+        <a:lstStyle/>
+        <a:p>
+          <a:pPr>
+            <a:defRPr sz="1000"/>
+          </a:pPr>
+        </a:p>
+      </c:txPr>
     </c:legend>
     <c:plotVisOnly val="1"/>
     <c:dispBlanksAs val="gap"/>
     <c:showDLblsOverMax val="0"/>
-  </c:chart>
-  <c:txPr>
-    <a:bodyPr/>
-    <a:lstStyle/>
-    <a:p>
-      <a:pPr>
-        <a:defRPr sz="1800"/>
-      </a:pPr>
-      <a:endParaRPr lang="en-US"/>
-    </a:p>
-  </c:txPr>
-  <c:externalData r:id="rId1">
-    <c:autoUpdate val="0"/>
-  </c:externalData>
-</c:chartSpace>
-</file>
-
-<file path=ppt/charts/chart3.xml><?xml version="1.0" encoding="utf-8"?>
-<c:chartSpace xmlns:c="http://schemas.openxmlformats.org/drawingml/2006/chart" xmlns:a="http://schemas.openxmlformats.org/drawingml/2006/main" xmlns:r="http://schemas.openxmlformats.org/officeDocument/2006/relationships">
-  <c:date1904 val="0"/>
-  <c:chart>
-    <c:autoTitleDeleted val="0"/>
-    <c:plotArea>
-      <c:barChart>
-        <c:barDir val="bar"/>
-        <c:grouping val="clustered"/>
-        <c:ser>
-          <c:idx val="0"/>
-          <c:order val="0"/>
-          <c:tx>
-            <c:strRef>
-              <c:f>Sheet1!$B$1</c:f>
-              <c:strCache>
-                <c:ptCount val="1"/>
-                <c:pt idx="0">
-                  <c:v>Price effect ($k)</c:v>
-                </c:pt>
-              </c:strCache>
-            </c:strRef>
-          </c:tx>
-          <c:cat>
-            <c:strRef>
-              <c:f>Sheet1!$A$2:$A$7</c:f>
-              <c:strCache>
-                <c:ptCount val="6"/>
-                <c:pt idx="0">
-                  <c:v>Household</c:v>
-                </c:pt>
-                <c:pt idx="1">
-                  <c:v>Dining</c:v>
-                </c:pt>
-                <c:pt idx="2">
-                  <c:v>Kitchen</c:v>
-                </c:pt>
-                <c:pt idx="3">
-                  <c:v>Furniture</c:v>
-                </c:pt>
-                <c:pt idx="4">
-                  <c:v>Electronics</c:v>
-                </c:pt>
-                <c:pt idx="5">
-                  <c:v>Sports</c:v>
-                </c:pt>
-              </c:strCache>
-            </c:strRef>
-          </c:cat>
-          <c:val>
-            <c:numRef>
-              <c:f>Sheet1!$B$2:$B$7</c:f>
-              <c:numCache>
-                <c:formatCode>General</c:formatCode>
-                <c:ptCount val="6"/>
-                <c:pt idx="0">
-                  <c:v>101</c:v>
-                </c:pt>
-                <c:pt idx="1">
-                  <c:v>83</c:v>
-                </c:pt>
-                <c:pt idx="2">
-                  <c:v>60</c:v>
-                </c:pt>
-                <c:pt idx="3">
-                  <c:v>-4</c:v>
-                </c:pt>
-                <c:pt idx="4">
-                  <c:v>-193</c:v>
-                </c:pt>
-                <c:pt idx="5">
-                  <c:v>15</c:v>
-                </c:pt>
-              </c:numCache>
-            </c:numRef>
-          </c:val>
-        </c:ser>
-        <c:ser>
-          <c:idx val="1"/>
-          <c:order val="1"/>
-          <c:tx>
-            <c:strRef>
-              <c:f>Sheet1!$C$1</c:f>
-              <c:strCache>
-                <c:ptCount val="1"/>
-                <c:pt idx="0">
-                  <c:v>Volume effect ($k)</c:v>
-                </c:pt>
-              </c:strCache>
-            </c:strRef>
-          </c:tx>
-          <c:cat>
-            <c:strRef>
-              <c:f>Sheet1!$A$2:$A$7</c:f>
-              <c:strCache>
-                <c:ptCount val="6"/>
-                <c:pt idx="0">
-                  <c:v>Household</c:v>
-                </c:pt>
-                <c:pt idx="1">
-                  <c:v>Dining</c:v>
-                </c:pt>
-                <c:pt idx="2">
-                  <c:v>Kitchen</c:v>
-                </c:pt>
-                <c:pt idx="3">
-                  <c:v>Furniture</c:v>
-                </c:pt>
-                <c:pt idx="4">
-                  <c:v>Electronics</c:v>
-                </c:pt>
-                <c:pt idx="5">
-                  <c:v>Sports</c:v>
-                </c:pt>
-              </c:strCache>
-            </c:strRef>
-          </c:cat>
-          <c:val>
-            <c:numRef>
-              <c:f>Sheet1!$C$2:$C$7</c:f>
-              <c:numCache>
-                <c:formatCode>General</c:formatCode>
-                <c:ptCount val="6"/>
-                <c:pt idx="0">
-                  <c:v>228</c:v>
-                </c:pt>
-                <c:pt idx="1">
-                  <c:v>172</c:v>
-                </c:pt>
-                <c:pt idx="2">
-                  <c:v>145</c:v>
-                </c:pt>
-                <c:pt idx="3">
-                  <c:v>202</c:v>
-                </c:pt>
-                <c:pt idx="4">
-                  <c:v>380</c:v>
-                </c:pt>
-                <c:pt idx="5">
-                  <c:v>30</c:v>
-                </c:pt>
-              </c:numCache>
-            </c:numRef>
-          </c:val>
-        </c:ser>
-        <c:dLbls>
-          <c:txPr>
-            <a:bodyPr/>
-            <a:lstStyle/>
-            <a:p>
-              <a:pPr>
-                <a:defRPr sz="900"/>
-              </a:pPr>
-            </a:p>
-          </c:txPr>
-          <c:showLegendKey val="0"/>
-          <c:showVal val="1"/>
-          <c:showCatName val="0"/>
-          <c:showSerName val="0"/>
-          <c:showPercent val="0"/>
-          <c:showBubbleSize val="0"/>
-          <c:showLeaderLines val="1"/>
-        </c:dLbls>
-        <c:axId val="-2068027336"/>
-        <c:axId val="-2113994440"/>
-      </c:barChart>
-      <c:catAx>
-        <c:axId val="-2068027336"/>
-        <c:scaling>
-          <c:orientation val="minMax"/>
-        </c:scaling>
-        <c:delete val="0"/>
-        <c:axPos val="l"/>
-        <c:majorTickMark val="out"/>
-        <c:minorTickMark val="none"/>
-        <c:tickLblPos val="nextTo"/>
-        <c:crossAx val="-2113994440"/>
-        <c:crosses val="autoZero"/>
-        <c:auto val="1"/>
-        <c:lblAlgn val="ctr"/>
-        <c:lblOffset val="100"/>
-        <c:noMultiLvlLbl val="0"/>
-      </c:catAx>
-      <c:valAx>
-        <c:axId val="-2113994440"/>
-        <c:scaling/>
-        <c:delete val="0"/>
-        <c:axPos val="b"/>
-        <c:majorGridlines/>
-        <c:majorTickMark val="out"/>
-        <c:minorTickMark val="none"/>
-        <c:tickLblPos val="nextTo"/>
-        <c:crossAx val="-2068027336"/>
-        <c:crosses val="autoZero"/>
-      </c:valAx>
-    </c:plotArea>
-    <c:legend>
-      <c:legendPos val="b"/>
-      <c:overlay val="0"/>
-    </c:legend>
-    <c:dispBlanksAs val="gap"/>
-  </c:chart>
-  <c:txPr>
-    <a:bodyPr/>
-    <a:lstStyle/>
-    <a:p>
-      <a:pPr>
-        <a:defRPr sz="1800"/>
-      </a:pPr>
-      <a:endParaRPr lang="en-US"/>
-    </a:p>
-  </c:txPr>
-  <c:externalData r:id="rId1">
-    <c:autoUpdate val="0"/>
-  </c:externalData>
-</c:chartSpace>
-</file>
-
-<file path=ppt/charts/chart4.xml><?xml version="1.0" encoding="utf-8"?>
-<c:chartSpace xmlns:c="http://schemas.openxmlformats.org/drawingml/2006/chart" xmlns:a="http://schemas.openxmlformats.org/drawingml/2006/main" xmlns:r="http://schemas.openxmlformats.org/officeDocument/2006/relationships">
-  <c:date1904 val="0"/>
-  <c:chart>
-    <c:autoTitleDeleted val="0"/>
-    <c:plotArea>
-      <c:barChart>
-        <c:barDir val="col"/>
-        <c:grouping val="clustered"/>
-        <c:ser>
-          <c:idx val="0"/>
-          <c:order val="0"/>
-          <c:tx>
-            <c:strRef>
-              <c:f>Sheet1!$B$1</c:f>
-              <c:strCache>
-                <c:ptCount val="1"/>
-                <c:pt idx="0">
-                  <c:v>Net Sales 2022 ($k)</c:v>
-                </c:pt>
-              </c:strCache>
-            </c:strRef>
-          </c:tx>
-          <c:cat>
-            <c:strRef>
-              <c:f>Sheet1!$A$2:$A$5</c:f>
-              <c:strCache>
-                <c:ptCount val="4"/>
-                <c:pt idx="0">
-                  <c:v>West</c:v>
-                </c:pt>
-                <c:pt idx="1">
-                  <c:v>Midwest</c:v>
-                </c:pt>
-                <c:pt idx="2">
-                  <c:v>South</c:v>
-                </c:pt>
-                <c:pt idx="3">
-                  <c:v>Northeast</c:v>
-                </c:pt>
-              </c:strCache>
-            </c:strRef>
-          </c:cat>
-          <c:val>
-            <c:numRef>
-              <c:f>Sheet1!$B$2:$B$5</c:f>
-              <c:numCache>
-                <c:formatCode>General</c:formatCode>
-                <c:ptCount val="4"/>
-                <c:pt idx="0">
-                  <c:v>7608</c:v>
-                </c:pt>
-                <c:pt idx="1">
-                  <c:v>2042</c:v>
-                </c:pt>
-                <c:pt idx="2">
-                  <c:v>1694</c:v>
-                </c:pt>
-                <c:pt idx="3">
-                  <c:v>1435</c:v>
-                </c:pt>
-              </c:numCache>
-            </c:numRef>
-          </c:val>
-        </c:ser>
-        <c:ser>
-          <c:idx val="1"/>
-          <c:order val="1"/>
-          <c:tx>
-            <c:strRef>
-              <c:f>Sheet1!$C$1</c:f>
-              <c:strCache>
-                <c:ptCount val="1"/>
-                <c:pt idx="0">
-                  <c:v>Store contribution 2022 ($k)</c:v>
-                </c:pt>
-              </c:strCache>
-            </c:strRef>
-          </c:tx>
-          <c:cat>
-            <c:strRef>
-              <c:f>Sheet1!$A$2:$A$5</c:f>
-              <c:strCache>
-                <c:ptCount val="4"/>
-                <c:pt idx="0">
-                  <c:v>West</c:v>
-                </c:pt>
-                <c:pt idx="1">
-                  <c:v>Midwest</c:v>
-                </c:pt>
-                <c:pt idx="2">
-                  <c:v>South</c:v>
-                </c:pt>
-                <c:pt idx="3">
-                  <c:v>Northeast</c:v>
-                </c:pt>
-              </c:strCache>
-            </c:strRef>
-          </c:cat>
-          <c:val>
-            <c:numRef>
-              <c:f>Sheet1!$C$2:$C$5</c:f>
-              <c:numCache>
-                <c:formatCode>General</c:formatCode>
-                <c:ptCount val="4"/>
-                <c:pt idx="0">
-                  <c:v>1826</c:v>
-                </c:pt>
-                <c:pt idx="1">
-                  <c:v>-150</c:v>
-                </c:pt>
-                <c:pt idx="2">
-                  <c:v>-128</c:v>
-                </c:pt>
-                <c:pt idx="3">
-                  <c:v>-121</c:v>
-                </c:pt>
-              </c:numCache>
-            </c:numRef>
-          </c:val>
-        </c:ser>
-        <c:dLbls>
-          <c:txPr>
-            <a:bodyPr/>
-            <a:lstStyle/>
-            <a:p>
-              <a:pPr>
-                <a:defRPr sz="900"/>
-              </a:pPr>
-            </a:p>
-          </c:txPr>
-          <c:showLegendKey val="0"/>
-          <c:showVal val="1"/>
-          <c:showCatName val="0"/>
-          <c:showSerName val="0"/>
-          <c:showPercent val="0"/>
-          <c:showBubbleSize val="0"/>
-          <c:showLeaderLines val="1"/>
-        </c:dLbls>
-        <c:axId val="-2068027336"/>
-        <c:axId val="-2113994440"/>
-      </c:barChart>
-      <c:catAx>
-        <c:axId val="-2068027336"/>
-        <c:scaling>
-          <c:orientation val="minMax"/>
-        </c:scaling>
-        <c:delete val="0"/>
-        <c:axPos val="b"/>
-        <c:majorTickMark val="out"/>
-        <c:minorTickMark val="none"/>
-        <c:tickLblPos val="nextTo"/>
-        <c:crossAx val="-2113994440"/>
-        <c:crosses val="autoZero"/>
-        <c:auto val="1"/>
-        <c:lblAlgn val="ctr"/>
-        <c:lblOffset val="100"/>
-        <c:noMultiLvlLbl val="0"/>
-      </c:catAx>
-      <c:valAx>
-        <c:axId val="-2113994440"/>
-        <c:scaling/>
-        <c:delete val="0"/>
-        <c:axPos val="l"/>
-        <c:majorGridlines/>
-        <c:majorTickMark val="out"/>
-        <c:minorTickMark val="none"/>
-        <c:tickLblPos val="nextTo"/>
-        <c:crossAx val="-2068027336"/>
-        <c:crosses val="autoZero"/>
-      </c:valAx>
-    </c:plotArea>
-    <c:legend>
-      <c:legendPos val="b"/>
-      <c:overlay val="0"/>
-    </c:legend>
-    <c:dispBlanksAs val="gap"/>
   </c:chart>
   <c:txPr>
     <a:bodyPr/>
@@ -1598,7 +1328,77 @@
           <a:lstStyle/>
           <a:p>
             <a:r>
-              <a:t>Lead with the two gems: Furniture landed-cost shock and store profitability. Everything else supports.</a:t>
+              <a:t>Lead with 1 and 2. Both are pricing decisions; 3 is the process fix; 4 is the warning against the obvious but wrong reading of the store numbers.</a:t>
+            </a:r>
+          </a:p>
+        </p:txBody>
+      </p:sp>
+      <p:sp>
+        <p:nvSpPr>
+          <p:cNvPr id="4" name="Slide Number Placeholder 3"/>
+          <p:cNvSpPr>
+            <a:spLocks noGrp="1"/>
+          </p:cNvSpPr>
+          <p:nvPr>
+            <p:ph type="sldNum" idx="5" sz="quarter"/>
+          </p:nvPr>
+        </p:nvSpPr>
+        <p:spPr/>
+      </p:sp>
+    </p:spTree>
+  </p:cSld>
+  <p:clrMapOvr>
+    <a:masterClrMapping/>
+  </p:clrMapOvr>
+</p:notes>
+</file>
+
+<file path=ppt/notesSlides/notesSlide2.xml><?xml version="1.0" encoding="utf-8"?>
+<p:notes xmlns:a="http://schemas.openxmlformats.org/drawingml/2006/main" xmlns:p="http://schemas.openxmlformats.org/presentationml/2006/main" xmlns:r="http://schemas.openxmlformats.org/officeDocument/2006/relationships">
+  <p:cSld>
+    <p:spTree>
+      <p:nvGrpSpPr>
+        <p:cNvPr id="1" name=""/>
+        <p:cNvGrpSpPr/>
+        <p:nvPr/>
+      </p:nvGrpSpPr>
+      <p:grpSpPr>
+        <a:xfrm>
+          <a:off x="0" y="0"/>
+          <a:ext cx="0" cy="0"/>
+          <a:chOff x="0" y="0"/>
+          <a:chExt cx="0" cy="0"/>
+        </a:xfrm>
+      </p:grpSpPr>
+      <p:sp>
+        <p:nvSpPr>
+          <p:cNvPr id="2" name="Slide Image Placeholder 1"/>
+          <p:cNvSpPr>
+            <a:spLocks noGrp="1"/>
+          </p:cNvSpPr>
+          <p:nvPr>
+            <p:ph type="sldImg" idx="2"/>
+          </p:nvPr>
+        </p:nvSpPr>
+        <p:spPr/>
+      </p:sp>
+      <p:sp>
+        <p:nvSpPr>
+          <p:cNvPr id="3" name="Notes Placeholder 2"/>
+          <p:cNvSpPr>
+            <a:spLocks noGrp="1"/>
+          </p:cNvSpPr>
+          <p:nvPr>
+            <p:ph type="body" idx="3" sz="quarter"/>
+          </p:nvPr>
+        </p:nvSpPr>
+        <p:spPr/>
+        <p:txBody>
+          <a:bodyPr/>
+          <a:lstStyle/>
+          <a:p>
+            <a:r>
+              <a:t>This is the structural finding. Ranking regions without it makes the West look well run; it is priced higher.</a:t>
             </a:r>
           </a:p>
         </p:txBody>
@@ -4634,7 +4434,7 @@
               </a:defRPr>
             </a:pPr>
             <a:r>
-              <a:t>2022 Sales Review: growing sales, not growing profit</a:t>
+              <a:t>2022: sales grew 11%, profit did not</a:t>
             </a:r>
           </a:p>
           <a:p>
@@ -4646,7 +4446,7 @@
               </a:defRPr>
             </a:pPr>
             <a:r>
-              <a:t>CEO review + dbt transformation pipeline  |  Data: consolidated_transactions extract, Jan-2019 to Dec-2022</a:t>
+              <a:t>CEO sales review + dbt transformation pipeline  |  consolidated_transactions extract, Jan-2019 to Dec-2022</a:t>
             </a:r>
           </a:p>
         </p:txBody>
@@ -4675,34 +4475,45 @@
           <a:p>
             <a:pPr>
               <a:spcAft>
-                <a:spcPts val="600"/>
+                <a:spcPts val="500"/>
               </a:spcAft>
               <a:defRPr sz="2000"/>
             </a:pPr>
             <a:r>
-              <a:t>• Net Sales $12.79M in 2022, +10.7% YoY — but Gross Margin only +0.6%</a:t>
+              <a:t>• Net Sales $12.79M (+10.7%), Gross Margin $4.78M (+0.6%), store contribution $1.43M (-8.2%)</a:t>
             </a:r>
           </a:p>
           <a:p>
             <a:pPr>
               <a:spcAft>
-                <a:spcPts val="600"/>
+                <a:spcPts val="500"/>
               </a:spcAft>
               <a:defRPr sz="2000"/>
             </a:pPr>
             <a:r>
-              <a:t>• Two issues the board should see: Furniture is now sold at ~cost, and 63% of stores lose money after direct opex</a:t>
+              <a:t>• Growth came from volume and from more sales in California, not from pricing</a:t>
             </a:r>
           </a:p>
           <a:p>
             <a:pPr>
               <a:spcAft>
-                <a:spcPts val="600"/>
+                <a:spcPts val="500"/>
               </a:spcAft>
               <a:defRPr sz="2000"/>
             </a:pPr>
             <a:r>
-              <a:t>• All figures from dbt marts (fct_sales -&gt; mart_*), landed cost basis, store opex treated as annual</a:t>
+              <a:t>• Furniture cost rose ~36% in Jan-2022 and was never passed into prices: sold below cost outside California</a:t>
+            </a:r>
+          </a:p>
+          <a:p>
+            <a:pPr>
+              <a:spcAft>
+                <a:spcPts val="500"/>
+              </a:spcAft>
+              <a:defRPr sz="2000"/>
+            </a:pPr>
+            <a:r>
+              <a:t>• Margin is set by the store price list: California earns 55.9% GM, the other price lists 23.6% or less</a:t>
             </a:r>
           </a:p>
         </p:txBody>
@@ -4755,7 +4566,7 @@
               </a:defRPr>
             </a:pPr>
             <a:r>
-              <a:t>Gem #2: 182 of 287 stores lose money after direct opex</a:t>
+              <a:t>Furniture: a ~36% cost rise in Jan-2022 that pricing never passed on</a:t>
             </a:r>
           </a:p>
           <a:p>
@@ -4767,7 +4578,7 @@
               </a:defRPr>
             </a:pPr>
             <a:r>
-              <a:t>The West (mainly California) carries the business; Northeast turned negative in 2022</a:t>
+              <a:t>Furniture GM $659k (2021) -&gt; $167k (2022); outside California it now sells below cost</a:t>
             </a:r>
           </a:p>
         </p:txBody>
@@ -4782,7 +4593,7 @@
         </p:nvGraphicFramePr>
         <p:xfrm>
           <a:off x="365760" y="1371600"/>
-          <a:ext cx="5669280" cy="3657600"/>
+          <a:ext cx="6035040" cy="4206240"/>
         </p:xfrm>
         <a:graphic>
           <a:graphicData uri="http://schemas.openxmlformats.org/drawingml/2006/chart">
@@ -4799,8 +4610,8 @@
           <p:nvPr/>
         </p:nvGraphicFramePr>
         <p:xfrm>
-          <a:off x="548640" y="5120640"/>
-          <a:ext cx="5303520" cy="1371600"/>
+          <a:off x="6583680" y="1371600"/>
+          <a:ext cx="5394960" cy="1463040"/>
         </p:xfrm>
         <a:graphic>
           <a:graphicData uri="http://schemas.openxmlformats.org/drawingml/2006/table">
@@ -4809,11 +4620,13 @@
                 <a:tableStyleId>{5C22544A-7EE6-4342-B048-85BDC9FD1C3A}</a:tableStyleId>
               </a:tblPr>
               <a:tblGrid>
-                <a:gridCol w="1767840"/>
-                <a:gridCol w="1767840"/>
-                <a:gridCol w="1767840"/>
+                <a:gridCol w="1554480"/>
+                <a:gridCol w="1005840"/>
+                <a:gridCol w="1005840"/>
+                <a:gridCol w="914400"/>
+                <a:gridCol w="914400"/>
               </a:tblGrid>
-              <a:tr h="274320">
+              <a:tr h="365760">
                 <a:tc>
                   <a:txBody>
                     <a:bodyPr/>
@@ -4823,7 +4636,7 @@
                         <a:defRPr sz="1100" b="1"/>
                       </a:pPr>
                       <a:r>
-                        <a:t>Region</a:t>
+                        <a:t>Furniture by price list</a:t>
                       </a:r>
                     </a:p>
                   </a:txBody>
@@ -4838,7 +4651,7 @@
                         <a:defRPr sz="1100" b="1"/>
                       </a:pPr>
                       <a:r>
-                        <a:t>Stores</a:t>
+                        <a:t>Price ÷ cost 2021</a:t>
                       </a:r>
                     </a:p>
                   </a:txBody>
@@ -4853,195 +4666,268 @@
                         <a:defRPr sz="1100" b="1"/>
                       </a:pPr>
                       <a:r>
-                        <a:t>Loss-making</a:t>
+                        <a:t>Price ÷ cost 2022</a:t>
+                      </a:r>
+                    </a:p>
+                  </a:txBody>
+                  <a:tcPr/>
+                </a:tc>
+                <a:tc>
+                  <a:txBody>
+                    <a:bodyPr/>
+                    <a:lstStyle/>
+                    <a:p>
+                      <a:pPr>
+                        <a:defRPr sz="1100" b="1"/>
+                      </a:pPr>
+                      <a:r>
+                        <a:t>GM 2021</a:t>
+                      </a:r>
+                    </a:p>
+                  </a:txBody>
+                  <a:tcPr/>
+                </a:tc>
+                <a:tc>
+                  <a:txBody>
+                    <a:bodyPr/>
+                    <a:lstStyle/>
+                    <a:p>
+                      <a:pPr>
+                        <a:defRPr sz="1100" b="1"/>
+                      </a:pPr>
+                      <a:r>
+                        <a:t>GM 2022</a:t>
                       </a:r>
                     </a:p>
                   </a:txBody>
                   <a:tcPr/>
                 </a:tc>
               </a:tr>
-              <a:tr h="274320">
-                <a:tc>
-                  <a:txBody>
-                    <a:bodyPr/>
-                    <a:lstStyle/>
-                    <a:p>
-                      <a:pPr>
-                        <a:defRPr sz="1100" b="0"/>
-                      </a:pPr>
-                      <a:r>
-                        <a:t>West</a:t>
-                      </a:r>
-                    </a:p>
-                  </a:txBody>
-                  <a:tcPr/>
-                </a:tc>
-                <a:tc>
-                  <a:txBody>
-                    <a:bodyPr/>
-                    <a:lstStyle/>
-                    <a:p>
-                      <a:pPr>
-                        <a:defRPr sz="1100" b="0"/>
-                      </a:pPr>
-                      <a:r>
-                        <a:t>126</a:t>
-                      </a:r>
-                    </a:p>
-                  </a:txBody>
-                  <a:tcPr/>
-                </a:tc>
-                <a:tc>
-                  <a:txBody>
-                    <a:bodyPr/>
-                    <a:lstStyle/>
-                    <a:p>
-                      <a:pPr>
-                        <a:defRPr sz="1100" b="0"/>
-                      </a:pPr>
-                      <a:r>
-                        <a:t>49</a:t>
+              <a:tr h="365760">
+                <a:tc>
+                  <a:txBody>
+                    <a:bodyPr/>
+                    <a:lstStyle/>
+                    <a:p>
+                      <a:pPr>
+                        <a:defRPr sz="1100" b="0"/>
+                      </a:pPr>
+                      <a:r>
+                        <a:t>Premium (1.00)</a:t>
+                      </a:r>
+                    </a:p>
+                  </a:txBody>
+                  <a:tcPr/>
+                </a:tc>
+                <a:tc>
+                  <a:txBody>
+                    <a:bodyPr/>
+                    <a:lstStyle/>
+                    <a:p>
+                      <a:pPr>
+                        <a:defRPr sz="1100" b="0"/>
+                      </a:pPr>
+                      <a:r>
+                        <a:t>2.12</a:t>
+                      </a:r>
+                    </a:p>
+                  </a:txBody>
+                  <a:tcPr/>
+                </a:tc>
+                <a:tc>
+                  <a:txBody>
+                    <a:bodyPr/>
+                    <a:lstStyle/>
+                    <a:p>
+                      <a:pPr>
+                        <a:defRPr sz="1100" b="0"/>
+                      </a:pPr>
+                      <a:r>
+                        <a:t>1.54</a:t>
+                      </a:r>
+                    </a:p>
+                  </a:txBody>
+                  <a:tcPr/>
+                </a:tc>
+                <a:tc>
+                  <a:txBody>
+                    <a:bodyPr/>
+                    <a:lstStyle/>
+                    <a:p>
+                      <a:pPr>
+                        <a:defRPr sz="1100" b="0"/>
+                      </a:pPr>
+                      <a:r>
+                        <a:t>$442k</a:t>
+                      </a:r>
+                    </a:p>
+                  </a:txBody>
+                  <a:tcPr/>
+                </a:tc>
+                <a:tc>
+                  <a:txBody>
+                    <a:bodyPr/>
+                    <a:lstStyle/>
+                    <a:p>
+                      <a:pPr>
+                        <a:defRPr sz="1100" b="0"/>
+                      </a:pPr>
+                      <a:r>
+                        <a:t>$336k</a:t>
                       </a:r>
                     </a:p>
                   </a:txBody>
                   <a:tcPr/>
                 </a:tc>
               </a:tr>
-              <a:tr h="274320">
-                <a:tc>
-                  <a:txBody>
-                    <a:bodyPr/>
-                    <a:lstStyle/>
-                    <a:p>
-                      <a:pPr>
-                        <a:defRPr sz="1100" b="0"/>
-                      </a:pPr>
-                      <a:r>
-                        <a:t>Midwest</a:t>
-                      </a:r>
-                    </a:p>
-                  </a:txBody>
-                  <a:tcPr/>
-                </a:tc>
-                <a:tc>
-                  <a:txBody>
-                    <a:bodyPr/>
-                    <a:lstStyle/>
-                    <a:p>
-                      <a:pPr>
-                        <a:defRPr sz="1100" b="0"/>
-                      </a:pPr>
-                      <a:r>
-                        <a:t>78</a:t>
-                      </a:r>
-                    </a:p>
-                  </a:txBody>
-                  <a:tcPr/>
-                </a:tc>
-                <a:tc>
-                  <a:txBody>
-                    <a:bodyPr/>
-                    <a:lstStyle/>
-                    <a:p>
-                      <a:pPr>
-                        <a:defRPr sz="1100" b="0"/>
-                      </a:pPr>
-                      <a:r>
-                        <a:t>63</a:t>
+              <a:tr h="365760">
+                <a:tc>
+                  <a:txBody>
+                    <a:bodyPr/>
+                    <a:lstStyle/>
+                    <a:p>
+                      <a:pPr>
+                        <a:defRPr sz="1100" b="0"/>
+                      </a:pPr>
+                      <a:r>
+                        <a:t>Base (0.59)</a:t>
+                      </a:r>
+                    </a:p>
+                  </a:txBody>
+                  <a:tcPr/>
+                </a:tc>
+                <a:tc>
+                  <a:txBody>
+                    <a:bodyPr/>
+                    <a:lstStyle/>
+                    <a:p>
+                      <a:pPr>
+                        <a:defRPr sz="1100" b="0"/>
+                      </a:pPr>
+                      <a:r>
+                        <a:t>1.23</a:t>
+                      </a:r>
+                    </a:p>
+                  </a:txBody>
+                  <a:tcPr/>
+                </a:tc>
+                <a:tc>
+                  <a:txBody>
+                    <a:bodyPr/>
+                    <a:lstStyle/>
+                    <a:p>
+                      <a:pPr>
+                        <a:defRPr sz="1100" b="0"/>
+                      </a:pPr>
+                      <a:r>
+                        <a:t>0.89</a:t>
+                      </a:r>
+                    </a:p>
+                  </a:txBody>
+                  <a:tcPr/>
+                </a:tc>
+                <a:tc>
+                  <a:txBody>
+                    <a:bodyPr/>
+                    <a:lstStyle/>
+                    <a:p>
+                      <a:pPr>
+                        <a:defRPr sz="1100" b="0"/>
+                      </a:pPr>
+                      <a:r>
+                        <a:t>$209k</a:t>
+                      </a:r>
+                    </a:p>
+                  </a:txBody>
+                  <a:tcPr/>
+                </a:tc>
+                <a:tc>
+                  <a:txBody>
+                    <a:bodyPr/>
+                    <a:lstStyle/>
+                    <a:p>
+                      <a:pPr>
+                        <a:defRPr sz="1100" b="0"/>
+                      </a:pPr>
+                      <a:r>
+                        <a:t>-$151k</a:t>
                       </a:r>
                     </a:p>
                   </a:txBody>
                   <a:tcPr/>
                 </a:tc>
               </a:tr>
-              <a:tr h="274320">
-                <a:tc>
-                  <a:txBody>
-                    <a:bodyPr/>
-                    <a:lstStyle/>
-                    <a:p>
-                      <a:pPr>
-                        <a:defRPr sz="1100" b="0"/>
-                      </a:pPr>
-                      <a:r>
-                        <a:t>South</a:t>
-                      </a:r>
-                    </a:p>
-                  </a:txBody>
-                  <a:tcPr/>
-                </a:tc>
-                <a:tc>
-                  <a:txBody>
-                    <a:bodyPr/>
-                    <a:lstStyle/>
-                    <a:p>
-                      <a:pPr>
-                        <a:defRPr sz="1100" b="0"/>
-                      </a:pPr>
-                      <a:r>
-                        <a:t>52</a:t>
-                      </a:r>
-                    </a:p>
-                  </a:txBody>
-                  <a:tcPr/>
-                </a:tc>
-                <a:tc>
-                  <a:txBody>
-                    <a:bodyPr/>
-                    <a:lstStyle/>
-                    <a:p>
-                      <a:pPr>
-                        <a:defRPr sz="1100" b="0"/>
-                      </a:pPr>
-                      <a:r>
-                        <a:t>41</a:t>
-                      </a:r>
-                    </a:p>
-                  </a:txBody>
-                  <a:tcPr/>
-                </a:tc>
-              </a:tr>
-              <a:tr h="274320">
-                <a:tc>
-                  <a:txBody>
-                    <a:bodyPr/>
-                    <a:lstStyle/>
-                    <a:p>
-                      <a:pPr>
-                        <a:defRPr sz="1100" b="0"/>
-                      </a:pPr>
-                      <a:r>
-                        <a:t>Northeast</a:t>
-                      </a:r>
-                    </a:p>
-                  </a:txBody>
-                  <a:tcPr/>
-                </a:tc>
-                <a:tc>
-                  <a:txBody>
-                    <a:bodyPr/>
-                    <a:lstStyle/>
-                    <a:p>
-                      <a:pPr>
-                        <a:defRPr sz="1100" b="0"/>
-                      </a:pPr>
-                      <a:r>
-                        <a:t>31</a:t>
-                      </a:r>
-                    </a:p>
-                  </a:txBody>
-                  <a:tcPr/>
-                </a:tc>
-                <a:tc>
-                  <a:txBody>
-                    <a:bodyPr/>
-                    <a:lstStyle/>
-                    <a:p>
-                      <a:pPr>
-                        <a:defRPr sz="1100" b="0"/>
-                      </a:pPr>
-                      <a:r>
-                        <a:t>29</a:t>
+              <a:tr h="365760">
+                <a:tc>
+                  <a:txBody>
+                    <a:bodyPr/>
+                    <a:lstStyle/>
+                    <a:p>
+                      <a:pPr>
+                        <a:defRPr sz="1100" b="0"/>
+                      </a:pPr>
+                      <a:r>
+                        <a:t>Township (0.53)</a:t>
+                      </a:r>
+                    </a:p>
+                  </a:txBody>
+                  <a:tcPr/>
+                </a:tc>
+                <a:tc>
+                  <a:txBody>
+                    <a:bodyPr/>
+                    <a:lstStyle/>
+                    <a:p>
+                      <a:pPr>
+                        <a:defRPr sz="1100" b="0"/>
+                      </a:pPr>
+                      <a:r>
+                        <a:t>1.12</a:t>
+                      </a:r>
+                    </a:p>
+                  </a:txBody>
+                  <a:tcPr/>
+                </a:tc>
+                <a:tc>
+                  <a:txBody>
+                    <a:bodyPr/>
+                    <a:lstStyle/>
+                    <a:p>
+                      <a:pPr>
+                        <a:defRPr sz="1100" b="0"/>
+                      </a:pPr>
+                      <a:r>
+                        <a:t>0.81</a:t>
+                      </a:r>
+                    </a:p>
+                  </a:txBody>
+                  <a:tcPr/>
+                </a:tc>
+                <a:tc>
+                  <a:txBody>
+                    <a:bodyPr/>
+                    <a:lstStyle/>
+                    <a:p>
+                      <a:pPr>
+                        <a:defRPr sz="1100" b="0"/>
+                      </a:pPr>
+                      <a:r>
+                        <a:t>$7k</a:t>
+                      </a:r>
+                    </a:p>
+                  </a:txBody>
+                  <a:tcPr/>
+                </a:tc>
+                <a:tc>
+                  <a:txBody>
+                    <a:bodyPr/>
+                    <a:lstStyle/>
+                    <a:p>
+                      <a:pPr>
+                        <a:defRPr sz="1100" b="0"/>
+                      </a:pPr>
+                      <a:r>
+                        <a:t>-$17k</a:t>
                       </a:r>
                     </a:p>
                   </a:txBody>
@@ -5052,416 +4938,16 @@
           </a:graphicData>
         </a:graphic>
       </p:graphicFrame>
-      <p:graphicFrame>
-        <p:nvGraphicFramePr>
-          <p:cNvPr id="5" name="Table 4"/>
-          <p:cNvGraphicFramePr>
-            <a:graphicFrameLocks noGrp="1"/>
-          </p:cNvGraphicFramePr>
-          <p:nvPr/>
-        </p:nvGraphicFramePr>
-        <p:xfrm>
-          <a:off x="6309360" y="1371600"/>
-          <a:ext cx="5577840" cy="1810512"/>
-        </p:xfrm>
-        <a:graphic>
-          <a:graphicData uri="http://schemas.openxmlformats.org/drawingml/2006/table">
-            <a:tbl>
-              <a:tblPr firstRow="1" bandRow="1">
-                <a:tableStyleId>{5C22544A-7EE6-4342-B048-85BDC9FD1C3A}</a:tableStyleId>
-              </a:tblPr>
-              <a:tblGrid>
-                <a:gridCol w="2377440"/>
-                <a:gridCol w="1097280"/>
-                <a:gridCol w="1097280"/>
-                <a:gridCol w="1005840"/>
-              </a:tblGrid>
-              <a:tr h="301752">
-                <a:tc>
-                  <a:txBody>
-                    <a:bodyPr/>
-                    <a:lstStyle/>
-                    <a:p>
-                      <a:pPr>
-                        <a:defRPr sz="1100" b="1"/>
-                      </a:pPr>
-                      <a:r>
-                        <a:t>Top stores 2022</a:t>
-                      </a:r>
-                    </a:p>
-                  </a:txBody>
-                  <a:tcPr/>
-                </a:tc>
-                <a:tc>
-                  <a:txBody>
-                    <a:bodyPr/>
-                    <a:lstStyle/>
-                    <a:p>
-                      <a:pPr>
-                        <a:defRPr sz="1100" b="1"/>
-                      </a:pPr>
-                      <a:r>
-                        <a:t>Sales</a:t>
-                      </a:r>
-                    </a:p>
-                  </a:txBody>
-                  <a:tcPr/>
-                </a:tc>
-                <a:tc>
-                  <a:txBody>
-                    <a:bodyPr/>
-                    <a:lstStyle/>
-                    <a:p>
-                      <a:pPr>
-                        <a:defRPr sz="1100" b="1"/>
-                      </a:pPr>
-                      <a:r>
-                        <a:t>Contrib.</a:t>
-                      </a:r>
-                    </a:p>
-                  </a:txBody>
-                  <a:tcPr/>
-                </a:tc>
-                <a:tc>
-                  <a:txBody>
-                    <a:bodyPr/>
-                    <a:lstStyle/>
-                    <a:p>
-                      <a:pPr>
-                        <a:defRPr sz="1100" b="1"/>
-                      </a:pPr>
-                      <a:r>
-                        <a:t>YoY</a:t>
-                      </a:r>
-                    </a:p>
-                  </a:txBody>
-                  <a:tcPr/>
-                </a:tc>
-              </a:tr>
-              <a:tr h="301752">
-                <a:tc>
-                  <a:txBody>
-                    <a:bodyPr/>
-                    <a:lstStyle/>
-                    <a:p>
-                      <a:pPr>
-                        <a:defRPr sz="1100" b="0"/>
-                      </a:pPr>
-                      <a:r>
-                        <a:t>Los Angeles, CA</a:t>
-                      </a:r>
-                    </a:p>
-                  </a:txBody>
-                  <a:tcPr/>
-                </a:tc>
-                <a:tc>
-                  <a:txBody>
-                    <a:bodyPr/>
-                    <a:lstStyle/>
-                    <a:p>
-                      <a:pPr>
-                        <a:defRPr sz="1100" b="0"/>
-                      </a:pPr>
-                      <a:r>
-                        <a:t>$1,035k</a:t>
-                      </a:r>
-                    </a:p>
-                  </a:txBody>
-                  <a:tcPr/>
-                </a:tc>
-                <a:tc>
-                  <a:txBody>
-                    <a:bodyPr/>
-                    <a:lstStyle/>
-                    <a:p>
-                      <a:pPr>
-                        <a:defRPr sz="1100" b="0"/>
-                      </a:pPr>
-                      <a:r>
-                        <a:t>$527k</a:t>
-                      </a:r>
-                    </a:p>
-                  </a:txBody>
-                  <a:tcPr/>
-                </a:tc>
-                <a:tc>
-                  <a:txBody>
-                    <a:bodyPr/>
-                    <a:lstStyle/>
-                    <a:p>
-                      <a:pPr>
-                        <a:defRPr sz="1100" b="0"/>
-                      </a:pPr>
-                      <a:r>
-                        <a:t>+8.6%</a:t>
-                      </a:r>
-                    </a:p>
-                  </a:txBody>
-                  <a:tcPr/>
-                </a:tc>
-              </a:tr>
-              <a:tr h="301752">
-                <a:tc>
-                  <a:txBody>
-                    <a:bodyPr/>
-                    <a:lstStyle/>
-                    <a:p>
-                      <a:pPr>
-                        <a:defRPr sz="1100" b="0"/>
-                      </a:pPr>
-                      <a:r>
-                        <a:t>San Francisco, CA</a:t>
-                      </a:r>
-                    </a:p>
-                  </a:txBody>
-                  <a:tcPr/>
-                </a:tc>
-                <a:tc>
-                  <a:txBody>
-                    <a:bodyPr/>
-                    <a:lstStyle/>
-                    <a:p>
-                      <a:pPr>
-                        <a:defRPr sz="1100" b="0"/>
-                      </a:pPr>
-                      <a:r>
-                        <a:t>$463k</a:t>
-                      </a:r>
-                    </a:p>
-                  </a:txBody>
-                  <a:tcPr/>
-                </a:tc>
-                <a:tc>
-                  <a:txBody>
-                    <a:bodyPr/>
-                    <a:lstStyle/>
-                    <a:p>
-                      <a:pPr>
-                        <a:defRPr sz="1100" b="0"/>
-                      </a:pPr>
-                      <a:r>
-                        <a:t>$238k</a:t>
-                      </a:r>
-                    </a:p>
-                  </a:txBody>
-                  <a:tcPr/>
-                </a:tc>
-                <a:tc>
-                  <a:txBody>
-                    <a:bodyPr/>
-                    <a:lstStyle/>
-                    <a:p>
-                      <a:pPr>
-                        <a:defRPr sz="1100" b="0"/>
-                      </a:pPr>
-                      <a:r>
-                        <a:t>+15.0%</a:t>
-                      </a:r>
-                    </a:p>
-                  </a:txBody>
-                  <a:tcPr/>
-                </a:tc>
-              </a:tr>
-              <a:tr h="301752">
-                <a:tc>
-                  <a:txBody>
-                    <a:bodyPr/>
-                    <a:lstStyle/>
-                    <a:p>
-                      <a:pPr>
-                        <a:defRPr sz="1100" b="0"/>
-                      </a:pPr>
-                      <a:r>
-                        <a:t>San Diego, CA</a:t>
-                      </a:r>
-                    </a:p>
-                  </a:txBody>
-                  <a:tcPr/>
-                </a:tc>
-                <a:tc>
-                  <a:txBody>
-                    <a:bodyPr/>
-                    <a:lstStyle/>
-                    <a:p>
-                      <a:pPr>
-                        <a:defRPr sz="1100" b="0"/>
-                      </a:pPr>
-                      <a:r>
-                        <a:t>$506k</a:t>
-                      </a:r>
-                    </a:p>
-                  </a:txBody>
-                  <a:tcPr/>
-                </a:tc>
-                <a:tc>
-                  <a:txBody>
-                    <a:bodyPr/>
-                    <a:lstStyle/>
-                    <a:p>
-                      <a:pPr>
-                        <a:defRPr sz="1100" b="0"/>
-                      </a:pPr>
-                      <a:r>
-                        <a:t>$235k</a:t>
-                      </a:r>
-                    </a:p>
-                  </a:txBody>
-                  <a:tcPr/>
-                </a:tc>
-                <a:tc>
-                  <a:txBody>
-                    <a:bodyPr/>
-                    <a:lstStyle/>
-                    <a:p>
-                      <a:pPr>
-                        <a:defRPr sz="1100" b="0"/>
-                      </a:pPr>
-                      <a:r>
-                        <a:t>+10.4%</a:t>
-                      </a:r>
-                    </a:p>
-                  </a:txBody>
-                  <a:tcPr/>
-                </a:tc>
-              </a:tr>
-              <a:tr h="301752">
-                <a:tc>
-                  <a:txBody>
-                    <a:bodyPr/>
-                    <a:lstStyle/>
-                    <a:p>
-                      <a:pPr>
-                        <a:defRPr sz="1100" b="0"/>
-                      </a:pPr>
-                      <a:r>
-                        <a:t>San Jose, CA</a:t>
-                      </a:r>
-                    </a:p>
-                  </a:txBody>
-                  <a:tcPr/>
-                </a:tc>
-                <a:tc>
-                  <a:txBody>
-                    <a:bodyPr/>
-                    <a:lstStyle/>
-                    <a:p>
-                      <a:pPr>
-                        <a:defRPr sz="1100" b="0"/>
-                      </a:pPr>
-                      <a:r>
-                        <a:t>$437k</a:t>
-                      </a:r>
-                    </a:p>
-                  </a:txBody>
-                  <a:tcPr/>
-                </a:tc>
-                <a:tc>
-                  <a:txBody>
-                    <a:bodyPr/>
-                    <a:lstStyle/>
-                    <a:p>
-                      <a:pPr>
-                        <a:defRPr sz="1100" b="0"/>
-                      </a:pPr>
-                      <a:r>
-                        <a:t>$226k</a:t>
-                      </a:r>
-                    </a:p>
-                  </a:txBody>
-                  <a:tcPr/>
-                </a:tc>
-                <a:tc>
-                  <a:txBody>
-                    <a:bodyPr/>
-                    <a:lstStyle/>
-                    <a:p>
-                      <a:pPr>
-                        <a:defRPr sz="1100" b="0"/>
-                      </a:pPr>
-                      <a:r>
-                        <a:t>+19.6%</a:t>
-                      </a:r>
-                    </a:p>
-                  </a:txBody>
-                  <a:tcPr/>
-                </a:tc>
-              </a:tr>
-              <a:tr h="301752">
-                <a:tc>
-                  <a:txBody>
-                    <a:bodyPr/>
-                    <a:lstStyle/>
-                    <a:p>
-                      <a:pPr>
-                        <a:defRPr sz="1100" b="0"/>
-                      </a:pPr>
-                      <a:r>
-                        <a:t>New York City, NY</a:t>
-                      </a:r>
-                    </a:p>
-                  </a:txBody>
-                  <a:tcPr/>
-                </a:tc>
-                <a:tc>
-                  <a:txBody>
-                    <a:bodyPr/>
-                    <a:lstStyle/>
-                    <a:p>
-                      <a:pPr>
-                        <a:defRPr sz="1100" b="0"/>
-                      </a:pPr>
-                      <a:r>
-                        <a:t>$655k</a:t>
-                      </a:r>
-                    </a:p>
-                  </a:txBody>
-                  <a:tcPr/>
-                </a:tc>
-                <a:tc>
-                  <a:txBody>
-                    <a:bodyPr/>
-                    <a:lstStyle/>
-                    <a:p>
-                      <a:pPr>
-                        <a:defRPr sz="1100" b="0"/>
-                      </a:pPr>
-                      <a:r>
-                        <a:t>$90k</a:t>
-                      </a:r>
-                    </a:p>
-                  </a:txBody>
-                  <a:tcPr/>
-                </a:tc>
-                <a:tc>
-                  <a:txBody>
-                    <a:bodyPr/>
-                    <a:lstStyle/>
-                    <a:p>
-                      <a:pPr>
-                        <a:defRPr sz="1100" b="0"/>
-                      </a:pPr>
-                      <a:r>
-                        <a:t>-10.5%</a:t>
-                      </a:r>
-                    </a:p>
-                  </a:txBody>
-                  <a:tcPr/>
-                </a:tc>
-              </a:tr>
-            </a:tbl>
-          </a:graphicData>
-        </a:graphic>
-      </p:graphicFrame>
-      <p:sp>
-        <p:nvSpPr>
-          <p:cNvPr id="6" name="TextBox 5"/>
+      <p:sp>
+        <p:nvSpPr>
+          <p:cNvPr id="5" name="TextBox 4"/>
           <p:cNvSpPr txBox="1"/>
           <p:nvPr/>
         </p:nvSpPr>
         <p:spPr>
           <a:xfrm>
-            <a:off x="6309360" y="3383280"/>
-            <a:ext cx="5577840" cy="2926080"/>
+            <a:off x="6583680" y="3017520"/>
+            <a:ext cx="5394960" cy="3566160"/>
           </a:xfrm>
           <a:prstGeom prst="rect">
             <a:avLst/>
@@ -5476,45 +4962,45 @@
           <a:p>
             <a:pPr>
               <a:spcAft>
-                <a:spcPts val="600"/>
+                <a:spcPts val="500"/>
               </a:spcAft>
               <a:defRPr sz="1300"/>
             </a:pPr>
             <a:r>
-              <a:t>• Top products 2022: Computers $2.0M, Dinnerware $1.8M, Cookware $1.7M (by GM: Dinnerware, Candles, Cookware)</a:t>
+              <a:t>• Furniture explains the GM gap: without it, 2022 GM +12.7% on sales +10.9%</a:t>
             </a:r>
           </a:p>
           <a:p>
             <a:pPr>
               <a:spcAft>
-                <a:spcPts val="600"/>
+                <a:spcPts val="500"/>
               </a:spcAft>
               <a:defRPr sz="1300"/>
             </a:pPr>
             <a:r>
-              <a:t>• Los Angeles alone = 8% of sales; top 4 CA stores = $1.2M contribution</a:t>
+              <a:t>• Base-list stores went from $17k to -$325k contribution: Furniture GM there -$359k, everything else +$122k</a:t>
             </a:r>
           </a:p>
           <a:p>
             <a:pPr>
               <a:spcAft>
-                <a:spcPts val="600"/>
+                <a:spcPts val="500"/>
               </a:spcAft>
               <a:defRPr sz="1300"/>
             </a:pPr>
             <a:r>
-              <a:t>• NYC sales -10.5%, Northeast sales -9% in 2022 — investigate (competition? store issues?)</a:t>
+              <a:t>• Worth up to $556k a year to restore the 2021 margin (no volume response assumed)</a:t>
             </a:r>
           </a:p>
           <a:p>
             <a:pPr>
               <a:spcAft>
-                <a:spcPts val="600"/>
+                <a:spcPts val="500"/>
               </a:spcAft>
               <a:defRPr sz="1300"/>
             </a:pPr>
             <a:r>
-              <a:t>• Long tail: many small Township/Borough stores with opex &gt; gross margin</a:t>
+              <a:t>• Evidence the cost rise is real: one landed cost per month, markup otherwise fixed for 4 years. Not verified: confirm with AP/Ops</a:t>
             </a:r>
           </a:p>
         </p:txBody>
@@ -5567,21 +5053,1262 @@
               </a:defRPr>
             </a:pPr>
             <a:r>
-              <a:t>Q4 &amp; Q5: How to grow profit, and what needs investigation</a:t>
+              <a:t>Q2: top performers — and why 182 of 287 stores lose money</a:t>
+            </a:r>
+          </a:p>
+          <a:p>
+            <a:pPr>
+              <a:defRPr sz="1400">
+                <a:solidFill>
+                  <a:srgbClr val="595959"/>
+                </a:solidFill>
+              </a:defRPr>
+            </a:pPr>
+            <a:r>
+              <a:t>Rank by gross margin and contribution, not sales; read store results through the price list</a:t>
             </a:r>
           </a:p>
         </p:txBody>
       </p:sp>
-      <p:sp>
-        <p:nvSpPr>
-          <p:cNvPr id="3" name="TextBox 2"/>
+      <p:graphicFrame>
+        <p:nvGraphicFramePr>
+          <p:cNvPr id="3" name="Table 2"/>
+          <p:cNvGraphicFramePr>
+            <a:graphicFrameLocks noGrp="1"/>
+          </p:cNvGraphicFramePr>
+          <p:nvPr/>
+        </p:nvGraphicFramePr>
+        <p:xfrm>
+          <a:off x="365760" y="1371600"/>
+          <a:ext cx="5669280" cy="1865376"/>
+        </p:xfrm>
+        <a:graphic>
+          <a:graphicData uri="http://schemas.openxmlformats.org/drawingml/2006/table">
+            <a:tbl>
+              <a:tblPr firstRow="1" bandRow="1">
+                <a:tableStyleId>{5C22544A-7EE6-4342-B048-85BDC9FD1C3A}</a:tableStyleId>
+              </a:tblPr>
+              <a:tblGrid>
+                <a:gridCol w="2011680"/>
+                <a:gridCol w="914400"/>
+                <a:gridCol w="914400"/>
+                <a:gridCol w="822960"/>
+                <a:gridCol w="1005840"/>
+              </a:tblGrid>
+              <a:tr h="310896">
+                <a:tc>
+                  <a:txBody>
+                    <a:bodyPr/>
+                    <a:lstStyle/>
+                    <a:p>
+                      <a:pPr>
+                        <a:defRPr sz="1100" b="1"/>
+                      </a:pPr>
+                      <a:r>
+                        <a:t>Top products 2022 (by GM)</a:t>
+                      </a:r>
+                    </a:p>
+                  </a:txBody>
+                  <a:tcPr/>
+                </a:tc>
+                <a:tc>
+                  <a:txBody>
+                    <a:bodyPr/>
+                    <a:lstStyle/>
+                    <a:p>
+                      <a:pPr>
+                        <a:defRPr sz="1100" b="1"/>
+                      </a:pPr>
+                      <a:r>
+                        <a:t>Sales</a:t>
+                      </a:r>
+                    </a:p>
+                  </a:txBody>
+                  <a:tcPr/>
+                </a:tc>
+                <a:tc>
+                  <a:txBody>
+                    <a:bodyPr/>
+                    <a:lstStyle/>
+                    <a:p>
+                      <a:pPr>
+                        <a:defRPr sz="1100" b="1"/>
+                      </a:pPr>
+                      <a:r>
+                        <a:t>GM</a:t>
+                      </a:r>
+                    </a:p>
+                  </a:txBody>
+                  <a:tcPr/>
+                </a:tc>
+                <a:tc>
+                  <a:txBody>
+                    <a:bodyPr/>
+                    <a:lstStyle/>
+                    <a:p>
+                      <a:pPr>
+                        <a:defRPr sz="1100" b="1"/>
+                      </a:pPr>
+                      <a:r>
+                        <a:t>GM %</a:t>
+                      </a:r>
+                    </a:p>
+                  </a:txBody>
+                  <a:tcPr/>
+                </a:tc>
+                <a:tc>
+                  <a:txBody>
+                    <a:bodyPr/>
+                    <a:lstStyle/>
+                    <a:p>
+                      <a:pPr>
+                        <a:defRPr sz="1100" b="1"/>
+                      </a:pPr>
+                      <a:r>
+                        <a:t>YoY sales</a:t>
+                      </a:r>
+                    </a:p>
+                  </a:txBody>
+                  <a:tcPr/>
+                </a:tc>
+              </a:tr>
+              <a:tr h="310896">
+                <a:tc>
+                  <a:txBody>
+                    <a:bodyPr/>
+                    <a:lstStyle/>
+                    <a:p>
+                      <a:pPr>
+                        <a:defRPr sz="1100" b="0"/>
+                      </a:pPr>
+                      <a:r>
+                        <a:t>Dinnerware</a:t>
+                      </a:r>
+                    </a:p>
+                  </a:txBody>
+                  <a:tcPr/>
+                </a:tc>
+                <a:tc>
+                  <a:txBody>
+                    <a:bodyPr/>
+                    <a:lstStyle/>
+                    <a:p>
+                      <a:pPr>
+                        <a:defRPr sz="1100" b="0"/>
+                      </a:pPr>
+                      <a:r>
+                        <a:t>$1,841k</a:t>
+                      </a:r>
+                    </a:p>
+                  </a:txBody>
+                  <a:tcPr/>
+                </a:tc>
+                <a:tc>
+                  <a:txBody>
+                    <a:bodyPr/>
+                    <a:lstStyle/>
+                    <a:p>
+                      <a:pPr>
+                        <a:defRPr sz="1100" b="0"/>
+                      </a:pPr>
+                      <a:r>
+                        <a:t>$782k</a:t>
+                      </a:r>
+                    </a:p>
+                  </a:txBody>
+                  <a:tcPr/>
+                </a:tc>
+                <a:tc>
+                  <a:txBody>
+                    <a:bodyPr/>
+                    <a:lstStyle/>
+                    <a:p>
+                      <a:pPr>
+                        <a:defRPr sz="1100" b="0"/>
+                      </a:pPr>
+                      <a:r>
+                        <a:t>42.5%</a:t>
+                      </a:r>
+                    </a:p>
+                  </a:txBody>
+                  <a:tcPr/>
+                </a:tc>
+                <a:tc>
+                  <a:txBody>
+                    <a:bodyPr/>
+                    <a:lstStyle/>
+                    <a:p>
+                      <a:pPr>
+                        <a:defRPr sz="1100" b="0"/>
+                      </a:pPr>
+                      <a:r>
+                        <a:t>+12.8%</a:t>
+                      </a:r>
+                    </a:p>
+                  </a:txBody>
+                  <a:tcPr/>
+                </a:tc>
+              </a:tr>
+              <a:tr h="310896">
+                <a:tc>
+                  <a:txBody>
+                    <a:bodyPr/>
+                    <a:lstStyle/>
+                    <a:p>
+                      <a:pPr>
+                        <a:defRPr sz="1100" b="0"/>
+                      </a:pPr>
+                      <a:r>
+                        <a:t>Candles</a:t>
+                      </a:r>
+                    </a:p>
+                  </a:txBody>
+                  <a:tcPr/>
+                </a:tc>
+                <a:tc>
+                  <a:txBody>
+                    <a:bodyPr/>
+                    <a:lstStyle/>
+                    <a:p>
+                      <a:pPr>
+                        <a:defRPr sz="1100" b="0"/>
+                      </a:pPr>
+                      <a:r>
+                        <a:t>$1,320k</a:t>
+                      </a:r>
+                    </a:p>
+                  </a:txBody>
+                  <a:tcPr/>
+                </a:tc>
+                <a:tc>
+                  <a:txBody>
+                    <a:bodyPr/>
+                    <a:lstStyle/>
+                    <a:p>
+                      <a:pPr>
+                        <a:defRPr sz="1100" b="0"/>
+                      </a:pPr>
+                      <a:r>
+                        <a:t>$672k</a:t>
+                      </a:r>
+                    </a:p>
+                  </a:txBody>
+                  <a:tcPr/>
+                </a:tc>
+                <a:tc>
+                  <a:txBody>
+                    <a:bodyPr/>
+                    <a:lstStyle/>
+                    <a:p>
+                      <a:pPr>
+                        <a:defRPr sz="1100" b="0"/>
+                      </a:pPr>
+                      <a:r>
+                        <a:t>50.9%</a:t>
+                      </a:r>
+                    </a:p>
+                  </a:txBody>
+                  <a:tcPr/>
+                </a:tc>
+                <a:tc>
+                  <a:txBody>
+                    <a:bodyPr/>
+                    <a:lstStyle/>
+                    <a:p>
+                      <a:pPr>
+                        <a:defRPr sz="1100" b="0"/>
+                      </a:pPr>
+                      <a:r>
+                        <a:t>+14.8%</a:t>
+                      </a:r>
+                    </a:p>
+                  </a:txBody>
+                  <a:tcPr/>
+                </a:tc>
+              </a:tr>
+              <a:tr h="310896">
+                <a:tc>
+                  <a:txBody>
+                    <a:bodyPr/>
+                    <a:lstStyle/>
+                    <a:p>
+                      <a:pPr>
+                        <a:defRPr sz="1100" b="0"/>
+                      </a:pPr>
+                      <a:r>
+                        <a:t>Cookware</a:t>
+                      </a:r>
+                    </a:p>
+                  </a:txBody>
+                  <a:tcPr/>
+                </a:tc>
+                <a:tc>
+                  <a:txBody>
+                    <a:bodyPr/>
+                    <a:lstStyle/>
+                    <a:p>
+                      <a:pPr>
+                        <a:defRPr sz="1100" b="0"/>
+                      </a:pPr>
+                      <a:r>
+                        <a:t>$1,722k</a:t>
+                      </a:r>
+                    </a:p>
+                  </a:txBody>
+                  <a:tcPr/>
+                </a:tc>
+                <a:tc>
+                  <a:txBody>
+                    <a:bodyPr/>
+                    <a:lstStyle/>
+                    <a:p>
+                      <a:pPr>
+                        <a:defRPr sz="1100" b="0"/>
+                      </a:pPr>
+                      <a:r>
+                        <a:t>$668k</a:t>
+                      </a:r>
+                    </a:p>
+                  </a:txBody>
+                  <a:tcPr/>
+                </a:tc>
+                <a:tc>
+                  <a:txBody>
+                    <a:bodyPr/>
+                    <a:lstStyle/>
+                    <a:p>
+                      <a:pPr>
+                        <a:defRPr sz="1100" b="0"/>
+                      </a:pPr>
+                      <a:r>
+                        <a:t>38.8%</a:t>
+                      </a:r>
+                    </a:p>
+                  </a:txBody>
+                  <a:tcPr/>
+                </a:tc>
+                <a:tc>
+                  <a:txBody>
+                    <a:bodyPr/>
+                    <a:lstStyle/>
+                    <a:p>
+                      <a:pPr>
+                        <a:defRPr sz="1100" b="0"/>
+                      </a:pPr>
+                      <a:r>
+                        <a:t>+13.5%</a:t>
+                      </a:r>
+                    </a:p>
+                  </a:txBody>
+                  <a:tcPr/>
+                </a:tc>
+              </a:tr>
+              <a:tr h="310896">
+                <a:tc>
+                  <a:txBody>
+                    <a:bodyPr/>
+                    <a:lstStyle/>
+                    <a:p>
+                      <a:pPr>
+                        <a:defRPr sz="1100" b="0"/>
+                      </a:pPr>
+                      <a:r>
+                        <a:t>Computers</a:t>
+                      </a:r>
+                    </a:p>
+                  </a:txBody>
+                  <a:tcPr/>
+                </a:tc>
+                <a:tc>
+                  <a:txBody>
+                    <a:bodyPr/>
+                    <a:lstStyle/>
+                    <a:p>
+                      <a:pPr>
+                        <a:defRPr sz="1100" b="0"/>
+                      </a:pPr>
+                      <a:r>
+                        <a:t>$2,016k</a:t>
+                      </a:r>
+                    </a:p>
+                  </a:txBody>
+                  <a:tcPr/>
+                </a:tc>
+                <a:tc>
+                  <a:txBody>
+                    <a:bodyPr/>
+                    <a:lstStyle/>
+                    <a:p>
+                      <a:pPr>
+                        <a:defRPr sz="1100" b="0"/>
+                      </a:pPr>
+                      <a:r>
+                        <a:t>$633k</a:t>
+                      </a:r>
+                    </a:p>
+                  </a:txBody>
+                  <a:tcPr/>
+                </a:tc>
+                <a:tc>
+                  <a:txBody>
+                    <a:bodyPr/>
+                    <a:lstStyle/>
+                    <a:p>
+                      <a:pPr>
+                        <a:defRPr sz="1100" b="0"/>
+                      </a:pPr>
+                      <a:r>
+                        <a:t>31.4%</a:t>
+                      </a:r>
+                    </a:p>
+                  </a:txBody>
+                  <a:tcPr/>
+                </a:tc>
+                <a:tc>
+                  <a:txBody>
+                    <a:bodyPr/>
+                    <a:lstStyle/>
+                    <a:p>
+                      <a:pPr>
+                        <a:defRPr sz="1100" b="0"/>
+                      </a:pPr>
+                      <a:r>
+                        <a:t>+9.0%</a:t>
+                      </a:r>
+                    </a:p>
+                  </a:txBody>
+                  <a:tcPr/>
+                </a:tc>
+              </a:tr>
+              <a:tr h="310896">
+                <a:tc>
+                  <a:txBody>
+                    <a:bodyPr/>
+                    <a:lstStyle/>
+                    <a:p>
+                      <a:pPr>
+                        <a:defRPr sz="1100" b="0"/>
+                      </a:pPr>
+                      <a:r>
+                        <a:t>Audio</a:t>
+                      </a:r>
+                    </a:p>
+                  </a:txBody>
+                  <a:tcPr/>
+                </a:tc>
+                <a:tc>
+                  <a:txBody>
+                    <a:bodyPr/>
+                    <a:lstStyle/>
+                    <a:p>
+                      <a:pPr>
+                        <a:defRPr sz="1100" b="0"/>
+                      </a:pPr>
+                      <a:r>
+                        <a:t>$956k</a:t>
+                      </a:r>
+                    </a:p>
+                  </a:txBody>
+                  <a:tcPr/>
+                </a:tc>
+                <a:tc>
+                  <a:txBody>
+                    <a:bodyPr/>
+                    <a:lstStyle/>
+                    <a:p>
+                      <a:pPr>
+                        <a:defRPr sz="1100" b="0"/>
+                      </a:pPr>
+                      <a:r>
+                        <a:t>$398k</a:t>
+                      </a:r>
+                    </a:p>
+                  </a:txBody>
+                  <a:tcPr/>
+                </a:tc>
+                <a:tc>
+                  <a:txBody>
+                    <a:bodyPr/>
+                    <a:lstStyle/>
+                    <a:p>
+                      <a:pPr>
+                        <a:defRPr sz="1100" b="0"/>
+                      </a:pPr>
+                      <a:r>
+                        <a:t>41.6%</a:t>
+                      </a:r>
+                    </a:p>
+                  </a:txBody>
+                  <a:tcPr/>
+                </a:tc>
+                <a:tc>
+                  <a:txBody>
+                    <a:bodyPr/>
+                    <a:lstStyle/>
+                    <a:p>
+                      <a:pPr>
+                        <a:defRPr sz="1100" b="0"/>
+                      </a:pPr>
+                      <a:r>
+                        <a:t>+1.8%</a:t>
+                      </a:r>
+                    </a:p>
+                  </a:txBody>
+                  <a:tcPr/>
+                </a:tc>
+              </a:tr>
+            </a:tbl>
+          </a:graphicData>
+        </a:graphic>
+      </p:graphicFrame>
+      <p:graphicFrame>
+        <p:nvGraphicFramePr>
+          <p:cNvPr id="4" name="Table 3"/>
+          <p:cNvGraphicFramePr>
+            <a:graphicFrameLocks noGrp="1"/>
+          </p:cNvGraphicFramePr>
+          <p:nvPr/>
+        </p:nvGraphicFramePr>
+        <p:xfrm>
+          <a:off x="6309360" y="1371600"/>
+          <a:ext cx="5577840" cy="1865376"/>
+        </p:xfrm>
+        <a:graphic>
+          <a:graphicData uri="http://schemas.openxmlformats.org/drawingml/2006/table">
+            <a:tbl>
+              <a:tblPr firstRow="1" bandRow="1">
+                <a:tableStyleId>{5C22544A-7EE6-4342-B048-85BDC9FD1C3A}</a:tableStyleId>
+              </a:tblPr>
+              <a:tblGrid>
+                <a:gridCol w="2377440"/>
+                <a:gridCol w="1005840"/>
+                <a:gridCol w="1097280"/>
+                <a:gridCol w="1097280"/>
+              </a:tblGrid>
+              <a:tr h="310896">
+                <a:tc>
+                  <a:txBody>
+                    <a:bodyPr/>
+                    <a:lstStyle/>
+                    <a:p>
+                      <a:pPr>
+                        <a:defRPr sz="1100" b="1"/>
+                      </a:pPr>
+                      <a:r>
+                        <a:t>Top stores 2022 (contribution)</a:t>
+                      </a:r>
+                    </a:p>
+                  </a:txBody>
+                  <a:tcPr/>
+                </a:tc>
+                <a:tc>
+                  <a:txBody>
+                    <a:bodyPr/>
+                    <a:lstStyle/>
+                    <a:p>
+                      <a:pPr>
+                        <a:defRPr sz="1100" b="1"/>
+                      </a:pPr>
+                      <a:r>
+                        <a:t>Sales</a:t>
+                      </a:r>
+                    </a:p>
+                  </a:txBody>
+                  <a:tcPr/>
+                </a:tc>
+                <a:tc>
+                  <a:txBody>
+                    <a:bodyPr/>
+                    <a:lstStyle/>
+                    <a:p>
+                      <a:pPr>
+                        <a:defRPr sz="1100" b="1"/>
+                      </a:pPr>
+                      <a:r>
+                        <a:t>Contrib.</a:t>
+                      </a:r>
+                    </a:p>
+                  </a:txBody>
+                  <a:tcPr/>
+                </a:tc>
+                <a:tc>
+                  <a:txBody>
+                    <a:bodyPr/>
+                    <a:lstStyle/>
+                    <a:p>
+                      <a:pPr>
+                        <a:defRPr sz="1100" b="1"/>
+                      </a:pPr>
+                      <a:r>
+                        <a:t>YoY sales</a:t>
+                      </a:r>
+                    </a:p>
+                  </a:txBody>
+                  <a:tcPr/>
+                </a:tc>
+              </a:tr>
+              <a:tr h="310896">
+                <a:tc>
+                  <a:txBody>
+                    <a:bodyPr/>
+                    <a:lstStyle/>
+                    <a:p>
+                      <a:pPr>
+                        <a:defRPr sz="1100" b="0"/>
+                      </a:pPr>
+                      <a:r>
+                        <a:t>Los Angeles, CA</a:t>
+                      </a:r>
+                    </a:p>
+                  </a:txBody>
+                  <a:tcPr/>
+                </a:tc>
+                <a:tc>
+                  <a:txBody>
+                    <a:bodyPr/>
+                    <a:lstStyle/>
+                    <a:p>
+                      <a:pPr>
+                        <a:defRPr sz="1100" b="0"/>
+                      </a:pPr>
+                      <a:r>
+                        <a:t>$1,035k</a:t>
+                      </a:r>
+                    </a:p>
+                  </a:txBody>
+                  <a:tcPr/>
+                </a:tc>
+                <a:tc>
+                  <a:txBody>
+                    <a:bodyPr/>
+                    <a:lstStyle/>
+                    <a:p>
+                      <a:pPr>
+                        <a:defRPr sz="1100" b="0"/>
+                      </a:pPr>
+                      <a:r>
+                        <a:t>$527k</a:t>
+                      </a:r>
+                    </a:p>
+                  </a:txBody>
+                  <a:tcPr/>
+                </a:tc>
+                <a:tc>
+                  <a:txBody>
+                    <a:bodyPr/>
+                    <a:lstStyle/>
+                    <a:p>
+                      <a:pPr>
+                        <a:defRPr sz="1100" b="0"/>
+                      </a:pPr>
+                      <a:r>
+                        <a:t>+8.6%</a:t>
+                      </a:r>
+                    </a:p>
+                  </a:txBody>
+                  <a:tcPr/>
+                </a:tc>
+              </a:tr>
+              <a:tr h="310896">
+                <a:tc>
+                  <a:txBody>
+                    <a:bodyPr/>
+                    <a:lstStyle/>
+                    <a:p>
+                      <a:pPr>
+                        <a:defRPr sz="1100" b="0"/>
+                      </a:pPr>
+                      <a:r>
+                        <a:t>San Francisco, CA</a:t>
+                      </a:r>
+                    </a:p>
+                  </a:txBody>
+                  <a:tcPr/>
+                </a:tc>
+                <a:tc>
+                  <a:txBody>
+                    <a:bodyPr/>
+                    <a:lstStyle/>
+                    <a:p>
+                      <a:pPr>
+                        <a:defRPr sz="1100" b="0"/>
+                      </a:pPr>
+                      <a:r>
+                        <a:t>$463k</a:t>
+                      </a:r>
+                    </a:p>
+                  </a:txBody>
+                  <a:tcPr/>
+                </a:tc>
+                <a:tc>
+                  <a:txBody>
+                    <a:bodyPr/>
+                    <a:lstStyle/>
+                    <a:p>
+                      <a:pPr>
+                        <a:defRPr sz="1100" b="0"/>
+                      </a:pPr>
+                      <a:r>
+                        <a:t>$238k</a:t>
+                      </a:r>
+                    </a:p>
+                  </a:txBody>
+                  <a:tcPr/>
+                </a:tc>
+                <a:tc>
+                  <a:txBody>
+                    <a:bodyPr/>
+                    <a:lstStyle/>
+                    <a:p>
+                      <a:pPr>
+                        <a:defRPr sz="1100" b="0"/>
+                      </a:pPr>
+                      <a:r>
+                        <a:t>+15.0%</a:t>
+                      </a:r>
+                    </a:p>
+                  </a:txBody>
+                  <a:tcPr/>
+                </a:tc>
+              </a:tr>
+              <a:tr h="310896">
+                <a:tc>
+                  <a:txBody>
+                    <a:bodyPr/>
+                    <a:lstStyle/>
+                    <a:p>
+                      <a:pPr>
+                        <a:defRPr sz="1100" b="0"/>
+                      </a:pPr>
+                      <a:r>
+                        <a:t>San Diego, CA</a:t>
+                      </a:r>
+                    </a:p>
+                  </a:txBody>
+                  <a:tcPr/>
+                </a:tc>
+                <a:tc>
+                  <a:txBody>
+                    <a:bodyPr/>
+                    <a:lstStyle/>
+                    <a:p>
+                      <a:pPr>
+                        <a:defRPr sz="1100" b="0"/>
+                      </a:pPr>
+                      <a:r>
+                        <a:t>$506k</a:t>
+                      </a:r>
+                    </a:p>
+                  </a:txBody>
+                  <a:tcPr/>
+                </a:tc>
+                <a:tc>
+                  <a:txBody>
+                    <a:bodyPr/>
+                    <a:lstStyle/>
+                    <a:p>
+                      <a:pPr>
+                        <a:defRPr sz="1100" b="0"/>
+                      </a:pPr>
+                      <a:r>
+                        <a:t>$235k</a:t>
+                      </a:r>
+                    </a:p>
+                  </a:txBody>
+                  <a:tcPr/>
+                </a:tc>
+                <a:tc>
+                  <a:txBody>
+                    <a:bodyPr/>
+                    <a:lstStyle/>
+                    <a:p>
+                      <a:pPr>
+                        <a:defRPr sz="1100" b="0"/>
+                      </a:pPr>
+                      <a:r>
+                        <a:t>+10.4%</a:t>
+                      </a:r>
+                    </a:p>
+                  </a:txBody>
+                  <a:tcPr/>
+                </a:tc>
+              </a:tr>
+              <a:tr h="310896">
+                <a:tc>
+                  <a:txBody>
+                    <a:bodyPr/>
+                    <a:lstStyle/>
+                    <a:p>
+                      <a:pPr>
+                        <a:defRPr sz="1100" b="0"/>
+                      </a:pPr>
+                      <a:r>
+                        <a:t>San Jose, CA</a:t>
+                      </a:r>
+                    </a:p>
+                  </a:txBody>
+                  <a:tcPr/>
+                </a:tc>
+                <a:tc>
+                  <a:txBody>
+                    <a:bodyPr/>
+                    <a:lstStyle/>
+                    <a:p>
+                      <a:pPr>
+                        <a:defRPr sz="1100" b="0"/>
+                      </a:pPr>
+                      <a:r>
+                        <a:t>$437k</a:t>
+                      </a:r>
+                    </a:p>
+                  </a:txBody>
+                  <a:tcPr/>
+                </a:tc>
+                <a:tc>
+                  <a:txBody>
+                    <a:bodyPr/>
+                    <a:lstStyle/>
+                    <a:p>
+                      <a:pPr>
+                        <a:defRPr sz="1100" b="0"/>
+                      </a:pPr>
+                      <a:r>
+                        <a:t>$226k</a:t>
+                      </a:r>
+                    </a:p>
+                  </a:txBody>
+                  <a:tcPr/>
+                </a:tc>
+                <a:tc>
+                  <a:txBody>
+                    <a:bodyPr/>
+                    <a:lstStyle/>
+                    <a:p>
+                      <a:pPr>
+                        <a:defRPr sz="1100" b="0"/>
+                      </a:pPr>
+                      <a:r>
+                        <a:t>+19.6%</a:t>
+                      </a:r>
+                    </a:p>
+                  </a:txBody>
+                  <a:tcPr/>
+                </a:tc>
+              </a:tr>
+              <a:tr h="310896">
+                <a:tc>
+                  <a:txBody>
+                    <a:bodyPr/>
+                    <a:lstStyle/>
+                    <a:p>
+                      <a:pPr>
+                        <a:defRPr sz="1100" b="0"/>
+                      </a:pPr>
+                      <a:r>
+                        <a:t>New York City, NY</a:t>
+                      </a:r>
+                    </a:p>
+                  </a:txBody>
+                  <a:tcPr/>
+                </a:tc>
+                <a:tc>
+                  <a:txBody>
+                    <a:bodyPr/>
+                    <a:lstStyle/>
+                    <a:p>
+                      <a:pPr>
+                        <a:defRPr sz="1100" b="0"/>
+                      </a:pPr>
+                      <a:r>
+                        <a:t>$655k</a:t>
+                      </a:r>
+                    </a:p>
+                  </a:txBody>
+                  <a:tcPr/>
+                </a:tc>
+                <a:tc>
+                  <a:txBody>
+                    <a:bodyPr/>
+                    <a:lstStyle/>
+                    <a:p>
+                      <a:pPr>
+                        <a:defRPr sz="1100" b="0"/>
+                      </a:pPr>
+                      <a:r>
+                        <a:t>$90k</a:t>
+                      </a:r>
+                    </a:p>
+                  </a:txBody>
+                  <a:tcPr/>
+                </a:tc>
+                <a:tc>
+                  <a:txBody>
+                    <a:bodyPr/>
+                    <a:lstStyle/>
+                    <a:p>
+                      <a:pPr>
+                        <a:defRPr sz="1100" b="0"/>
+                      </a:pPr>
+                      <a:r>
+                        <a:t>-10.5%</a:t>
+                      </a:r>
+                    </a:p>
+                  </a:txBody>
+                  <a:tcPr/>
+                </a:tc>
+              </a:tr>
+            </a:tbl>
+          </a:graphicData>
+        </a:graphic>
+      </p:graphicFrame>
+      <p:graphicFrame>
+        <p:nvGraphicFramePr>
+          <p:cNvPr id="5" name="Table 4"/>
+          <p:cNvGraphicFramePr>
+            <a:graphicFrameLocks noGrp="1"/>
+          </p:cNvGraphicFramePr>
+          <p:nvPr/>
+        </p:nvGraphicFramePr>
+        <p:xfrm>
+          <a:off x="365760" y="3657600"/>
+          <a:ext cx="5669280" cy="1554480"/>
+        </p:xfrm>
+        <a:graphic>
+          <a:graphicData uri="http://schemas.openxmlformats.org/drawingml/2006/table">
+            <a:tbl>
+              <a:tblPr firstRow="1" bandRow="1">
+                <a:tableStyleId>{5C22544A-7EE6-4342-B048-85BDC9FD1C3A}</a:tableStyleId>
+              </a:tblPr>
+              <a:tblGrid>
+                <a:gridCol w="1737360"/>
+                <a:gridCol w="1188720"/>
+                <a:gridCol w="1463040"/>
+                <a:gridCol w="1280160"/>
+              </a:tblGrid>
+              <a:tr h="310896">
+                <a:tc>
+                  <a:txBody>
+                    <a:bodyPr/>
+                    <a:lstStyle/>
+                    <a:p>
+                      <a:pPr>
+                        <a:defRPr sz="1100" b="1"/>
+                      </a:pPr>
+                      <a:r>
+                        <a:t>Region 2022</a:t>
+                      </a:r>
+                    </a:p>
+                  </a:txBody>
+                  <a:tcPr/>
+                </a:tc>
+                <a:tc>
+                  <a:txBody>
+                    <a:bodyPr/>
+                    <a:lstStyle/>
+                    <a:p>
+                      <a:pPr>
+                        <a:defRPr sz="1100" b="1"/>
+                      </a:pPr>
+                      <a:r>
+                        <a:t>Sales</a:t>
+                      </a:r>
+                    </a:p>
+                  </a:txBody>
+                  <a:tcPr/>
+                </a:tc>
+                <a:tc>
+                  <a:txBody>
+                    <a:bodyPr/>
+                    <a:lstStyle/>
+                    <a:p>
+                      <a:pPr>
+                        <a:defRPr sz="1100" b="1"/>
+                      </a:pPr>
+                      <a:r>
+                        <a:t>Contribution</a:t>
+                      </a:r>
+                    </a:p>
+                  </a:txBody>
+                  <a:tcPr/>
+                </a:tc>
+                <a:tc>
+                  <a:txBody>
+                    <a:bodyPr/>
+                    <a:lstStyle/>
+                    <a:p>
+                      <a:pPr>
+                        <a:defRPr sz="1100" b="1"/>
+                      </a:pPr>
+                      <a:r>
+                        <a:t>YoY sales</a:t>
+                      </a:r>
+                    </a:p>
+                  </a:txBody>
+                  <a:tcPr/>
+                </a:tc>
+              </a:tr>
+              <a:tr h="310896">
+                <a:tc>
+                  <a:txBody>
+                    <a:bodyPr/>
+                    <a:lstStyle/>
+                    <a:p>
+                      <a:pPr>
+                        <a:defRPr sz="1100" b="0"/>
+                      </a:pPr>
+                      <a:r>
+                        <a:t>West</a:t>
+                      </a:r>
+                    </a:p>
+                  </a:txBody>
+                  <a:tcPr/>
+                </a:tc>
+                <a:tc>
+                  <a:txBody>
+                    <a:bodyPr/>
+                    <a:lstStyle/>
+                    <a:p>
+                      <a:pPr>
+                        <a:defRPr sz="1100" b="0"/>
+                      </a:pPr>
+                      <a:r>
+                        <a:t>$7,608k</a:t>
+                      </a:r>
+                    </a:p>
+                  </a:txBody>
+                  <a:tcPr/>
+                </a:tc>
+                <a:tc>
+                  <a:txBody>
+                    <a:bodyPr/>
+                    <a:lstStyle/>
+                    <a:p>
+                      <a:pPr>
+                        <a:defRPr sz="1100" b="0"/>
+                      </a:pPr>
+                      <a:r>
+                        <a:t>$1,826k</a:t>
+                      </a:r>
+                    </a:p>
+                  </a:txBody>
+                  <a:tcPr/>
+                </a:tc>
+                <a:tc>
+                  <a:txBody>
+                    <a:bodyPr/>
+                    <a:lstStyle/>
+                    <a:p>
+                      <a:pPr>
+                        <a:defRPr sz="1100" b="0"/>
+                      </a:pPr>
+                      <a:r>
+                        <a:t>+13.9%</a:t>
+                      </a:r>
+                    </a:p>
+                  </a:txBody>
+                  <a:tcPr/>
+                </a:tc>
+              </a:tr>
+              <a:tr h="310896">
+                <a:tc>
+                  <a:txBody>
+                    <a:bodyPr/>
+                    <a:lstStyle/>
+                    <a:p>
+                      <a:pPr>
+                        <a:defRPr sz="1100" b="0"/>
+                      </a:pPr>
+                      <a:r>
+                        <a:t>Midwest</a:t>
+                      </a:r>
+                    </a:p>
+                  </a:txBody>
+                  <a:tcPr/>
+                </a:tc>
+                <a:tc>
+                  <a:txBody>
+                    <a:bodyPr/>
+                    <a:lstStyle/>
+                    <a:p>
+                      <a:pPr>
+                        <a:defRPr sz="1100" b="0"/>
+                      </a:pPr>
+                      <a:r>
+                        <a:t>$2,042k</a:t>
+                      </a:r>
+                    </a:p>
+                  </a:txBody>
+                  <a:tcPr/>
+                </a:tc>
+                <a:tc>
+                  <a:txBody>
+                    <a:bodyPr/>
+                    <a:lstStyle/>
+                    <a:p>
+                      <a:pPr>
+                        <a:defRPr sz="1100" b="0"/>
+                      </a:pPr>
+                      <a:r>
+                        <a:t>-$150k</a:t>
+                      </a:r>
+                    </a:p>
+                  </a:txBody>
+                  <a:tcPr/>
+                </a:tc>
+                <a:tc>
+                  <a:txBody>
+                    <a:bodyPr/>
+                    <a:lstStyle/>
+                    <a:p>
+                      <a:pPr>
+                        <a:defRPr sz="1100" b="0"/>
+                      </a:pPr>
+                      <a:r>
+                        <a:t>+10.3%</a:t>
+                      </a:r>
+                    </a:p>
+                  </a:txBody>
+                  <a:tcPr/>
+                </a:tc>
+              </a:tr>
+              <a:tr h="310896">
+                <a:tc>
+                  <a:txBody>
+                    <a:bodyPr/>
+                    <a:lstStyle/>
+                    <a:p>
+                      <a:pPr>
+                        <a:defRPr sz="1100" b="0"/>
+                      </a:pPr>
+                      <a:r>
+                        <a:t>South</a:t>
+                      </a:r>
+                    </a:p>
+                  </a:txBody>
+                  <a:tcPr/>
+                </a:tc>
+                <a:tc>
+                  <a:txBody>
+                    <a:bodyPr/>
+                    <a:lstStyle/>
+                    <a:p>
+                      <a:pPr>
+                        <a:defRPr sz="1100" b="0"/>
+                      </a:pPr>
+                      <a:r>
+                        <a:t>$1,694k</a:t>
+                      </a:r>
+                    </a:p>
+                  </a:txBody>
+                  <a:tcPr/>
+                </a:tc>
+                <a:tc>
+                  <a:txBody>
+                    <a:bodyPr/>
+                    <a:lstStyle/>
+                    <a:p>
+                      <a:pPr>
+                        <a:defRPr sz="1100" b="0"/>
+                      </a:pPr>
+                      <a:r>
+                        <a:t>-$128k</a:t>
+                      </a:r>
+                    </a:p>
+                  </a:txBody>
+                  <a:tcPr/>
+                </a:tc>
+                <a:tc>
+                  <a:txBody>
+                    <a:bodyPr/>
+                    <a:lstStyle/>
+                    <a:p>
+                      <a:pPr>
+                        <a:defRPr sz="1100" b="0"/>
+                      </a:pPr>
+                      <a:r>
+                        <a:t>+10.2%</a:t>
+                      </a:r>
+                    </a:p>
+                  </a:txBody>
+                  <a:tcPr/>
+                </a:tc>
+              </a:tr>
+              <a:tr h="310896">
+                <a:tc>
+                  <a:txBody>
+                    <a:bodyPr/>
+                    <a:lstStyle/>
+                    <a:p>
+                      <a:pPr>
+                        <a:defRPr sz="1100" b="0"/>
+                      </a:pPr>
+                      <a:r>
+                        <a:t>Northeast</a:t>
+                      </a:r>
+                    </a:p>
+                  </a:txBody>
+                  <a:tcPr/>
+                </a:tc>
+                <a:tc>
+                  <a:txBody>
+                    <a:bodyPr/>
+                    <a:lstStyle/>
+                    <a:p>
+                      <a:pPr>
+                        <a:defRPr sz="1100" b="0"/>
+                      </a:pPr>
+                      <a:r>
+                        <a:t>$1,435k</a:t>
+                      </a:r>
+                    </a:p>
+                  </a:txBody>
+                  <a:tcPr/>
+                </a:tc>
+                <a:tc>
+                  <a:txBody>
+                    <a:bodyPr/>
+                    <a:lstStyle/>
+                    <a:p>
+                      <a:pPr>
+                        <a:defRPr sz="1100" b="0"/>
+                      </a:pPr>
+                      <a:r>
+                        <a:t>-$121k</a:t>
+                      </a:r>
+                    </a:p>
+                  </a:txBody>
+                  <a:tcPr/>
+                </a:tc>
+                <a:tc>
+                  <a:txBody>
+                    <a:bodyPr/>
+                    <a:lstStyle/>
+                    <a:p>
+                      <a:pPr>
+                        <a:defRPr sz="1100" b="0"/>
+                      </a:pPr>
+                      <a:r>
+                        <a:t>-9.0%</a:t>
+                      </a:r>
+                    </a:p>
+                  </a:txBody>
+                  <a:tcPr/>
+                </a:tc>
+              </a:tr>
+            </a:tbl>
+          </a:graphicData>
+        </a:graphic>
+      </p:graphicFrame>
+      <p:sp>
+        <p:nvSpPr>
+          <p:cNvPr id="6" name="TextBox 5"/>
           <p:cNvSpPr txBox="1"/>
           <p:nvPr/>
         </p:nvSpPr>
         <p:spPr>
           <a:xfrm>
-            <a:off x="457200" y="1371600"/>
-            <a:ext cx="11247120" cy="5029200"/>
+            <a:off x="6309360" y="3657600"/>
+            <a:ext cx="5577840" cy="2926080"/>
           </a:xfrm>
           <a:prstGeom prst="rect">
             <a:avLst/>
@@ -5596,111 +6323,45 @@
           <a:p>
             <a:pPr>
               <a:spcAft>
-                <a:spcPts val="600"/>
+                <a:spcPts val="500"/>
               </a:spcAft>
-              <a:defRPr sz="1500"/>
+              <a:defRPr sz="1200"/>
             </a:pPr>
             <a:r>
-              <a:t>• Profit levers (size of prize, 2022 base)</a:t>
-            </a:r>
-          </a:p>
-          <a:p>
-            <a:pPr lvl="1">
-              <a:spcAft>
-                <a:spcPts val="600"/>
-              </a:spcAft>
-              <a:defRPr sz="1300"/>
-            </a:pPr>
-            <a:r>
-              <a:t>– Furniture price/cost fix: up to ~$0.49M GM (back to 2021 GM%)</a:t>
-            </a:r>
-          </a:p>
-          <a:p>
-            <a:pPr lvl="1">
-              <a:spcAft>
-                <a:spcPts val="600"/>
-              </a:spcAft>
-              <a:defRPr sz="1300"/>
-            </a:pPr>
-            <a:r>
-              <a:t>– Store portfolio: 182 loss-making stores cost $1.0M; close/relocate worst decile, renegotiate leases, or test smaller formats</a:t>
-            </a:r>
-          </a:p>
-          <a:p>
-            <a:pPr lvl="1">
-              <a:spcAft>
-                <a:spcPts val="600"/>
-              </a:spcAft>
-              <a:defRPr sz="1300"/>
-            </a:pPr>
-            <a:r>
-              <a:t>– Pricing discipline: pass through cost inflation category by category (price-cost spread KPI)</a:t>
-            </a:r>
-          </a:p>
-          <a:p>
-            <a:pPr lvl="1">
-              <a:spcAft>
-                <a:spcPts val="600"/>
-              </a:spcAft>
-              <a:defRPr sz="1300"/>
-            </a:pPr>
-            <a:r>
-              <a:t>– Focus growth capital on West/CA format that works; gate new openings on a payback model</a:t>
+              <a:t>• 4 of the top 5 stores are in California: driven by price list, not only execution</a:t>
             </a:r>
           </a:p>
           <a:p>
             <a:pPr>
               <a:spcAft>
-                <a:spcPts val="600"/>
+                <a:spcPts val="500"/>
               </a:spcAft>
-              <a:defRPr sz="1500"/>
+              <a:defRPr sz="1200"/>
             </a:pPr>
             <a:r>
-              <a:t>• Issues to investigate</a:t>
-            </a:r>
-          </a:p>
-          <a:p>
-            <a:pPr lvl="1">
+              <a:t>• 182 loss-making stores lose $1,002k in total; 130 of 178 base-list and 31 of 33 Township stores</a:t>
+            </a:r>
+          </a:p>
+          <a:p>
+            <a:pPr>
               <a:spcAft>
-                <a:spcPts val="600"/>
+                <a:spcPts val="500"/>
               </a:spcAft>
-              <a:defRPr sz="1300"/>
+              <a:defRPr sz="1200"/>
             </a:pPr>
             <a:r>
-              <a:t>– 'Unknown' store/product 99901: 100 Manual lines, Jun-2022, $12.9k, ingested before the sale date</a:t>
-            </a:r>
-          </a:p>
-          <a:p>
-            <a:pPr lvl="1">
+              <a:t>• Base-list GM % was 28.8% in 2021 and 23.6% in 2022: too thin to cover opex</a:t>
+            </a:r>
+          </a:p>
+          <a:p>
+            <a:pPr>
               <a:spcAft>
-                <a:spcPts val="600"/>
+                <a:spcPts val="500"/>
               </a:spcAft>
-              <a:defRPr sz="1300"/>
+              <a:defRPr sz="1200"/>
             </a:pPr>
             <a:r>
-              <a:t>– Returns only ever recorded via Manual source — POS/ERP returns missing? Returns value +21% in 2022</a:t>
-            </a:r>
-          </a:p>
-          <a:p>
-            <a:pPr lvl="1">
-              <a:spcAft>
-                <a:spcPts val="600"/>
-              </a:spcAft>
-              <a:defRPr sz="1300"/>
-            </a:pPr>
-            <a:r>
-              <a:t>– 9,815 duplicate ingests across systems; cost values differ between copies</a:t>
-            </a:r>
-          </a:p>
-          <a:p>
-            <a:pPr lvl="1">
-              <a:spcAft>
-                <a:spcPts val="600"/>
-              </a:spcAft>
-              <a:defRPr sz="1300"/>
-            </a:pPr>
-            <a:r>
-              <a:t>– Store master data: region conflicts (MD), 10x opex restatement (store 50), duplicate store names (Wayne, IN)</a:t>
+              <a:t>• New stores: 14 opened in 2022 (avg 10.6 months) lost $107k pro-rated</a:t>
             </a:r>
           </a:p>
         </p:txBody>
@@ -5753,7 +6414,7 @@
               </a:defRPr>
             </a:pPr>
             <a:r>
-              <a:t>Assumptions, trade-offs, and what I would do with more time</a:t>
+              <a:t>Q4 &amp; Q5: how to grow profit, and what needs investigation</a:t>
             </a:r>
           </a:p>
         </p:txBody>
@@ -5782,56 +6443,122 @@
           <a:p>
             <a:pPr>
               <a:spcAft>
-                <a:spcPts val="600"/>
+                <a:spcPts val="500"/>
               </a:spcAft>
-              <a:defRPr sz="1600"/>
+              <a:defRPr sz="1500"/>
             </a:pPr>
             <a:r>
-              <a:t>• Assumptions: monthly grain is the economic date; landed cost = true cost; opex annual &amp; fully charged to active stores</a:t>
+              <a:t>• Profit levers (2022 base; sizes assume no volume response unless stated)</a:t>
+            </a:r>
+          </a:p>
+          <a:p>
+            <a:pPr lvl="1">
+              <a:spcAft>
+                <a:spcPts val="500"/>
+              </a:spcAft>
+              <a:defRPr sz="1300"/>
+            </a:pPr>
+            <a:r>
+              <a:t>– Furniture: restore list markup -&gt; up to $556k GM</a:t>
+            </a:r>
+          </a:p>
+          <a:p>
+            <a:pPr lvl="1">
+              <a:spcAft>
+                <a:spcPts val="500"/>
+              </a:spcAft>
+              <a:defRPr sz="1300"/>
+            </a:pPr>
+            <a:r>
+              <a:t>– Base price list: +1% = ~$69k GM; a +5% test breaks even at a 17% volume loss. Run a controlled regional test before rolling out</a:t>
+            </a:r>
+          </a:p>
+          <a:p>
+            <a:pPr lvl="1">
+              <a:spcAft>
+                <a:spcPts val="500"/>
+              </a:spcAft>
+              <a:defRPr sz="1300"/>
+            </a:pPr>
+            <a:r>
+              <a:t>– Pricing process: monthly price ÷ cost check per product; alert when markup moves (would have caught Furniture in Jan-2022)</a:t>
+            </a:r>
+          </a:p>
+          <a:p>
+            <a:pPr lvl="1">
+              <a:spcAft>
+                <a:spcPts val="500"/>
+              </a:spcAft>
+              <a:defRPr sz="1300"/>
+            </a:pPr>
+            <a:r>
+              <a:t>– Store portfolio: review the long tail only after pricing; gate openings on a payback model</a:t>
             </a:r>
           </a:p>
           <a:p>
             <a:pPr>
               <a:spcAft>
-                <a:spcPts val="600"/>
+                <a:spcPts val="500"/>
               </a:spcAft>
-              <a:defRPr sz="1600"/>
+              <a:defRPr sz="1500"/>
             </a:pPr>
             <a:r>
-              <a:t>• Trade-offs: mode() for conflicting attributes (simple, explainable) instead of SCD2 history; views for staging/intermediate</a:t>
-            </a:r>
-          </a:p>
-          <a:p>
-            <a:pPr>
-              <a:spcAft>
-                <a:spcPts val="600"/>
-              </a:spcAft>
-              <a:defRPr sz="1600"/>
-            </a:pPr>
-            <a:r>
-              <a:t>• Not done (time): incremental fct_sales, SCD2 dim_store / dim_product with effective dates, unit tests on dedup rule,</a:t>
+              <a:t>• Investigate</a:t>
             </a:r>
           </a:p>
           <a:p>
             <a:pPr lvl="1">
               <a:spcAft>
-                <a:spcPts val="600"/>
+                <a:spcPts val="500"/>
               </a:spcAft>
-              <a:defRPr sz="1400"/>
+              <a:defRPr sz="1300"/>
             </a:pPr>
             <a:r>
-              <a:t>– dbt source freshness &amp; DQ dashboards, mix effect split inside volume, store-level like-for-like with partial years</a:t>
-            </a:r>
-          </a:p>
-          <a:p>
-            <a:pPr>
+              <a:t>– Who set Furniture prices in 2022, and is the landed cost right (AP/Ops)?</a:t>
+            </a:r>
+          </a:p>
+          <a:p>
+            <a:pPr lvl="1">
               <a:spcAft>
-                <a:spcPts val="600"/>
+                <a:spcPts val="500"/>
               </a:spcAft>
-              <a:defRPr sz="1600"/>
+              <a:defRPr sz="1300"/>
             </a:pPr>
             <a:r>
-              <a:t>• Next: confirm Furniture landed-cost change with AP/Ops; agree one margin definition with Finance; store P&amp;L review</a:t>
+              <a:t>– 'Unknown' store / product 99901: 100 Manual lines in Jun-2022 ($13k), ingested before the sale date</a:t>
+            </a:r>
+          </a:p>
+          <a:p>
+            <a:pPr lvl="1">
+              <a:spcAft>
+                <a:spcPts val="500"/>
+              </a:spcAft>
+              <a:defRPr sz="1300"/>
+            </a:pPr>
+            <a:r>
+              <a:t>– Returns appear only in the Manual source (4,907 lines; 0 elsewhere): are POS/ERP returns missing? Returns value +21.5% in 2022</a:t>
+            </a:r>
+          </a:p>
+          <a:p>
+            <a:pPr lvl="1">
+              <a:spcAft>
+                <a:spcPts val="500"/>
+              </a:spcAft>
+              <a:defRPr sz="1300"/>
+            </a:pPr>
+            <a:r>
+              <a:t>– 9,815 transactions ingested twice across systems; cost values differ between copies</a:t>
+            </a:r>
+          </a:p>
+          <a:p>
+            <a:pPr lvl="1">
+              <a:spcAft>
+                <a:spcPts val="500"/>
+              </a:spcAft>
+              <a:defRPr sz="1300"/>
+            </a:pPr>
+            <a:r>
+              <a:t>– Store master data: conflicting regions (MD), 10x opex restatement (store 50), duplicate store names (Wayne, IN)</a:t>
             </a:r>
           </a:p>
         </p:txBody>
@@ -5884,7 +6611,7 @@
               </a:defRPr>
             </a:pPr>
             <a:r>
-              <a:t>Executive summary — recommendations first</a:t>
+              <a:t>Executive summary — what the business should do</a:t>
             </a:r>
           </a:p>
         </p:txBody>
@@ -5913,78 +6640,56 @@
           <a:p>
             <a:pPr>
               <a:spcAft>
-                <a:spcPts val="600"/>
+                <a:spcPts val="500"/>
               </a:spcAft>
               <a:defRPr sz="1600"/>
             </a:pPr>
             <a:r>
-              <a:t>• 1. Fix Furniture pricing / sourcing now. Landed cost per unit rose ~36% in Jan-2022, prices did not move. Furniture GM fell $659k -&gt; $167k ($-492k); GM% 32% -&gt; 7%.</a:t>
-            </a:r>
-          </a:p>
-          <a:p>
-            <a:pPr lvl="1">
-              <a:spcAft>
-                <a:spcPts val="600"/>
-              </a:spcAft>
-              <a:defRPr sz="1400"/>
-            </a:pPr>
-            <a:r>
-              <a:t>– Restoring 2021 margin needs ~+36% price, or a supplier/freight renegotiation; otherwise review range depth.</a:t>
+              <a:t>1. Restore Furniture pricing now. Landed cost rose ~36% in Jan-2022; list price fell. Furniture GM $659k -&gt; $167k. Restoring the 2021 margin is worth up to $556k a year (if volume holds; confirm the cost rise with AP/Ops first).</a:t>
             </a:r>
           </a:p>
           <a:p>
             <a:pPr>
               <a:spcAft>
-                <a:spcPts val="600"/>
+                <a:spcPts val="500"/>
               </a:spcAft>
               <a:defRPr sz="1600"/>
             </a:pPr>
             <a:r>
-              <a:t>• 2. Report margin on landed cost, not standard cost. On standard cost 2022 GM looks $5.12M (+8%); actual is $4.78M (+0.6%). The $346k gap is invisible in the budget view.</a:t>
+              <a:t>2. Test higher prices outside California. California charges ~1.7x the base price list and still sells 43% more units per sq ft. Each +1% on the base list is ~$69k GM; a +5% rise pays off unless volume falls more than 17%.</a:t>
             </a:r>
           </a:p>
           <a:p>
             <a:pPr>
               <a:spcAft>
-                <a:spcPts val="600"/>
+                <a:spcPts val="500"/>
               </a:spcAft>
               <a:defRPr sz="1600"/>
             </a:pPr>
             <a:r>
-              <a:t>• 3. Store portfolio review. 182 of 287 stores lose money after direct opex ($-1,002k). The West (CA) generates &gt;100% of store contribution; Northeast turned negative in 2022.</a:t>
-            </a:r>
-          </a:p>
-          <a:p>
-            <a:pPr lvl="1">
-              <a:spcAft>
-                <a:spcPts val="600"/>
-              </a:spcAft>
-              <a:defRPr sz="1400"/>
-            </a:pPr>
-            <a:r>
-              <a:t>– Pause openings outside proven markets: new stores lost $127k in their first year (2022).</a:t>
+              <a:t>3. Report margin on landed cost and track price-vs-cost monthly. Standard cost shows 2022 GM +8.1%; actual is +0.6%. The pricing process passes cost through for every category except Furniture in 2022 — find out why it failed.</a:t>
             </a:r>
           </a:p>
           <a:p>
             <a:pPr>
               <a:spcAft>
-                <a:spcPts val="600"/>
+                <a:spcPts val="500"/>
               </a:spcAft>
               <a:defRPr sz="1600"/>
             </a:pPr>
             <a:r>
-              <a:t>• 4. Growth is volume-led: +$1,156k volume vs +$63k price. ASP growth is decelerating (+5.0%, +2.5%, +1.0%).</a:t>
+              <a:t>4. Don't close stores on this evidence. 182 of 287 stores lose money after direct opex, but losses sit on the low price lists: 130 of 178 base and 31 of 33 Township stores vs 20 of 74 in California. Fix price first, then review the tail.</a:t>
             </a:r>
           </a:p>
           <a:p>
             <a:pPr>
               <a:spcAft>
-                <a:spcPts val="600"/>
+                <a:spcPts val="500"/>
               </a:spcAft>
               <a:defRPr sz="1600"/>
             </a:pPr>
             <a:r>
-              <a:t>• 5. Investigate data/process issues: placeholder 'Unknown' store/product rows, manual-only returns, duplicate ingests.</a:t>
+              <a:t>5. Gate new openings: the 14 stores opened in 2022 lost $107k pro-rated in year one.</a:t>
             </a:r>
           </a:p>
         </p:txBody>
@@ -6049,7 +6754,7 @@
               </a:defRPr>
             </a:pPr>
             <a:r>
-              <a:t>uv run dbt build: 12 models, 23 tests, all passing</a:t>
+              <a:t>uv run dbt build: 17 models, 38 tests, all passing (incl. reconciliation tests)</a:t>
             </a:r>
           </a:p>
         </p:txBody>
@@ -6062,8 +6767,8 @@
         </p:nvSpPr>
         <p:spPr>
           <a:xfrm>
-            <a:off x="274320" y="2926080"/>
-            <a:ext cx="2011680" cy="1005840"/>
+            <a:off x="182880" y="2834640"/>
+            <a:ext cx="1828800" cy="1005840"/>
           </a:xfrm>
           <a:prstGeom prst="roundRect">
             <a:avLst/>
@@ -6140,8 +6845,8 @@
         </p:nvSpPr>
         <p:spPr>
           <a:xfrm>
-            <a:off x="2560320" y="2834640"/>
-            <a:ext cx="2286000" cy="1188720"/>
+            <a:off x="2194560" y="2743200"/>
+            <a:ext cx="2011680" cy="1188720"/>
           </a:xfrm>
           <a:prstGeom prst="roundRect">
             <a:avLst/>
@@ -6193,7 +6898,7 @@
               </a:defRPr>
             </a:pPr>
             <a:r>
-              <a:t>snake_case, types, per-unit costs,</a:t>
+              <a:t>types, per-unit costs,</a:t>
             </a:r>
           </a:p>
           <a:p>
@@ -6218,8 +6923,8 @@
         </p:nvSpPr>
         <p:spPr>
           <a:xfrm>
-            <a:off x="5120640" y="1463040"/>
-            <a:ext cx="2194560" cy="914400"/>
+            <a:off x="4434840" y="1417320"/>
+            <a:ext cx="2194560" cy="713232"/>
           </a:xfrm>
           <a:prstGeom prst="roundRect">
             <a:avLst/>
@@ -6284,8 +6989,8 @@
         </p:nvSpPr>
         <p:spPr>
           <a:xfrm>
-            <a:off x="5120640" y="2651760"/>
-            <a:ext cx="2194560" cy="914400"/>
+            <a:off x="4434840" y="2221992"/>
+            <a:ext cx="2194560" cy="713232"/>
           </a:xfrm>
           <a:prstGeom prst="roundRect">
             <a:avLst/>
@@ -6350,8 +7055,8 @@
         </p:nvSpPr>
         <p:spPr>
           <a:xfrm>
-            <a:off x="5120640" y="3840480"/>
-            <a:ext cx="2194560" cy="914400"/>
+            <a:off x="4434840" y="3026664"/>
+            <a:ext cx="2194560" cy="713232"/>
           </a:xfrm>
           <a:prstGeom prst="roundRect">
             <a:avLst/>
@@ -6416,8 +7121,8 @@
         </p:nvSpPr>
         <p:spPr>
           <a:xfrm>
-            <a:off x="5120640" y="5029200"/>
-            <a:ext cx="2194560" cy="914400"/>
+            <a:off x="4434840" y="3831336"/>
+            <a:ext cx="2194560" cy="713232"/>
           </a:xfrm>
           <a:prstGeom prst="roundRect">
             <a:avLst/>
@@ -6469,7 +7174,7 @@
               </a:defRPr>
             </a:pPr>
             <a:r>
-              <a:t>key repair, unknown members</a:t>
+              <a:t>key repair, unknown member</a:t>
             </a:r>
           </a:p>
         </p:txBody>
@@ -6482,8 +7187,140 @@
         </p:nvSpPr>
         <p:spPr>
           <a:xfrm>
-            <a:off x="7589520" y="1920240"/>
-            <a:ext cx="1828800" cy="914400"/>
+            <a:off x="4434840" y="4636008"/>
+            <a:ext cx="2194560" cy="713232"/>
+          </a:xfrm>
+          <a:prstGeom prst="roundRect">
+            <a:avLst/>
+          </a:prstGeom>
+          <a:solidFill>
+            <a:srgbClr val="EEF1F6"/>
+          </a:solidFill>
+          <a:ln>
+            <a:solidFill>
+              <a:srgbClr val="1F2A44"/>
+            </a:solidFill>
+          </a:ln>
+        </p:spPr>
+        <p:style>
+          <a:lnRef idx="1">
+            <a:schemeClr val="accent1"/>
+          </a:lnRef>
+          <a:fillRef idx="3">
+            <a:schemeClr val="accent1"/>
+          </a:fillRef>
+          <a:effectRef idx="2">
+            <a:schemeClr val="accent1"/>
+          </a:effectRef>
+          <a:fontRef idx="minor">
+            <a:schemeClr val="lt1"/>
+          </a:fontRef>
+        </p:style>
+        <p:txBody>
+          <a:bodyPr rtlCol="0" anchor="ctr" wrap="square"/>
+          <a:lstStyle/>
+          <a:p>
+            <a:pPr>
+              <a:defRPr sz="1000">
+                <a:solidFill>
+                  <a:srgbClr val="1F2A44"/>
+                </a:solidFill>
+              </a:defRPr>
+            </a:pPr>
+            <a:r>
+              <a:t>int_transaction_price_index</a:t>
+            </a:r>
+          </a:p>
+          <a:p>
+            <a:pPr>
+              <a:defRPr sz="1000">
+                <a:solidFill>
+                  <a:srgbClr val="1F2A44"/>
+                </a:solidFill>
+              </a:defRPr>
+            </a:pPr>
+            <a:r>
+              <a:t>price vs list price</a:t>
+            </a:r>
+          </a:p>
+        </p:txBody>
+      </p:sp>
+      <p:sp>
+        <p:nvSpPr>
+          <p:cNvPr id="10" name="Rounded Rectangle 9"/>
+          <p:cNvSpPr/>
+          <p:nvPr/>
+        </p:nvSpPr>
+        <p:spPr>
+          <a:xfrm>
+            <a:off x="4434840" y="5440680"/>
+            <a:ext cx="2194560" cy="713232"/>
+          </a:xfrm>
+          <a:prstGeom prst="roundRect">
+            <a:avLst/>
+          </a:prstGeom>
+          <a:solidFill>
+            <a:srgbClr val="EEF1F6"/>
+          </a:solidFill>
+          <a:ln>
+            <a:solidFill>
+              <a:srgbClr val="1F2A44"/>
+            </a:solidFill>
+          </a:ln>
+        </p:spPr>
+        <p:style>
+          <a:lnRef idx="1">
+            <a:schemeClr val="accent1"/>
+          </a:lnRef>
+          <a:fillRef idx="3">
+            <a:schemeClr val="accent1"/>
+          </a:fillRef>
+          <a:effectRef idx="2">
+            <a:schemeClr val="accent1"/>
+          </a:effectRef>
+          <a:fontRef idx="minor">
+            <a:schemeClr val="lt1"/>
+          </a:fontRef>
+        </p:style>
+        <p:txBody>
+          <a:bodyPr rtlCol="0" anchor="ctr" wrap="square"/>
+          <a:lstStyle/>
+          <a:p>
+            <a:pPr>
+              <a:defRPr sz="1000">
+                <a:solidFill>
+                  <a:srgbClr val="1F2A44"/>
+                </a:solidFill>
+              </a:defRPr>
+            </a:pPr>
+            <a:r>
+              <a:t>int_store_price_list</a:t>
+            </a:r>
+          </a:p>
+          <a:p>
+            <a:pPr>
+              <a:defRPr sz="1000">
+                <a:solidFill>
+                  <a:srgbClr val="1F2A44"/>
+                </a:solidFill>
+              </a:defRPr>
+            </a:pPr>
+            <a:r>
+              <a:t>store's regular price list</a:t>
+            </a:r>
+          </a:p>
+        </p:txBody>
+      </p:sp>
+      <p:sp>
+        <p:nvSpPr>
+          <p:cNvPr id="11" name="Rounded Rectangle 10"/>
+          <p:cNvSpPr/>
+          <p:nvPr/>
+        </p:nvSpPr>
+        <p:spPr>
+          <a:xfrm>
+            <a:off x="6858000" y="2103120"/>
+            <a:ext cx="1737360" cy="868680"/>
           </a:xfrm>
           <a:prstGeom prst="roundRect">
             <a:avLst/>
@@ -6530,14 +7367,14 @@
       </p:sp>
       <p:sp>
         <p:nvSpPr>
-          <p:cNvPr id="10" name="Rounded Rectangle 9"/>
+          <p:cNvPr id="12" name="Rounded Rectangle 11"/>
           <p:cNvSpPr/>
           <p:nvPr/>
         </p:nvSpPr>
         <p:spPr>
           <a:xfrm>
-            <a:off x="7589520" y="3108960"/>
-            <a:ext cx="1828800" cy="914400"/>
+            <a:off x="6858000" y="3154679"/>
+            <a:ext cx="1737360" cy="868680"/>
           </a:xfrm>
           <a:prstGeom prst="roundRect">
             <a:avLst/>
@@ -6580,18 +7417,30 @@
               <a:t>dim_store</a:t>
             </a:r>
           </a:p>
+          <a:p>
+            <a:pPr>
+              <a:defRPr sz="1000">
+                <a:solidFill>
+                  <a:srgbClr val="1F2A44"/>
+                </a:solidFill>
+              </a:defRPr>
+            </a:pPr>
+            <a:r>
+              <a:t>(+ price list)</a:t>
+            </a:r>
+          </a:p>
         </p:txBody>
       </p:sp>
       <p:sp>
         <p:nvSpPr>
-          <p:cNvPr id="11" name="Rounded Rectangle 10"/>
+          <p:cNvPr id="13" name="Rounded Rectangle 12"/>
           <p:cNvSpPr/>
           <p:nvPr/>
         </p:nvSpPr>
         <p:spPr>
           <a:xfrm>
-            <a:off x="7589520" y="4297680"/>
-            <a:ext cx="1828800" cy="914400"/>
+            <a:off x="6858000" y="4206240"/>
+            <a:ext cx="1737360" cy="868680"/>
           </a:xfrm>
           <a:prstGeom prst="roundRect">
             <a:avLst/>
@@ -6650,14 +7499,14 @@
       </p:sp>
       <p:sp>
         <p:nvSpPr>
-          <p:cNvPr id="12" name="Rounded Rectangle 11"/>
+          <p:cNvPr id="14" name="Rounded Rectangle 13"/>
           <p:cNvSpPr/>
           <p:nvPr/>
         </p:nvSpPr>
         <p:spPr>
           <a:xfrm>
-            <a:off x="9692640" y="1463040"/>
-            <a:ext cx="2194560" cy="914400"/>
+            <a:off x="8823960" y="1417320"/>
+            <a:ext cx="3017520" cy="594360"/>
           </a:xfrm>
           <a:prstGeom prst="roundRect">
             <a:avLst/>
@@ -6704,14 +7553,14 @@
       </p:sp>
       <p:sp>
         <p:nvSpPr>
-          <p:cNvPr id="13" name="Rounded Rectangle 12"/>
+          <p:cNvPr id="15" name="Rounded Rectangle 14"/>
           <p:cNvSpPr/>
           <p:nvPr/>
         </p:nvSpPr>
         <p:spPr>
           <a:xfrm>
-            <a:off x="9692640" y="2651760"/>
-            <a:ext cx="2194560" cy="914400"/>
+            <a:off x="8823960" y="2103120"/>
+            <a:ext cx="3017520" cy="594360"/>
           </a:xfrm>
           <a:prstGeom prst="roundRect">
             <a:avLst/>
@@ -6758,14 +7607,14 @@
       </p:sp>
       <p:sp>
         <p:nvSpPr>
-          <p:cNvPr id="14" name="Rounded Rectangle 13"/>
+          <p:cNvPr id="16" name="Rounded Rectangle 15"/>
           <p:cNvSpPr/>
           <p:nvPr/>
         </p:nvSpPr>
         <p:spPr>
           <a:xfrm>
-            <a:off x="9692640" y="3840480"/>
-            <a:ext cx="2194560" cy="914400"/>
+            <a:off x="8823960" y="2788920"/>
+            <a:ext cx="3017520" cy="594360"/>
           </a:xfrm>
           <a:prstGeom prst="roundRect">
             <a:avLst/>
@@ -6812,14 +7661,14 @@
       </p:sp>
       <p:sp>
         <p:nvSpPr>
-          <p:cNvPr id="15" name="Rounded Rectangle 14"/>
+          <p:cNvPr id="17" name="Rounded Rectangle 16"/>
           <p:cNvSpPr/>
           <p:nvPr/>
         </p:nvSpPr>
         <p:spPr>
           <a:xfrm>
-            <a:off x="9692640" y="5029200"/>
-            <a:ext cx="2194560" cy="914400"/>
+            <a:off x="8823960" y="3474720"/>
+            <a:ext cx="3017520" cy="594360"/>
           </a:xfrm>
           <a:prstGeom prst="roundRect">
             <a:avLst/>
@@ -6859,6 +7708,168 @@
               </a:defRPr>
             </a:pPr>
             <a:r>
+              <a:t>mart_price_list_yearly</a:t>
+            </a:r>
+          </a:p>
+        </p:txBody>
+      </p:sp>
+      <p:sp>
+        <p:nvSpPr>
+          <p:cNvPr id="18" name="Rounded Rectangle 17"/>
+          <p:cNvSpPr/>
+          <p:nvPr/>
+        </p:nvSpPr>
+        <p:spPr>
+          <a:xfrm>
+            <a:off x="8823960" y="4160520"/>
+            <a:ext cx="3017520" cy="594360"/>
+          </a:xfrm>
+          <a:prstGeom prst="roundRect">
+            <a:avLst/>
+          </a:prstGeom>
+          <a:solidFill>
+            <a:srgbClr val="D5F0DD"/>
+          </a:solidFill>
+          <a:ln>
+            <a:solidFill>
+              <a:srgbClr val="1F2A44"/>
+            </a:solidFill>
+          </a:ln>
+        </p:spPr>
+        <p:style>
+          <a:lnRef idx="1">
+            <a:schemeClr val="accent1"/>
+          </a:lnRef>
+          <a:fillRef idx="3">
+            <a:schemeClr val="accent1"/>
+          </a:fillRef>
+          <a:effectRef idx="2">
+            <a:schemeClr val="accent1"/>
+          </a:effectRef>
+          <a:fontRef idx="minor">
+            <a:schemeClr val="lt1"/>
+          </a:fontRef>
+        </p:style>
+        <p:txBody>
+          <a:bodyPr rtlCol="0" anchor="ctr" wrap="square"/>
+          <a:lstStyle/>
+          <a:p>
+            <a:pPr>
+              <a:defRPr sz="1000">
+                <a:solidFill>
+                  <a:srgbClr val="1F2A44"/>
+                </a:solidFill>
+              </a:defRPr>
+            </a:pPr>
+            <a:r>
+              <a:t>mart_sales_bridge_yearly</a:t>
+            </a:r>
+          </a:p>
+        </p:txBody>
+      </p:sp>
+      <p:sp>
+        <p:nvSpPr>
+          <p:cNvPr id="19" name="Rounded Rectangle 18"/>
+          <p:cNvSpPr/>
+          <p:nvPr/>
+        </p:nvSpPr>
+        <p:spPr>
+          <a:xfrm>
+            <a:off x="8823960" y="4846320"/>
+            <a:ext cx="3017520" cy="594360"/>
+          </a:xfrm>
+          <a:prstGeom prst="roundRect">
+            <a:avLst/>
+          </a:prstGeom>
+          <a:solidFill>
+            <a:srgbClr val="D5F0DD"/>
+          </a:solidFill>
+          <a:ln>
+            <a:solidFill>
+              <a:srgbClr val="1F2A44"/>
+            </a:solidFill>
+          </a:ln>
+        </p:spPr>
+        <p:style>
+          <a:lnRef idx="1">
+            <a:schemeClr val="accent1"/>
+          </a:lnRef>
+          <a:fillRef idx="3">
+            <a:schemeClr val="accent1"/>
+          </a:fillRef>
+          <a:effectRef idx="2">
+            <a:schemeClr val="accent1"/>
+          </a:effectRef>
+          <a:fontRef idx="minor">
+            <a:schemeClr val="lt1"/>
+          </a:fontRef>
+        </p:style>
+        <p:txBody>
+          <a:bodyPr rtlCol="0" anchor="ctr" wrap="square"/>
+          <a:lstStyle/>
+          <a:p>
+            <a:pPr>
+              <a:defRPr sz="1000">
+                <a:solidFill>
+                  <a:srgbClr val="1F2A44"/>
+                </a:solidFill>
+              </a:defRPr>
+            </a:pPr>
+            <a:r>
+              <a:t>mart_price_monthly</a:t>
+            </a:r>
+          </a:p>
+        </p:txBody>
+      </p:sp>
+      <p:sp>
+        <p:nvSpPr>
+          <p:cNvPr id="20" name="Rounded Rectangle 19"/>
+          <p:cNvSpPr/>
+          <p:nvPr/>
+        </p:nvSpPr>
+        <p:spPr>
+          <a:xfrm>
+            <a:off x="8823960" y="5532120"/>
+            <a:ext cx="3017520" cy="594360"/>
+          </a:xfrm>
+          <a:prstGeom prst="roundRect">
+            <a:avLst/>
+          </a:prstGeom>
+          <a:solidFill>
+            <a:srgbClr val="D5F0DD"/>
+          </a:solidFill>
+          <a:ln>
+            <a:solidFill>
+              <a:srgbClr val="1F2A44"/>
+            </a:solidFill>
+          </a:ln>
+        </p:spPr>
+        <p:style>
+          <a:lnRef idx="1">
+            <a:schemeClr val="accent1"/>
+          </a:lnRef>
+          <a:fillRef idx="3">
+            <a:schemeClr val="accent1"/>
+          </a:fillRef>
+          <a:effectRef idx="2">
+            <a:schemeClr val="accent1"/>
+          </a:effectRef>
+          <a:fontRef idx="minor">
+            <a:schemeClr val="lt1"/>
+          </a:fontRef>
+        </p:style>
+        <p:txBody>
+          <a:bodyPr rtlCol="0" anchor="ctr" wrap="square"/>
+          <a:lstStyle/>
+          <a:p>
+            <a:pPr>
+              <a:defRPr sz="1000">
+                <a:solidFill>
+                  <a:srgbClr val="1F2A44"/>
+                </a:solidFill>
+              </a:defRPr>
+            </a:pPr>
+            <a:r>
               <a:t>mart_sales_monthly</a:t>
             </a:r>
           </a:p>
@@ -6866,14 +7877,14 @@
       </p:sp>
       <p:sp>
         <p:nvSpPr>
-          <p:cNvPr id="16" name="TextBox 15"/>
+          <p:cNvPr id="21" name="TextBox 20"/>
           <p:cNvSpPr txBox="1"/>
           <p:nvPr/>
         </p:nvSpPr>
         <p:spPr>
           <a:xfrm>
-            <a:off x="274320" y="6172200"/>
-            <a:ext cx="11430000" cy="457200"/>
+            <a:off x="4434840" y="1005840"/>
+            <a:ext cx="2743200" cy="365760"/>
           </a:xfrm>
           <a:prstGeom prst="rect">
             <a:avLst/>
@@ -6888,26 +7899,26 @@
           <a:p>
             <a:pPr>
               <a:spcAft>
-                <a:spcPts val="600"/>
+                <a:spcPts val="500"/>
               </a:spcAft>
               <a:defRPr sz="1200"/>
             </a:pPr>
             <a:r>
-              <a:t>• staging: views (cheap, always fresh)  |  intermediate: views  |  marts: tables (what the deck and BI read)</a:t>
+              <a:t>• intermediate (views)</a:t>
             </a:r>
           </a:p>
         </p:txBody>
       </p:sp>
       <p:sp>
         <p:nvSpPr>
-          <p:cNvPr id="17" name="TextBox 16"/>
+          <p:cNvPr id="22" name="TextBox 21"/>
           <p:cNvSpPr txBox="1"/>
           <p:nvPr/>
         </p:nvSpPr>
         <p:spPr>
           <a:xfrm>
-            <a:off x="5120640" y="1051560"/>
-            <a:ext cx="2286000" cy="365760"/>
+            <a:off x="6858000" y="1005840"/>
+            <a:ext cx="2743200" cy="365760"/>
           </a:xfrm>
           <a:prstGeom prst="rect">
             <a:avLst/>
@@ -6922,26 +7933,26 @@
           <a:p>
             <a:pPr>
               <a:spcAft>
-                <a:spcPts val="600"/>
+                <a:spcPts val="500"/>
               </a:spcAft>
               <a:defRPr sz="1200"/>
             </a:pPr>
             <a:r>
-              <a:t>• intermediate</a:t>
+              <a:t>• star schema (tables)</a:t>
             </a:r>
           </a:p>
         </p:txBody>
       </p:sp>
       <p:sp>
         <p:nvSpPr>
-          <p:cNvPr id="18" name="TextBox 17"/>
+          <p:cNvPr id="23" name="TextBox 22"/>
           <p:cNvSpPr txBox="1"/>
           <p:nvPr/>
         </p:nvSpPr>
         <p:spPr>
           <a:xfrm>
-            <a:off x="7589520" y="1051560"/>
-            <a:ext cx="2286000" cy="365760"/>
+            <a:off x="8823960" y="1005840"/>
+            <a:ext cx="2743200" cy="365760"/>
           </a:xfrm>
           <a:prstGeom prst="rect">
             <a:avLst/>
@@ -6956,46 +7967,12 @@
           <a:p>
             <a:pPr>
               <a:spcAft>
-                <a:spcPts val="600"/>
+                <a:spcPts val="500"/>
               </a:spcAft>
               <a:defRPr sz="1200"/>
             </a:pPr>
             <a:r>
-              <a:t>• marts: star schema</a:t>
-            </a:r>
-          </a:p>
-        </p:txBody>
-      </p:sp>
-      <p:sp>
-        <p:nvSpPr>
-          <p:cNvPr id="19" name="TextBox 18"/>
-          <p:cNvSpPr txBox="1"/>
-          <p:nvPr/>
-        </p:nvSpPr>
-        <p:spPr>
-          <a:xfrm>
-            <a:off x="9692640" y="1051560"/>
-            <a:ext cx="2286000" cy="365760"/>
-          </a:xfrm>
-          <a:prstGeom prst="rect">
-            <a:avLst/>
-          </a:prstGeom>
-          <a:noFill/>
-        </p:spPr>
-        <p:txBody>
-          <a:bodyPr wrap="square">
-            <a:spAutoFit/>
-          </a:bodyPr>
-          <a:lstStyle/>
-          <a:p>
-            <a:pPr>
-              <a:spcAft>
-                <a:spcPts val="600"/>
-              </a:spcAft>
-              <a:defRPr sz="1200"/>
-            </a:pPr>
-            <a:r>
-              <a:t>• marts: reporting</a:t>
+              <a:t>• reporting marts (tables)</a:t>
             </a:r>
           </a:p>
         </p:txBody>
@@ -7048,7 +8025,7 @@
               </a:defRPr>
             </a:pPr>
             <a:r>
-              <a:t>How the extract was normalised &amp; why the mart layer looks like this</a:t>
+              <a:t>Normalisation and why the mart layer has two tiers</a:t>
             </a:r>
           </a:p>
         </p:txBody>
@@ -7077,100 +8054,100 @@
           <a:p>
             <a:pPr>
               <a:spcAft>
-                <a:spcPts val="600"/>
+                <a:spcPts val="500"/>
               </a:spcAft>
               <a:defRPr sz="1500"/>
             </a:pPr>
             <a:r>
-              <a:t>• Grain decision: one fct_sales row per transaction_id (after dedup) = one sales line (month x store x product, qty, price)</a:t>
+              <a:t>• Grain: one fct_sales row per transaction_id (after dedup) = one sales line: month x store x product, qty, price</a:t>
             </a:r>
           </a:p>
           <a:p>
             <a:pPr lvl="1">
               <a:spcAft>
-                <a:spcPts val="600"/>
+                <a:spcPts val="500"/>
               </a:spcAft>
               <a:defRPr sz="1300"/>
             </a:pPr>
             <a:r>
-              <a:t>– Measures stored additive: net_sales, cogs_landed, cogs_standard, gross_margin(_standard) -&gt; safe to SUM at any level</a:t>
+              <a:t>– Additive measures only (net_sales, cogs_landed, cogs_standard, gross_margin) -&gt; safe to sum at any level</a:t>
             </a:r>
           </a:p>
           <a:p>
             <a:pPr>
               <a:spcAft>
-                <a:spcPts val="600"/>
+                <a:spcPts val="500"/>
               </a:spcAft>
               <a:defRPr sz="1500"/>
             </a:pPr>
             <a:r>
-              <a:t>• Dimensions pulled out of the repeated attributes: dim_product (17 + unknown), dim_store (287 + unknown)</a:t>
+              <a:t>• Dimensions taken out of the repeated attributes: dim_product (17 + unknown), dim_store (287 + unknown)</a:t>
             </a:r>
           </a:p>
           <a:p>
             <a:pPr lvl="1">
               <a:spcAft>
-                <a:spcPts val="600"/>
+                <a:spcPts val="500"/>
               </a:spcAft>
               <a:defRPr sz="1300"/>
             </a:pPr>
             <a:r>
-              <a:t>– Conformed 'unknown' member (-1) instead of dropping orphans -&gt; relationships tests pass, totals reconcile to source</a:t>
+              <a:t>– Unknown member (-1) instead of dropping orphans: totals reconcile to source, relationship tests pass</a:t>
+            </a:r>
+          </a:p>
+          <a:p>
+            <a:pPr lvl="1">
+              <a:spcAft>
+                <a:spcPts val="500"/>
+              </a:spcAft>
+              <a:defRPr sz="1300"/>
+            </a:pPr>
+            <a:r>
+              <a:t>– Store price list derived from the data (price ÷ product-month list price) and stored on dim_store</a:t>
             </a:r>
           </a:p>
           <a:p>
             <a:pPr>
               <a:spcAft>
-                <a:spcPts val="600"/>
+                <a:spcPts val="500"/>
               </a:spcAft>
               <a:defRPr sz="1500"/>
             </a:pPr>
             <a:r>
-              <a:t>• Two-tier mart layer:</a:t>
+              <a:t>• Tier 1 star schema = the reusable source of truth for any question; Tier 2 reporting marts at the CEO's grains</a:t>
             </a:r>
           </a:p>
           <a:p>
             <a:pPr lvl="1">
               <a:spcAft>
-                <a:spcPts val="600"/>
+                <a:spcPts val="500"/>
               </a:spcAft>
               <a:defRPr sz="1300"/>
             </a:pPr>
             <a:r>
-              <a:t>– Star schema (dim_product, dim_store, fct_sales) = reusable source of truth for any BI / ad-hoc question</a:t>
-            </a:r>
-          </a:p>
-          <a:p>
-            <a:pPr lvl="1">
-              <a:spcAft>
-                <a:spcPts val="600"/>
-              </a:spcAft>
-              <a:defRPr sz="1300"/>
-            </a:pPr>
-            <a:r>
-              <a:t>– Reporting marts at CEO grains (year, product-year, store-year, month x category x region) with YoY abs/%, price metrics and price/volume bridge pre-computed — the deck reads only these</a:t>
+              <a:t>– Business logic (YoY, opex basis, growth bridge, price health) is written once in SQL and tested; the deck only reads marts</a:t>
             </a:r>
           </a:p>
           <a:p>
             <a:pPr>
               <a:spcAft>
-                <a:spcPts val="600"/>
+                <a:spcPts val="500"/>
               </a:spcAft>
               <a:defRPr sz="1500"/>
             </a:pPr>
             <a:r>
-              <a:t>• Why: metric logic (YoY, opex allocation, PVM) lives once in SQL, tested; slides cannot drift from the model</a:t>
+              <a:t>• Tests: keys, relationships, accepted values; source -&gt; fact and fact -&gt; mart reconciliation; bridge sums exactly; assumption tests (duplicates agree, one landed cost per product-month, list price = California price)</a:t>
             </a:r>
           </a:p>
           <a:p>
             <a:pPr>
               <a:spcAft>
-                <a:spcPts val="600"/>
+                <a:spcPts val="500"/>
               </a:spcAft>
               <a:defRPr sz="1500"/>
             </a:pPr>
             <a:r>
-              <a:t>• Rejected: one wide 'OBT' mart (reintroduces the attribute conflicts), and putting YoY in Python (untestable, duplicated)</a:t>
+              <a:t>• Rejected: one wide reporting table (brings back the attribute conflicts); YoY and bridge logic in Python (untested, duplicated); SCD2 product history (effective dates contradict sales, e.g. Cosmetics sold from 2019 but effective from Jun-2020 -&gt; not trusted)</a:t>
             </a:r>
           </a:p>
         </p:txBody>
@@ -7223,7 +8200,7 @@
               </a:defRPr>
             </a:pPr>
             <a:r>
-              <a:t>Data-quality issues found and how each was handled</a:t>
+              <a:t>Data-quality issues and how each was handled</a:t>
             </a:r>
           </a:p>
           <a:p>
@@ -7235,7 +8212,7 @@
               </a:defRPr>
             </a:pPr>
             <a:r>
-              <a:t>Nothing silently dropped: every rule is flagged in fct_sales</a:t>
+              <a:t>Nothing dropped silently: every rule is flagged in fct_sales</a:t>
             </a:r>
           </a:p>
         </p:txBody>
@@ -7250,7 +8227,7 @@
         </p:nvGraphicFramePr>
         <p:xfrm>
           <a:off x="274320" y="1234440"/>
-          <a:ext cx="11612880" cy="4114800"/>
+          <a:ext cx="11612880" cy="4279392"/>
         </p:xfrm>
         <a:graphic>
           <a:graphicData uri="http://schemas.openxmlformats.org/drawingml/2006/table">
@@ -7259,12 +8236,12 @@
                 <a:tableStyleId>{5C22544A-7EE6-4342-B048-85BDC9FD1C3A}</a:tableStyleId>
               </a:tblPr>
               <a:tblGrid>
-                <a:gridCol w="2011680"/>
-                <a:gridCol w="3931920"/>
-                <a:gridCol w="3108960"/>
-                <a:gridCol w="2560320"/>
+                <a:gridCol w="1920240"/>
+                <a:gridCol w="4206240"/>
+                <a:gridCol w="3017520"/>
+                <a:gridCol w="2468880"/>
               </a:tblGrid>
-              <a:tr h="457200">
+              <a:tr h="475488">
                 <a:tc>
                   <a:txBody>
                     <a:bodyPr/>
@@ -7326,7 +8303,7 @@
                   <a:tcPr/>
                 </a:tc>
               </a:tr>
-              <a:tr h="457200">
+              <a:tr h="475488">
                 <a:tc>
                   <a:txBody>
                     <a:bodyPr/>
@@ -7351,7 +8328,7 @@
                         <a:defRPr sz="1000" b="0"/>
                       </a:pPr>
                       <a:r>
-                        <a:t>9,815 ids x2 rows; same date/store/product/qty/price, differ in lineage &amp; cost</a:t>
+                        <a:t>9,815 ids x2; identical date/store/product/qty/price/landed cost (tested)</a:t>
                       </a:r>
                     </a:p>
                   </a:txBody>
@@ -7381,14 +8358,14 @@
                         <a:defRPr sz="1000" b="0"/>
                       </a:pPr>
                       <a:r>
-                        <a:t>Sum both (double counts $0.90M sales)</a:t>
+                        <a:t>Sum both copies (double counts $0.90M sales)</a:t>
                       </a:r>
                     </a:p>
                   </a:txBody>
                   <a:tcPr/>
                 </a:tc>
               </a:tr>
-              <a:tr h="457200">
+              <a:tr h="475488">
                 <a:tc>
                   <a:txBody>
                     <a:bodyPr/>
@@ -7413,7 +8390,7 @@
                         <a:defRPr sz="1000" b="0"/>
                       </a:pPr>
                       <a:r>
-                        <a:t>Dining pack_size=2: unit_cost/price = 117% (sold below cost?)</a:t>
+                        <a:t>Dining pack_size=2: unit_cost / price = 117%</a:t>
                       </a:r>
                     </a:p>
                   </a:txBody>
@@ -7428,7 +8405,7 @@
                         <a:defRPr sz="1000" b="0"/>
                       </a:pPr>
                       <a:r>
-                        <a:t>unit/standard cost ÷ pack_size; landed already per unit</a:t>
+                        <a:t>unit &amp; standard cost ÷ pack_size; landed is already per unit</a:t>
                       </a:r>
                     </a:p>
                   </a:txBody>
@@ -7443,14 +8420,14 @@
                         <a:defRPr sz="1000" b="0"/>
                       </a:pPr>
                       <a:r>
-                        <a:t>Multiply by pack_size (makes it worse)</a:t>
+                        <a:t>Multiply by pack_size</a:t>
                       </a:r>
                     </a:p>
                   </a:txBody>
                   <a:tcPr/>
                 </a:tc>
               </a:tr>
-              <a:tr h="457200">
+              <a:tr h="475488">
                 <a:tc>
                   <a:txBody>
                     <a:bodyPr/>
@@ -7475,7 +8452,7 @@
                         <a:defRPr sz="1000" b="0"/>
                       </a:pPr>
                       <a:r>
-                        <a:t>Equal until 2022; Furniture landed +36% vs standard</a:t>
+                        <a:t>Landed: one value per product-month (tested). 2022 Furniture unit_cost = 0.68 x price on ~half the rows</a:t>
                       </a:r>
                     </a:p>
                   </a:txBody>
@@ -7505,14 +8482,14 @@
                         <a:defRPr sz="1000" b="0"/>
                       </a:pPr>
                       <a:r>
-                        <a:t>Standard (Finance) hides the 2022 cost shock</a:t>
+                        <a:t>Standard (Finance): hides the 2022 cost rise</a:t>
                       </a:r>
                     </a:p>
                   </a:txBody>
                   <a:tcPr/>
                 </a:tc>
               </a:tr>
-              <a:tr h="457200">
+              <a:tr h="475488">
                 <a:tc>
                   <a:txBody>
                     <a:bodyPr/>
@@ -7552,7 +8529,7 @@
                         <a:defRPr sz="1000" b="0"/>
                       </a:pPr>
                       <a:r>
-                        <a:t>Recover by name (store: name+state if 1:1)</a:t>
+                        <a:t>Recover by name (store: name + state where 1:1)</a:t>
                       </a:r>
                     </a:p>
                   </a:txBody>
@@ -7567,14 +8544,14 @@
                         <a:defRPr sz="1000" b="0"/>
                       </a:pPr>
                       <a:r>
-                        <a:t>Drop rows</a:t>
+                        <a:t>Drop the rows</a:t>
                       </a:r>
                     </a:p>
                   </a:txBody>
                   <a:tcPr/>
                 </a:tc>
               </a:tr>
-              <a:tr h="457200">
+              <a:tr h="475488">
                 <a:tc>
                   <a:txBody>
                     <a:bodyPr/>
@@ -7599,7 +8576,7 @@
                         <a:defRPr sz="1000" b="0"/>
                       </a:pPr>
                       <a:r>
-                        <a:t>100 Manual rows Jun-2022, 'Unknown' store+product; 85 ingested before txn date</a:t>
+                        <a:t>100 Manual rows Jun-2022, 'Unknown' store + product, ingested before sale date</a:t>
                       </a:r>
                     </a:p>
                   </a:txBody>
@@ -7614,7 +8591,7 @@
                         <a:defRPr sz="1000" b="0"/>
                       </a:pPr>
                       <a:r>
-                        <a:t>Map to unknown member -1, flag</a:t>
+                        <a:t>Unknown member -1, flagged</a:t>
                       </a:r>
                     </a:p>
                   </a:txBody>
@@ -7629,14 +8606,14 @@
                         <a:defRPr sz="1000" b="0"/>
                       </a:pPr>
                       <a:r>
-                        <a:t>Treat as a real store/product</a:t>
+                        <a:t>Treat as a real store / product</a:t>
                       </a:r>
                     </a:p>
                   </a:txBody>
                   <a:tcPr/>
                 </a:tc>
               </a:tr>
-              <a:tr h="457200">
+              <a:tr h="475488">
                 <a:tc>
                   <a:txBody>
                     <a:bodyPr/>
@@ -7646,7 +8623,7 @@
                         <a:defRPr sz="1000" b="0"/>
                       </a:pPr>
                       <a:r>
-                        <a:t>Conflicting store attrs</a:t>
+                        <a:t>Conflicting store attributes</a:t>
                       </a:r>
                     </a:p>
                   </a:txBody>
@@ -7661,7 +8638,7 @@
                         <a:defRPr sz="1000" b="0"/>
                       </a:pPr>
                       <a:r>
-                        <a:t>Stores 211/212 MD split NE/South; store 50 '(restated)' opex 10x</a:t>
+                        <a:t>Stores 211/212 (MD) split NE/South; store 50 '(restated)' opex 10x (0.82/sqft vs peers 0.11)</a:t>
                       </a:r>
                     </a:p>
                   </a:txBody>
@@ -7676,7 +8653,7 @@
                         <a:defRPr sz="1000" b="0"/>
                       </a:pPr>
                       <a:r>
-                        <a:t>MD -&gt; South (Census); opex = 4-yr value</a:t>
+                        <a:t>MD -&gt; South (Census); opex = 4-year value</a:t>
                       </a:r>
                     </a:p>
                   </a:txBody>
@@ -7691,14 +8668,14 @@
                         <a:defRPr sz="1000" b="0"/>
                       </a:pPr>
                       <a:r>
-                        <a:t>Latest row wins (10x opex error)</a:t>
+                        <a:t>Latest row wins</a:t>
                       </a:r>
                     </a:p>
                   </a:txBody>
                   <a:tcPr/>
                 </a:tc>
               </a:tr>
-              <a:tr h="457200">
+              <a:tr h="475488">
                 <a:tc>
                   <a:txBody>
                     <a:bodyPr/>
@@ -7723,7 +8700,7 @@
                         <a:defRPr sz="1000" b="0"/>
                       </a:pPr>
                       <a:r>
-                        <a:t>Product 19 'Cosmetics' vs catalog 'Vanities' every year</a:t>
+                        <a:t>Product 19 'Cosmetics' vs catalog 'Vanities' in every year</a:t>
                       </a:r>
                     </a:p>
                   </a:txBody>
@@ -7738,7 +8715,7 @@
                         <a:defRPr sz="1000" b="0"/>
                       </a:pPr>
                       <a:r>
-                        <a:t>Keep transaction name, catalog alias retained</a:t>
+                        <a:t>Keep transaction name, keep alias</a:t>
                       </a:r>
                     </a:p>
                   </a:txBody>
@@ -7753,14 +8730,14 @@
                         <a:defRPr sz="1000" b="0"/>
                       </a:pPr>
                       <a:r>
-                        <a:t>Split into 2 products</a:t>
+                        <a:t>Split into two products</a:t>
                       </a:r>
                     </a:p>
                   </a:txBody>
                   <a:tcPr/>
                 </a:tc>
               </a:tr>
-              <a:tr h="457200">
+              <a:tr h="475488">
                 <a:tc>
                   <a:txBody>
                     <a:bodyPr/>
@@ -7785,7 +8762,7 @@
                         <a:defRPr sz="1000" b="0"/>
                       </a:pPr>
                       <a:r>
-                        <a:t>4,907 lines, Manual source only</a:t>
+                        <a:t>4,907 lines, Manual source only; each matches an earlier sale</a:t>
                       </a:r>
                     </a:p>
                   </a:txBody>
@@ -7800,7 +8777,7 @@
                         <a:defRPr sz="1000" b="0"/>
                       </a:pPr>
                       <a:r>
-                        <a:t>Keep as returns (net sales net of returns)</a:t>
+                        <a:t>Keep as returns (net sales are net of returns)</a:t>
                       </a:r>
                     </a:p>
                   </a:txBody>
@@ -7874,7 +8851,7 @@
               </a:defRPr>
             </a:pPr>
             <a:r>
-              <a:t>Definitions and sensitivity to choices</a:t>
+              <a:t>Definitions, assumptions and sensitivity</a:t>
             </a:r>
           </a:p>
         </p:txBody>
@@ -7888,7 +8865,7 @@
         <p:spPr>
           <a:xfrm>
             <a:off x="457200" y="1371600"/>
-            <a:ext cx="11247120" cy="1188720"/>
+            <a:ext cx="11247120" cy="914400"/>
           </a:xfrm>
           <a:prstGeom prst="rect">
             <a:avLst/>
@@ -7903,23 +8880,23 @@
           <a:p>
             <a:pPr>
               <a:spcAft>
-                <a:spcPts val="600"/>
+                <a:spcPts val="500"/>
               </a:spcAft>
-              <a:defRPr sz="1500"/>
+              <a:defRPr sz="1400"/>
             </a:pPr>
             <a:r>
-              <a:t>• Net Sales = quantity x unit_price (returns negative). Gross Margin = Net Sales - quantity x landed cost per unit.</a:t>
+              <a:t>• Net Sales = qty x unit_price (returns negative). Gross Margin = Net Sales - qty x landed cost per unit.</a:t>
             </a:r>
           </a:p>
           <a:p>
             <a:pPr>
               <a:spcAft>
-                <a:spcPts val="600"/>
+                <a:spcPts val="500"/>
               </a:spcAft>
-              <a:defRPr sz="1500"/>
+              <a:defRPr sz="1400"/>
             </a:pPr>
             <a:r>
-              <a:t>• Profitability = Store contribution = Gross Margin - direct store opex (annual, per active store). No central costs in data.</a:t>
+              <a:t>• Profitability = store contribution = Gross Margin - direct store opex. No central costs in the data.</a:t>
             </a:r>
           </a:p>
         </p:txBody>
@@ -7933,8 +8910,8 @@
           <p:nvPr/>
         </p:nvGraphicFramePr>
         <p:xfrm>
-          <a:off x="457200" y="2651760"/>
-          <a:ext cx="6858000" cy="1463040"/>
+          <a:off x="457200" y="2286000"/>
+          <a:ext cx="11247120" cy="1828800"/>
         </p:xfrm>
         <a:graphic>
           <a:graphicData uri="http://schemas.openxmlformats.org/drawingml/2006/table">
@@ -7943,10 +8920,10 @@
                 <a:tableStyleId>{5C22544A-7EE6-4342-B048-85BDC9FD1C3A}</a:tableStyleId>
               </a:tblPr>
               <a:tblGrid>
-                <a:gridCol w="1714500"/>
-                <a:gridCol w="1714500"/>
-                <a:gridCol w="1714500"/>
-                <a:gridCol w="1714500"/>
+                <a:gridCol w="2377440"/>
+                <a:gridCol w="2743200"/>
+                <a:gridCol w="3108960"/>
+                <a:gridCol w="3017520"/>
               </a:tblGrid>
               <a:tr h="365760">
                 <a:tc>
@@ -7955,55 +8932,55 @@
                     <a:lstStyle/>
                     <a:p>
                       <a:pPr>
-                        <a:defRPr sz="1300" b="1"/>
-                      </a:pPr>
-                      <a:r>
-                        <a:t>2022</a:t>
-                      </a:r>
-                    </a:p>
-                  </a:txBody>
-                  <a:tcPr/>
-                </a:tc>
-                <a:tc>
-                  <a:txBody>
-                    <a:bodyPr/>
-                    <a:lstStyle/>
-                    <a:p>
-                      <a:pPr>
-                        <a:defRPr sz="1300" b="1"/>
-                      </a:pPr>
-                      <a:r>
-                        <a:t>Landed cost (chosen)</a:t>
-                      </a:r>
-                    </a:p>
-                  </a:txBody>
-                  <a:tcPr/>
-                </a:tc>
-                <a:tc>
-                  <a:txBody>
-                    <a:bodyPr/>
-                    <a:lstStyle/>
-                    <a:p>
-                      <a:pPr>
-                        <a:defRPr sz="1300" b="1"/>
-                      </a:pPr>
-                      <a:r>
-                        <a:t>Standard cost</a:t>
-                      </a:r>
-                    </a:p>
-                  </a:txBody>
-                  <a:tcPr/>
-                </a:tc>
-                <a:tc>
-                  <a:txBody>
-                    <a:bodyPr/>
-                    <a:lstStyle/>
-                    <a:p>
-                      <a:pPr>
-                        <a:defRPr sz="1300" b="1"/>
-                      </a:pPr>
-                      <a:r>
-                        <a:t>Difference</a:t>
+                        <a:defRPr sz="1200" b="1"/>
+                      </a:pPr>
+                      <a:r>
+                        <a:t>2022 sensitivity</a:t>
+                      </a:r>
+                    </a:p>
+                  </a:txBody>
+                  <a:tcPr/>
+                </a:tc>
+                <a:tc>
+                  <a:txBody>
+                    <a:bodyPr/>
+                    <a:lstStyle/>
+                    <a:p>
+                      <a:pPr>
+                        <a:defRPr sz="1200" b="1"/>
+                      </a:pPr>
+                      <a:r>
+                        <a:t>Chosen</a:t>
+                      </a:r>
+                    </a:p>
+                  </a:txBody>
+                  <a:tcPr/>
+                </a:tc>
+                <a:tc>
+                  <a:txBody>
+                    <a:bodyPr/>
+                    <a:lstStyle/>
+                    <a:p>
+                      <a:pPr>
+                        <a:defRPr sz="1200" b="1"/>
+                      </a:pPr>
+                      <a:r>
+                        <a:t>Alternative</a:t>
+                      </a:r>
+                    </a:p>
+                  </a:txBody>
+                  <a:tcPr/>
+                </a:tc>
+                <a:tc>
+                  <a:txBody>
+                    <a:bodyPr/>
+                    <a:lstStyle/>
+                    <a:p>
+                      <a:pPr>
+                        <a:defRPr sz="1200" b="1"/>
+                      </a:pPr>
+                      <a:r>
+                        <a:t>Effect</a:t>
                       </a:r>
                     </a:p>
                   </a:txBody>
@@ -8017,55 +8994,55 @@
                     <a:lstStyle/>
                     <a:p>
                       <a:pPr>
-                        <a:defRPr sz="1300" b="0"/>
-                      </a:pPr>
-                      <a:r>
-                        <a:t>Gross Margin</a:t>
-                      </a:r>
-                    </a:p>
-                  </a:txBody>
-                  <a:tcPr/>
-                </a:tc>
-                <a:tc>
-                  <a:txBody>
-                    <a:bodyPr/>
-                    <a:lstStyle/>
-                    <a:p>
-                      <a:pPr>
-                        <a:defRPr sz="1300" b="0"/>
-                      </a:pPr>
-                      <a:r>
-                        <a:t>$4.78M</a:t>
-                      </a:r>
-                    </a:p>
-                  </a:txBody>
-                  <a:tcPr/>
-                </a:tc>
-                <a:tc>
-                  <a:txBody>
-                    <a:bodyPr/>
-                    <a:lstStyle/>
-                    <a:p>
-                      <a:pPr>
-                        <a:defRPr sz="1300" b="0"/>
-                      </a:pPr>
-                      <a:r>
-                        <a:t>$5.12M</a:t>
-                      </a:r>
-                    </a:p>
-                  </a:txBody>
-                  <a:tcPr/>
-                </a:tc>
-                <a:tc>
-                  <a:txBody>
-                    <a:bodyPr/>
-                    <a:lstStyle/>
-                    <a:p>
-                      <a:pPr>
-                        <a:defRPr sz="1300" b="0"/>
-                      </a:pPr>
-                      <a:r>
-                        <a:t>$346k</a:t>
+                        <a:defRPr sz="1200" b="0"/>
+                      </a:pPr>
+                      <a:r>
+                        <a:t>Cost basis</a:t>
+                      </a:r>
+                    </a:p>
+                  </a:txBody>
+                  <a:tcPr/>
+                </a:tc>
+                <a:tc>
+                  <a:txBody>
+                    <a:bodyPr/>
+                    <a:lstStyle/>
+                    <a:p>
+                      <a:pPr>
+                        <a:defRPr sz="1200" b="0"/>
+                      </a:pPr>
+                      <a:r>
+                        <a:t>Landed: GM $4.78M, 37.4%</a:t>
+                      </a:r>
+                    </a:p>
+                  </a:txBody>
+                  <a:tcPr/>
+                </a:tc>
+                <a:tc>
+                  <a:txBody>
+                    <a:bodyPr/>
+                    <a:lstStyle/>
+                    <a:p>
+                      <a:pPr>
+                        <a:defRPr sz="1200" b="0"/>
+                      </a:pPr>
+                      <a:r>
+                        <a:t>Standard: GM $5.12M</a:t>
+                      </a:r>
+                    </a:p>
+                  </a:txBody>
+                  <a:tcPr/>
+                </a:tc>
+                <a:tc>
+                  <a:txBody>
+                    <a:bodyPr/>
+                    <a:lstStyle/>
+                    <a:p>
+                      <a:pPr>
+                        <a:defRPr sz="1200" b="0"/>
+                      </a:pPr>
+                      <a:r>
+                        <a:t>$346k higher GM, hides Furniture</a:t>
                       </a:r>
                     </a:p>
                   </a:txBody>
@@ -8079,53 +9056,56 @@
                     <a:lstStyle/>
                     <a:p>
                       <a:pPr>
-                        <a:defRPr sz="1300" b="0"/>
-                      </a:pPr>
-                      <a:r>
-                        <a:t>GM %</a:t>
-                      </a:r>
-                    </a:p>
-                  </a:txBody>
-                  <a:tcPr/>
-                </a:tc>
-                <a:tc>
-                  <a:txBody>
-                    <a:bodyPr/>
-                    <a:lstStyle/>
-                    <a:p>
-                      <a:pPr>
-                        <a:defRPr sz="1300" b="0"/>
-                      </a:pPr>
-                      <a:r>
-                        <a:t>37.4%</a:t>
-                      </a:r>
-                    </a:p>
-                  </a:txBody>
-                  <a:tcPr/>
-                </a:tc>
-                <a:tc>
-                  <a:txBody>
-                    <a:bodyPr/>
-                    <a:lstStyle/>
-                    <a:p>
-                      <a:pPr>
-                        <a:defRPr sz="1300" b="0"/>
-                      </a:pPr>
-                      <a:r>
-                        <a:t>40.1%</a:t>
-                      </a:r>
-                    </a:p>
-                  </a:txBody>
-                  <a:tcPr/>
-                </a:tc>
-                <a:tc>
-                  <a:txBody>
-                    <a:bodyPr/>
-                    <a:lstStyle/>
-                    <a:p>
-                      <a:pPr>
-                        <a:defRPr sz="1300" b="0"/>
-                      </a:pPr>
+                        <a:defRPr sz="1200" b="0"/>
+                      </a:pPr>
+                      <a:r>
+                        <a:t>Opex: annual, full year</a:t>
+                      </a:r>
+                    </a:p>
+                  </a:txBody>
+                  <a:tcPr/>
+                </a:tc>
+                <a:tc>
+                  <a:txBody>
+                    <a:bodyPr/>
+                    <a:lstStyle/>
+                    <a:p>
+                      <a:pPr>
+                        <a:defRPr sz="1200" b="0"/>
+                      </a:pPr>
+                      <a:r>
+                        <a:t>Contribution $1.43M</a:t>
+                      </a:r>
+                    </a:p>
+                  </a:txBody>
+                  <a:tcPr/>
+                </a:tc>
+                <a:tc>
+                  <a:txBody>
+                    <a:bodyPr/>
+                    <a:lstStyle/>
+                    <a:p>
+                      <a:pPr>
+                        <a:defRPr sz="1200" b="0"/>
+                      </a:pPr>
+                      <a:r>
+                        <a:t>Pro-rated to months traded: $1.45M</a:t>
+                      </a:r>
+                    </a:p>
+                  </a:txBody>
+                  <a:tcPr/>
+                </a:tc>
+                <a:tc>
+                  <a:txBody>
+                    <a:bodyPr/>
+                    <a:lstStyle/>
+                    <a:p>
+                      <a:pPr>
+                        <a:defRPr sz="1200" b="0"/>
+                      </a:pPr>
+                      <a:r>
+                        <a:t>Small; loss-making stores 182 either way</a:t>
+                      </a:r>
                     </a:p>
                   </a:txBody>
                   <a:tcPr/>
@@ -8138,53 +9118,118 @@
                     <a:lstStyle/>
                     <a:p>
                       <a:pPr>
-                        <a:defRPr sz="1300" b="0"/>
-                      </a:pPr>
-                      <a:r>
-                        <a:t>GM YoY</a:t>
-                      </a:r>
-                    </a:p>
-                  </a:txBody>
-                  <a:tcPr/>
-                </a:tc>
-                <a:tc>
-                  <a:txBody>
-                    <a:bodyPr/>
-                    <a:lstStyle/>
-                    <a:p>
-                      <a:pPr>
-                        <a:defRPr sz="1300" b="0"/>
-                      </a:pPr>
-                      <a:r>
-                        <a:t>+0.6%</a:t>
-                      </a:r>
-                    </a:p>
-                  </a:txBody>
-                  <a:tcPr/>
-                </a:tc>
-                <a:tc>
-                  <a:txBody>
-                    <a:bodyPr/>
-                    <a:lstStyle/>
-                    <a:p>
-                      <a:pPr>
-                        <a:defRPr sz="1300" b="0"/>
-                      </a:pPr>
-                      <a:r>
-                        <a:t>+8.1%</a:t>
-                      </a:r>
-                    </a:p>
-                  </a:txBody>
-                  <a:tcPr/>
-                </a:tc>
-                <a:tc>
-                  <a:txBody>
-                    <a:bodyPr/>
-                    <a:lstStyle/>
-                    <a:p>
-                      <a:pPr>
-                        <a:defRPr sz="1300" b="0"/>
-                      </a:pPr>
+                        <a:defRPr sz="1200" b="0"/>
+                      </a:pPr>
+                      <a:r>
+                        <a:t>Opex: annual vs monthly</a:t>
+                      </a:r>
+                    </a:p>
+                  </a:txBody>
+                  <a:tcPr/>
+                </a:tc>
+                <a:tc>
+                  <a:txBody>
+                    <a:bodyPr/>
+                    <a:lstStyle/>
+                    <a:p>
+                      <a:pPr>
+                        <a:defRPr sz="1200" b="0"/>
+                      </a:pPr>
+                      <a:r>
+                        <a:t>Annual</a:t>
+                      </a:r>
+                    </a:p>
+                  </a:txBody>
+                  <a:tcPr/>
+                </a:tc>
+                <a:tc>
+                  <a:txBody>
+                    <a:bodyPr/>
+                    <a:lstStyle/>
+                    <a:p>
+                      <a:pPr>
+                        <a:defRPr sz="1200" b="0"/>
+                      </a:pPr>
+                      <a:r>
+                        <a:t>Monthly x12: -$35.37M</a:t>
+                      </a:r>
+                    </a:p>
+                  </a:txBody>
+                  <a:tcPr/>
+                </a:tc>
+                <a:tc>
+                  <a:txBody>
+                    <a:bodyPr/>
+                    <a:lstStyle/>
+                    <a:p>
+                      <a:pPr>
+                        <a:defRPr sz="1200" b="0"/>
+                      </a:pPr>
+                      <a:r>
+                        <a:t>Every price list loses money -&gt; not credible</a:t>
+                      </a:r>
+                    </a:p>
+                  </a:txBody>
+                  <a:tcPr/>
+                </a:tc>
+              </a:tr>
+              <a:tr h="365760">
+                <a:tc>
+                  <a:txBody>
+                    <a:bodyPr/>
+                    <a:lstStyle/>
+                    <a:p>
+                      <a:pPr>
+                        <a:defRPr sz="1200" b="0"/>
+                      </a:pPr>
+                      <a:r>
+                        <a:t>Dedup rule</a:t>
+                      </a:r>
+                    </a:p>
+                  </a:txBody>
+                  <a:tcPr/>
+                </a:tc>
+                <a:tc>
+                  <a:txBody>
+                    <a:bodyPr/>
+                    <a:lstStyle/>
+                    <a:p>
+                      <a:pPr>
+                        <a:defRPr sz="1200" b="0"/>
+                      </a:pPr>
+                      <a:r>
+                        <a:t>Latest ingestion</a:t>
+                      </a:r>
+                    </a:p>
+                  </a:txBody>
+                  <a:tcPr/>
+                </a:tc>
+                <a:tc>
+                  <a:txBody>
+                    <a:bodyPr/>
+                    <a:lstStyle/>
+                    <a:p>
+                      <a:pPr>
+                        <a:defRPr sz="1200" b="0"/>
+                      </a:pPr>
+                      <a:r>
+                        <a:t>POS first / first ingestion</a:t>
+                      </a:r>
+                    </a:p>
+                  </a:txBody>
+                  <a:tcPr/>
+                </a:tc>
+                <a:tc>
+                  <a:txBody>
+                    <a:bodyPr/>
+                    <a:lstStyle/>
+                    <a:p>
+                      <a:pPr>
+                        <a:defRPr sz="1200" b="0"/>
+                      </a:pPr>
+                      <a:r>
+                        <a:t>No change to sales or landed GM (tested)</a:t>
+                      </a:r>
                     </a:p>
                   </a:txBody>
                   <a:tcPr/>
@@ -8202,8 +9247,8 @@
         </p:nvSpPr>
         <p:spPr>
           <a:xfrm>
-            <a:off x="457200" y="4480560"/>
-            <a:ext cx="11247120" cy="1828800"/>
+            <a:off x="457200" y="4297680"/>
+            <a:ext cx="11247120" cy="2286000"/>
           </a:xfrm>
           <a:prstGeom prst="rect">
             <a:avLst/>
@@ -8218,34 +9263,34 @@
           <a:p>
             <a:pPr>
               <a:spcAft>
-                <a:spcPts val="600"/>
+                <a:spcPts val="500"/>
               </a:spcAft>
-              <a:defRPr sz="1400"/>
+              <a:defRPr sz="1300"/>
             </a:pPr>
             <a:r>
-              <a:t>• Opex annual vs monthly: monthly x12 = $40M opex vs $12.8M sales -&gt; every store loses money; not credible -&gt; annual.</a:t>
+              <a:t>• Assumptions: month is the economic date; landed cost is the true cost (confirm 2022 Furniture with AP/Ops); store losses are real, not a sampling effect (confirmed with the interviewer)</a:t>
             </a:r>
           </a:p>
           <a:p>
             <a:pPr>
               <a:spcAft>
-                <a:spcPts val="600"/>
+                <a:spcPts val="500"/>
               </a:spcAft>
-              <a:defRPr sz="1400"/>
+              <a:defRPr sz="1300"/>
             </a:pPr>
             <a:r>
-              <a:t>• Opex is a full-year charge even for stores opened mid-year -&gt; first-year losses slightly overstated.</a:t>
+              <a:t>• Trade-offs: most frequent value for conflicting attributes instead of history tables; views for staging/intermediate</a:t>
             </a:r>
           </a:p>
           <a:p>
             <a:pPr>
               <a:spcAft>
-                <a:spcPts val="600"/>
+                <a:spcPts val="500"/>
               </a:spcAft>
-              <a:defRPr sz="1400"/>
+              <a:defRPr sz="1300"/>
             </a:pPr>
             <a:r>
-              <a:t>• Dedup rule choice does not change sales or landed-cost GM (both identical within every duplicate pair).</a:t>
+              <a:t>• With more time: split volume into new vs existing stores; promotion depth; incremental fct_sales; column docs; Dec-2022 may be ~1% incomplete (late-arriving rows)</a:t>
             </a:r>
           </a:p>
         </p:txBody>
@@ -8298,7 +9343,7 @@
               </a:defRPr>
             </a:pPr>
             <a:r>
-              <a:t>Q1: Sales are growing ~11% a year — profit is not</a:t>
+              <a:t>Q1: sales are growing ~11% a year — profit is not</a:t>
             </a:r>
           </a:p>
           <a:p>
@@ -8310,7 +9355,7 @@
               </a:defRPr>
             </a:pPr>
             <a:r>
-              <a:t>2022: Net Sales +10.7%, Gross Margin +0.6%, Store contribution -8.2%</a:t>
+              <a:t>2022: Net Sales +10.7%, Gross Margin +0.6%, store contribution -8.2%</a:t>
             </a:r>
           </a:p>
         </p:txBody>
@@ -8343,7 +9388,7 @@
         </p:nvGraphicFramePr>
         <p:xfrm>
           <a:off x="6675120" y="1371600"/>
-          <a:ext cx="5212080" cy="3922776"/>
+          <a:ext cx="5212080" cy="3621024"/>
         </p:xfrm>
         <a:graphic>
           <a:graphicData uri="http://schemas.openxmlformats.org/drawingml/2006/table">
@@ -8357,7 +9402,7 @@
                 <a:gridCol w="1303020"/>
                 <a:gridCol w="1303020"/>
               </a:tblGrid>
-              <a:tr h="301752">
+              <a:tr h="329184">
                 <a:tc>
                   <a:txBody>
                     <a:bodyPr/>
@@ -8416,7 +9461,7 @@
                   <a:tcPr/>
                 </a:tc>
               </a:tr>
-              <a:tr h="301752">
+              <a:tr h="329184">
                 <a:tc>
                   <a:txBody>
                     <a:bodyPr/>
@@ -8478,7 +9523,7 @@
                   <a:tcPr/>
                 </a:tc>
               </a:tr>
-              <a:tr h="301752">
+              <a:tr h="329184">
                 <a:tc>
                   <a:txBody>
                     <a:bodyPr/>
@@ -8503,7 +9548,7 @@
                         <a:defRPr sz="1100" b="0"/>
                       </a:pPr>
                       <a:r>
-                        <a:t>$-99k</a:t>
+                        <a:t>-$99k</a:t>
                       </a:r>
                     </a:p>
                   </a:txBody>
@@ -8540,7 +9585,7 @@
                   <a:tcPr/>
                 </a:tc>
               </a:tr>
-              <a:tr h="301752">
+              <a:tr h="329184">
                 <a:tc>
                   <a:txBody>
                     <a:bodyPr/>
@@ -8602,7 +9647,7 @@
                   <a:tcPr/>
                 </a:tc>
               </a:tr>
-              <a:tr h="301752">
+              <a:tr h="329184">
                 <a:tc>
                   <a:txBody>
                     <a:bodyPr/>
@@ -8664,7 +9709,7 @@
                   <a:tcPr/>
                 </a:tc>
               </a:tr>
-              <a:tr h="301752">
+              <a:tr h="329184">
                 <a:tc>
                   <a:txBody>
                     <a:bodyPr/>
@@ -8689,7 +9734,7 @@
                         <a:defRPr sz="1100" b="0"/>
                       </a:pPr>
                       <a:r>
-                        <a:t>$-19k</a:t>
+                        <a:t>-$19k</a:t>
                       </a:r>
                     </a:p>
                   </a:txBody>
@@ -8726,7 +9771,7 @@
                   <a:tcPr/>
                 </a:tc>
               </a:tr>
-              <a:tr h="301752">
+              <a:tr h="329184">
                 <a:tc>
                   <a:txBody>
                     <a:bodyPr/>
@@ -8788,17 +9833,17 @@
                   <a:tcPr/>
                 </a:tc>
               </a:tr>
-              <a:tr h="301752">
-                <a:tc>
-                  <a:txBody>
-                    <a:bodyPr/>
-                    <a:lstStyle/>
-                    <a:p>
-                      <a:pPr>
-                        <a:defRPr sz="1100" b="0"/>
-                      </a:pPr>
-                      <a:r>
-                        <a:t>GM %</a:t>
+              <a:tr h="329184">
+                <a:tc>
+                  <a:txBody>
+                    <a:bodyPr/>
+                    <a:lstStyle/>
+                    <a:p>
+                      <a:pPr>
+                        <a:defRPr sz="1100" b="0"/>
+                      </a:pPr>
+                      <a:r>
+                        <a:t>  GM %</a:t>
                       </a:r>
                     </a:p>
                   </a:txBody>
@@ -8850,7 +9895,7 @@
                   <a:tcPr/>
                 </a:tc>
               </a:tr>
-              <a:tr h="301752">
+              <a:tr h="329184">
                 <a:tc>
                   <a:txBody>
                     <a:bodyPr/>
@@ -8912,7 +9957,7 @@
                   <a:tcPr/>
                 </a:tc>
               </a:tr>
-              <a:tr h="301752">
+              <a:tr h="329184">
                 <a:tc>
                   <a:txBody>
                     <a:bodyPr/>
@@ -8937,7 +9982,7 @@
                         <a:defRPr sz="1100" b="0"/>
                       </a:pPr>
                       <a:r>
-                        <a:t>$-160k</a:t>
+                        <a:t>-$160k</a:t>
                       </a:r>
                     </a:p>
                   </a:txBody>
@@ -8967,14 +10012,14 @@
                         <a:defRPr sz="1100" b="0"/>
                       </a:pPr>
                       <a:r>
-                        <a:t>$-128k</a:t>
+                        <a:t>-$128k</a:t>
                       </a:r>
                     </a:p>
                   </a:txBody>
                   <a:tcPr/>
                 </a:tc>
               </a:tr>
-              <a:tr h="301752">
+              <a:tr h="329184">
                 <a:tc>
                   <a:txBody>
                     <a:bodyPr/>
@@ -9030,130 +10075,6 @@
                       </a:pPr>
                       <a:r>
                         <a:t>-8.2%</a:t>
-                      </a:r>
-                    </a:p>
-                  </a:txBody>
-                  <a:tcPr/>
-                </a:tc>
-              </a:tr>
-              <a:tr h="301752">
-                <a:tc>
-                  <a:txBody>
-                    <a:bodyPr/>
-                    <a:lstStyle/>
-                    <a:p>
-                      <a:pPr>
-                        <a:defRPr sz="1100" b="0"/>
-                      </a:pPr>
-                      <a:r>
-                        <a:t>Avg selling price</a:t>
-                      </a:r>
-                    </a:p>
-                  </a:txBody>
-                  <a:tcPr/>
-                </a:tc>
-                <a:tc>
-                  <a:txBody>
-                    <a:bodyPr/>
-                    <a:lstStyle/>
-                    <a:p>
-                      <a:pPr>
-                        <a:defRPr sz="1100" b="0"/>
-                      </a:pPr>
-                      <a:r>
-                        <a:t>$31.39</a:t>
-                      </a:r>
-                    </a:p>
-                  </a:txBody>
-                  <a:tcPr/>
-                </a:tc>
-                <a:tc>
-                  <a:txBody>
-                    <a:bodyPr/>
-                    <a:lstStyle/>
-                    <a:p>
-                      <a:pPr>
-                        <a:defRPr sz="1100" b="0"/>
-                      </a:pPr>
-                      <a:r>
-                        <a:t>$32.18</a:t>
-                      </a:r>
-                    </a:p>
-                  </a:txBody>
-                  <a:tcPr/>
-                </a:tc>
-                <a:tc>
-                  <a:txBody>
-                    <a:bodyPr/>
-                    <a:lstStyle/>
-                    <a:p>
-                      <a:pPr>
-                        <a:defRPr sz="1100" b="0"/>
-                      </a:pPr>
-                      <a:r>
-                        <a:t>$32.49</a:t>
-                      </a:r>
-                    </a:p>
-                  </a:txBody>
-                  <a:tcPr/>
-                </a:tc>
-              </a:tr>
-              <a:tr h="301752">
-                <a:tc>
-                  <a:txBody>
-                    <a:bodyPr/>
-                    <a:lstStyle/>
-                    <a:p>
-                      <a:pPr>
-                        <a:defRPr sz="1100" b="0"/>
-                      </a:pPr>
-                      <a:r>
-                        <a:t>  YoY %</a:t>
-                      </a:r>
-                    </a:p>
-                  </a:txBody>
-                  <a:tcPr/>
-                </a:tc>
-                <a:tc>
-                  <a:txBody>
-                    <a:bodyPr/>
-                    <a:lstStyle/>
-                    <a:p>
-                      <a:pPr>
-                        <a:defRPr sz="1100" b="0"/>
-                      </a:pPr>
-                      <a:r>
-                        <a:t>+5.0%</a:t>
-                      </a:r>
-                    </a:p>
-                  </a:txBody>
-                  <a:tcPr/>
-                </a:tc>
-                <a:tc>
-                  <a:txBody>
-                    <a:bodyPr/>
-                    <a:lstStyle/>
-                    <a:p>
-                      <a:pPr>
-                        <a:defRPr sz="1100" b="0"/>
-                      </a:pPr>
-                      <a:r>
-                        <a:t>+2.5%</a:t>
-                      </a:r>
-                    </a:p>
-                  </a:txBody>
-                  <a:tcPr/>
-                </a:tc>
-                <a:tc>
-                  <a:txBody>
-                    <a:bodyPr/>
-                    <a:lstStyle/>
-                    <a:p>
-                      <a:pPr>
-                        <a:defRPr sz="1100" b="0"/>
-                      </a:pPr>
-                      <a:r>
-                        <a:t>+1.0%</a:t>
                       </a:r>
                     </a:p>
                   </a:txBody>
@@ -9164,6 +10085,40 @@
           </a:graphicData>
         </a:graphic>
       </p:graphicFrame>
+      <p:sp>
+        <p:nvSpPr>
+          <p:cNvPr id="5" name="TextBox 4"/>
+          <p:cNvSpPr txBox="1"/>
+          <p:nvPr/>
+        </p:nvSpPr>
+        <p:spPr>
+          <a:xfrm>
+            <a:off x="6675120" y="5212080"/>
+            <a:ext cx="5212080" cy="914400"/>
+          </a:xfrm>
+          <a:prstGeom prst="rect">
+            <a:avLst/>
+          </a:prstGeom>
+          <a:noFill/>
+        </p:spPr>
+        <p:txBody>
+          <a:bodyPr wrap="square">
+            <a:spAutoFit/>
+          </a:bodyPr>
+          <a:lstStyle/>
+          <a:p>
+            <a:pPr>
+              <a:spcAft>
+                <a:spcPts val="500"/>
+              </a:spcAft>
+              <a:defRPr sz="1200"/>
+            </a:pPr>
+            <a:r>
+              <a:t>• 2020 dip then two years of ~11% growth; GM % fell from 41.1% to 37.4% in 2022</a:t>
+            </a:r>
+          </a:p>
+        </p:txBody>
+      </p:sp>
     </p:spTree>
   </p:cSld>
   <p:clrMapOvr>
@@ -9212,7 +10167,7 @@
               </a:defRPr>
             </a:pPr>
             <a:r>
-              <a:t>Gem #1: Furniture margin collapsed in Jan-2022 — prices were never adjusted</a:t>
+              <a:t>Q3: 2022 growth came from volume and California — prices fell like-for-like</a:t>
             </a:r>
           </a:p>
           <a:p>
@@ -9224,7 +10179,7 @@
               </a:defRPr>
             </a:pPr>
             <a:r>
-              <a:t>Landed cost per unit +36% overnight; price -0.3%. Standard-cost reporting does not show it.</a:t>
+              <a:t>Net Sales +10.7% ($1,232k) = volume $1,156k + location mix $139k + like-for-like price -$76k + unknown product $13k</a:t>
             </a:r>
           </a:p>
         </p:txBody>
@@ -9239,7 +10194,7 @@
         </p:nvGraphicFramePr>
         <p:xfrm>
           <a:off x="365760" y="1371600"/>
-          <a:ext cx="6949440" cy="4846320"/>
+          <a:ext cx="6217920" cy="4937760"/>
         </p:xfrm>
         <a:graphic>
           <a:graphicData uri="http://schemas.openxmlformats.org/drawingml/2006/chart">
@@ -9247,414 +10202,16 @@
           </a:graphicData>
         </a:graphic>
       </p:graphicFrame>
-      <p:graphicFrame>
-        <p:nvGraphicFramePr>
-          <p:cNvPr id="4" name="Table 3"/>
-          <p:cNvGraphicFramePr>
-            <a:graphicFrameLocks noGrp="1"/>
-          </p:cNvGraphicFramePr>
-          <p:nvPr/>
-        </p:nvGraphicFramePr>
-        <p:xfrm>
-          <a:off x="7498079" y="1371600"/>
-          <a:ext cx="4480560" cy="1463040"/>
-        </p:xfrm>
-        <a:graphic>
-          <a:graphicData uri="http://schemas.openxmlformats.org/drawingml/2006/table">
-            <a:tbl>
-              <a:tblPr firstRow="1" bandRow="1">
-                <a:tableStyleId>{5C22544A-7EE6-4342-B048-85BDC9FD1C3A}</a:tableStyleId>
-              </a:tblPr>
-              <a:tblGrid>
-                <a:gridCol w="1371600"/>
-                <a:gridCol w="548640"/>
-                <a:gridCol w="640080"/>
-                <a:gridCol w="685800"/>
-                <a:gridCol w="640080"/>
-                <a:gridCol w="594360"/>
-              </a:tblGrid>
-              <a:tr h="365760">
-                <a:tc>
-                  <a:txBody>
-                    <a:bodyPr/>
-                    <a:lstStyle/>
-                    <a:p>
-                      <a:pPr>
-                        <a:defRPr sz="1000" b="1"/>
-                      </a:pPr>
-                      <a:r>
-                        <a:t>2022</a:t>
-                      </a:r>
-                    </a:p>
-                  </a:txBody>
-                  <a:tcPr/>
-                </a:tc>
-                <a:tc>
-                  <a:txBody>
-                    <a:bodyPr/>
-                    <a:lstStyle/>
-                    <a:p>
-                      <a:pPr>
-                        <a:defRPr sz="1000" b="1"/>
-                      </a:pPr>
-                      <a:r>
-                        <a:t>GM%</a:t>
-                      </a:r>
-                    </a:p>
-                  </a:txBody>
-                  <a:tcPr/>
-                </a:tc>
-                <a:tc>
-                  <a:txBody>
-                    <a:bodyPr/>
-                    <a:lstStyle/>
-                    <a:p>
-                      <a:pPr>
-                        <a:defRPr sz="1000" b="1"/>
-                      </a:pPr>
-                      <a:r>
-                        <a:t>GM</a:t>
-                      </a:r>
-                    </a:p>
-                  </a:txBody>
-                  <a:tcPr/>
-                </a:tc>
-                <a:tc>
-                  <a:txBody>
-                    <a:bodyPr/>
-                    <a:lstStyle/>
-                    <a:p>
-                      <a:pPr>
-                        <a:defRPr sz="1000" b="1"/>
-                      </a:pPr>
-                      <a:r>
-                        <a:t>GM 2021</a:t>
-                      </a:r>
-                    </a:p>
-                  </a:txBody>
-                  <a:tcPr/>
-                </a:tc>
-                <a:tc>
-                  <a:txBody>
-                    <a:bodyPr/>
-                    <a:lstStyle/>
-                    <a:p>
-                      <a:pPr>
-                        <a:defRPr sz="1000" b="1"/>
-                      </a:pPr>
-                      <a:r>
-                        <a:t>Price YoY</a:t>
-                      </a:r>
-                    </a:p>
-                  </a:txBody>
-                  <a:tcPr/>
-                </a:tc>
-                <a:tc>
-                  <a:txBody>
-                    <a:bodyPr/>
-                    <a:lstStyle/>
-                    <a:p>
-                      <a:pPr>
-                        <a:defRPr sz="1000" b="1"/>
-                      </a:pPr>
-                      <a:r>
-                        <a:t>Cost YoY</a:t>
-                      </a:r>
-                    </a:p>
-                  </a:txBody>
-                  <a:tcPr/>
-                </a:tc>
-              </a:tr>
-              <a:tr h="365760">
-                <a:tc>
-                  <a:txBody>
-                    <a:bodyPr/>
-                    <a:lstStyle/>
-                    <a:p>
-                      <a:pPr>
-                        <a:defRPr sz="1000" b="0"/>
-                      </a:pPr>
-                      <a:r>
-                        <a:t>Dining Furniture</a:t>
-                      </a:r>
-                    </a:p>
-                  </a:txBody>
-                  <a:tcPr/>
-                </a:tc>
-                <a:tc>
-                  <a:txBody>
-                    <a:bodyPr/>
-                    <a:lstStyle/>
-                    <a:p>
-                      <a:pPr>
-                        <a:defRPr sz="1000" b="0"/>
-                      </a:pPr>
-                      <a:r>
-                        <a:t>9.5%</a:t>
-                      </a:r>
-                    </a:p>
-                  </a:txBody>
-                  <a:tcPr/>
-                </a:tc>
-                <a:tc>
-                  <a:txBody>
-                    <a:bodyPr/>
-                    <a:lstStyle/>
-                    <a:p>
-                      <a:pPr>
-                        <a:defRPr sz="1000" b="0"/>
-                      </a:pPr>
-                      <a:r>
-                        <a:t>$102k</a:t>
-                      </a:r>
-                    </a:p>
-                  </a:txBody>
-                  <a:tcPr/>
-                </a:tc>
-                <a:tc>
-                  <a:txBody>
-                    <a:bodyPr/>
-                    <a:lstStyle/>
-                    <a:p>
-                      <a:pPr>
-                        <a:defRPr sz="1000" b="0"/>
-                      </a:pPr>
-                      <a:r>
-                        <a:t>$313k</a:t>
-                      </a:r>
-                    </a:p>
-                  </a:txBody>
-                  <a:tcPr/>
-                </a:tc>
-                <a:tc>
-                  <a:txBody>
-                    <a:bodyPr/>
-                    <a:lstStyle/>
-                    <a:p>
-                      <a:pPr>
-                        <a:defRPr sz="1000" b="0"/>
-                      </a:pPr>
-                      <a:r>
-                        <a:t>+1.6%</a:t>
-                      </a:r>
-                    </a:p>
-                  </a:txBody>
-                  <a:tcPr/>
-                </a:tc>
-                <a:tc>
-                  <a:txBody>
-                    <a:bodyPr/>
-                    <a:lstStyle/>
-                    <a:p>
-                      <a:pPr>
-                        <a:defRPr sz="1000" b="0"/>
-                      </a:pPr>
-                      <a:r>
-                        <a:t>+36.4%</a:t>
-                      </a:r>
-                    </a:p>
-                  </a:txBody>
-                  <a:tcPr/>
-                </a:tc>
-              </a:tr>
-              <a:tr h="365760">
-                <a:tc>
-                  <a:txBody>
-                    <a:bodyPr/>
-                    <a:lstStyle/>
-                    <a:p>
-                      <a:pPr>
-                        <a:defRPr sz="1000" b="0"/>
-                      </a:pPr>
-                      <a:r>
-                        <a:t>Bathroom Furniture</a:t>
-                      </a:r>
-                    </a:p>
-                  </a:txBody>
-                  <a:tcPr/>
-                </a:tc>
-                <a:tc>
-                  <a:txBody>
-                    <a:bodyPr/>
-                    <a:lstStyle/>
-                    <a:p>
-                      <a:pPr>
-                        <a:defRPr sz="1000" b="0"/>
-                      </a:pPr>
-                      <a:r>
-                        <a:t>5.5%</a:t>
-                      </a:r>
-                    </a:p>
-                  </a:txBody>
-                  <a:tcPr/>
-                </a:tc>
-                <a:tc>
-                  <a:txBody>
-                    <a:bodyPr/>
-                    <a:lstStyle/>
-                    <a:p>
-                      <a:pPr>
-                        <a:defRPr sz="1000" b="0"/>
-                      </a:pPr>
-                      <a:r>
-                        <a:t>$36k</a:t>
-                      </a:r>
-                    </a:p>
-                  </a:txBody>
-                  <a:tcPr/>
-                </a:tc>
-                <a:tc>
-                  <a:txBody>
-                    <a:bodyPr/>
-                    <a:lstStyle/>
-                    <a:p>
-                      <a:pPr>
-                        <a:defRPr sz="1000" b="0"/>
-                      </a:pPr>
-                      <a:r>
-                        <a:t>$198k</a:t>
-                      </a:r>
-                    </a:p>
-                  </a:txBody>
-                  <a:tcPr/>
-                </a:tc>
-                <a:tc>
-                  <a:txBody>
-                    <a:bodyPr/>
-                    <a:lstStyle/>
-                    <a:p>
-                      <a:pPr>
-                        <a:defRPr sz="1000" b="0"/>
-                      </a:pPr>
-                      <a:r>
-                        <a:t>-2.0%</a:t>
-                      </a:r>
-                    </a:p>
-                  </a:txBody>
-                  <a:tcPr/>
-                </a:tc>
-                <a:tc>
-                  <a:txBody>
-                    <a:bodyPr/>
-                    <a:lstStyle/>
-                    <a:p>
-                      <a:pPr>
-                        <a:defRPr sz="1000" b="0"/>
-                      </a:pPr>
-                      <a:r>
-                        <a:t>+36.4%</a:t>
-                      </a:r>
-                    </a:p>
-                  </a:txBody>
-                  <a:tcPr/>
-                </a:tc>
-              </a:tr>
-              <a:tr h="365760">
-                <a:tc>
-                  <a:txBody>
-                    <a:bodyPr/>
-                    <a:lstStyle/>
-                    <a:p>
-                      <a:pPr>
-                        <a:defRPr sz="1000" b="0"/>
-                      </a:pPr>
-                      <a:r>
-                        <a:t>Wardrobes</a:t>
-                      </a:r>
-                    </a:p>
-                  </a:txBody>
-                  <a:tcPr/>
-                </a:tc>
-                <a:tc>
-                  <a:txBody>
-                    <a:bodyPr/>
-                    <a:lstStyle/>
-                    <a:p>
-                      <a:pPr>
-                        <a:defRPr sz="1000" b="0"/>
-                      </a:pPr>
-                      <a:r>
-                        <a:t>5.8%</a:t>
-                      </a:r>
-                    </a:p>
-                  </a:txBody>
-                  <a:tcPr/>
-                </a:tc>
-                <a:tc>
-                  <a:txBody>
-                    <a:bodyPr/>
-                    <a:lstStyle/>
-                    <a:p>
-                      <a:pPr>
-                        <a:defRPr sz="1000" b="0"/>
-                      </a:pPr>
-                      <a:r>
-                        <a:t>$29k</a:t>
-                      </a:r>
-                    </a:p>
-                  </a:txBody>
-                  <a:tcPr/>
-                </a:tc>
-                <a:tc>
-                  <a:txBody>
-                    <a:bodyPr/>
-                    <a:lstStyle/>
-                    <a:p>
-                      <a:pPr>
-                        <a:defRPr sz="1000" b="0"/>
-                      </a:pPr>
-                      <a:r>
-                        <a:t>$148k</a:t>
-                      </a:r>
-                    </a:p>
-                  </a:txBody>
-                  <a:tcPr/>
-                </a:tc>
-                <a:tc>
-                  <a:txBody>
-                    <a:bodyPr/>
-                    <a:lstStyle/>
-                    <a:p>
-                      <a:pPr>
-                        <a:defRPr sz="1000" b="0"/>
-                      </a:pPr>
-                      <a:r>
-                        <a:t>-1.4%</a:t>
-                      </a:r>
-                    </a:p>
-                  </a:txBody>
-                  <a:tcPr/>
-                </a:tc>
-                <a:tc>
-                  <a:txBody>
-                    <a:bodyPr/>
-                    <a:lstStyle/>
-                    <a:p>
-                      <a:pPr>
-                        <a:defRPr sz="1000" b="0"/>
-                      </a:pPr>
-                      <a:r>
-                        <a:t>+36.4%</a:t>
-                      </a:r>
-                    </a:p>
-                  </a:txBody>
-                  <a:tcPr/>
-                </a:tc>
-              </a:tr>
-            </a:tbl>
-          </a:graphicData>
-        </a:graphic>
-      </p:graphicFrame>
-      <p:sp>
-        <p:nvSpPr>
-          <p:cNvPr id="5" name="TextBox 4"/>
+      <p:sp>
+        <p:nvSpPr>
+          <p:cNvPr id="4" name="TextBox 3"/>
           <p:cNvSpPr txBox="1"/>
           <p:nvPr/>
         </p:nvSpPr>
         <p:spPr>
           <a:xfrm>
-            <a:off x="7498079" y="3108960"/>
-            <a:ext cx="4480560" cy="3200400"/>
+            <a:off x="6766560" y="1371600"/>
+            <a:ext cx="5212080" cy="5029200"/>
           </a:xfrm>
           <a:prstGeom prst="rect">
             <a:avLst/>
@@ -9669,34 +10226,67 @@
           <a:p>
             <a:pPr>
               <a:spcAft>
-                <a:spcPts val="600"/>
+                <a:spcPts val="500"/>
               </a:spcAft>
               <a:defRPr sz="1300"/>
             </a:pPr>
             <a:r>
-              <a:t>• Furniture: $2,242k sales (+10%) but GM $659k -&gt; $167k</a:t>
+              <a:t>• Volume: units +9.5%</a:t>
             </a:r>
           </a:p>
           <a:p>
             <a:pPr>
               <a:spcAft>
-                <a:spcPts val="600"/>
+                <a:spcPts val="500"/>
               </a:spcAft>
               <a:defRPr sz="1300"/>
             </a:pPr>
             <a:r>
-              <a:t>• Explains the whole gap between sales growth (+10.7%) and GM growth (+0.6%)</a:t>
+              <a:t>• Location mix: California's share of sales rose 40.9% -&gt; 43.0%; at ~1.7x price that lifts the average price with no price change</a:t>
             </a:r>
           </a:p>
           <a:p>
             <a:pPr>
               <a:spcAft>
-                <a:spcPts val="600"/>
+                <a:spcPts val="500"/>
               </a:spcAft>
               <a:defRPr sz="1300"/>
             </a:pPr>
             <a:r>
-              <a:t>• Action: reprice (~+36% to restore), renegotiate freight/supplier, or cut range; flag to Finance</a:t>
+              <a:t>• Like-for-like price -$76k: Electronics prices -6.8% (following a -7.0% cost fall); other categories rose ~+3.0%, in line with cost (+2.9%)</a:t>
+            </a:r>
+          </a:p>
+          <a:p>
+            <a:pPr>
+              <a:spcAft>
+                <a:spcPts val="500"/>
+              </a:spcAft>
+              <a:defRPr sz="1300"/>
+            </a:pPr>
+            <a:r>
+              <a:t>• Furniture: price -1.3% while landed cost rose +36.4%</a:t>
+            </a:r>
+          </a:p>
+          <a:p>
+            <a:pPr>
+              <a:spcAft>
+                <a:spcPts val="500"/>
+              </a:spcAft>
+              <a:defRPr sz="1300"/>
+            </a:pPr>
+            <a:r>
+              <a:t>• Price-derived metrics: list markup over cost, like-for-like price change, price realisation, promotion share</a:t>
+            </a:r>
+          </a:p>
+          <a:p>
+            <a:pPr>
+              <a:spcAft>
+                <a:spcPts val="500"/>
+              </a:spcAft>
+              <a:defRPr sz="1300"/>
+            </a:pPr>
+            <a:r>
+              <a:t>• Old method (product-level average price) counted the California shift as a price rise — replaced</a:t>
             </a:r>
           </a:p>
         </p:txBody>
@@ -9749,7 +10339,7 @@
               </a:defRPr>
             </a:pPr>
             <a:r>
-              <a:t>Q3: 2022 growth drivers — volume, not price</a:t>
+              <a:t>Pricing is cost-plus, by price list — and California sells more at 1.7x the price</a:t>
             </a:r>
           </a:p>
           <a:p>
@@ -9761,14 +10351,14 @@
               </a:defRPr>
             </a:pPr>
             <a:r>
-              <a:t>Price/volume bridge from mart_product_yearly</a:t>
+              <a:t>Price = list price (cost x fixed markup per product) x store price list x promotion</a:t>
             </a:r>
           </a:p>
         </p:txBody>
       </p:sp>
       <p:graphicFrame>
         <p:nvGraphicFramePr>
-          <p:cNvPr id="3" name="Chart 2"/>
+          <p:cNvPr id="3" name="Table 2"/>
           <p:cNvGraphicFramePr>
             <a:graphicFrameLocks noGrp="1"/>
           </p:cNvGraphicFramePr>
@@ -9776,11 +10366,452 @@
         </p:nvGraphicFramePr>
         <p:xfrm>
           <a:off x="365760" y="1371600"/>
-          <a:ext cx="6035040" cy="4846320"/>
+          <a:ext cx="7223760" cy="1463040"/>
         </p:xfrm>
         <a:graphic>
-          <a:graphicData uri="http://schemas.openxmlformats.org/drawingml/2006/chart">
-            <c:chart xmlns:c="http://schemas.openxmlformats.org/drawingml/2006/chart" r:id="rId2"/>
+          <a:graphicData uri="http://schemas.openxmlformats.org/drawingml/2006/table">
+            <a:tbl>
+              <a:tblPr firstRow="1" bandRow="1">
+                <a:tableStyleId>{5C22544A-7EE6-4342-B048-85BDC9FD1C3A}</a:tableStyleId>
+              </a:tblPr>
+              <a:tblGrid>
+                <a:gridCol w="1645920"/>
+                <a:gridCol w="731520"/>
+                <a:gridCol w="1005840"/>
+                <a:gridCol w="1188720"/>
+                <a:gridCol w="731520"/>
+                <a:gridCol w="1005840"/>
+                <a:gridCol w="914400"/>
+              </a:tblGrid>
+              <a:tr h="365760">
+                <a:tc>
+                  <a:txBody>
+                    <a:bodyPr/>
+                    <a:lstStyle/>
+                    <a:p>
+                      <a:pPr>
+                        <a:defRPr sz="1100" b="1"/>
+                      </a:pPr>
+                      <a:r>
+                        <a:t>2022 price list</a:t>
+                      </a:r>
+                    </a:p>
+                  </a:txBody>
+                  <a:tcPr/>
+                </a:tc>
+                <a:tc>
+                  <a:txBody>
+                    <a:bodyPr/>
+                    <a:lstStyle/>
+                    <a:p>
+                      <a:pPr>
+                        <a:defRPr sz="1100" b="1"/>
+                      </a:pPr>
+                      <a:r>
+                        <a:t>Stores</a:t>
+                      </a:r>
+                    </a:p>
+                  </a:txBody>
+                  <a:tcPr/>
+                </a:tc>
+                <a:tc>
+                  <a:txBody>
+                    <a:bodyPr/>
+                    <a:lstStyle/>
+                    <a:p>
+                      <a:pPr>
+                        <a:defRPr sz="1100" b="1"/>
+                      </a:pPr>
+                      <a:r>
+                        <a:t>Price vs CA</a:t>
+                      </a:r>
+                    </a:p>
+                  </a:txBody>
+                  <a:tcPr/>
+                </a:tc>
+                <a:tc>
+                  <a:txBody>
+                    <a:bodyPr/>
+                    <a:lstStyle/>
+                    <a:p>
+                      <a:pPr>
+                        <a:defRPr sz="1100" b="1"/>
+                      </a:pPr>
+                      <a:r>
+                        <a:t>Units / 1k sq ft</a:t>
+                      </a:r>
+                    </a:p>
+                  </a:txBody>
+                  <a:tcPr/>
+                </a:tc>
+                <a:tc>
+                  <a:txBody>
+                    <a:bodyPr/>
+                    <a:lstStyle/>
+                    <a:p>
+                      <a:pPr>
+                        <a:defRPr sz="1100" b="1"/>
+                      </a:pPr>
+                      <a:r>
+                        <a:t>GM %</a:t>
+                      </a:r>
+                    </a:p>
+                  </a:txBody>
+                  <a:tcPr/>
+                </a:tc>
+                <a:tc>
+                  <a:txBody>
+                    <a:bodyPr/>
+                    <a:lstStyle/>
+                    <a:p>
+                      <a:pPr>
+                        <a:defRPr sz="1100" b="1"/>
+                      </a:pPr>
+                      <a:r>
+                        <a:t>Contribution</a:t>
+                      </a:r>
+                    </a:p>
+                  </a:txBody>
+                  <a:tcPr/>
+                </a:tc>
+                <a:tc>
+                  <a:txBody>
+                    <a:bodyPr/>
+                    <a:lstStyle/>
+                    <a:p>
+                      <a:pPr>
+                        <a:defRPr sz="1100" b="1"/>
+                      </a:pPr>
+                      <a:r>
+                        <a:t>Loss-making</a:t>
+                      </a:r>
+                    </a:p>
+                  </a:txBody>
+                  <a:tcPr/>
+                </a:tc>
+              </a:tr>
+              <a:tr h="365760">
+                <a:tc>
+                  <a:txBody>
+                    <a:bodyPr/>
+                    <a:lstStyle/>
+                    <a:p>
+                      <a:pPr>
+                        <a:defRPr sz="1100" b="0"/>
+                      </a:pPr>
+                      <a:r>
+                        <a:t>Premium (1.00)</a:t>
+                      </a:r>
+                    </a:p>
+                  </a:txBody>
+                  <a:tcPr/>
+                </a:tc>
+                <a:tc>
+                  <a:txBody>
+                    <a:bodyPr/>
+                    <a:lstStyle/>
+                    <a:p>
+                      <a:pPr>
+                        <a:defRPr sz="1100" b="0"/>
+                      </a:pPr>
+                      <a:r>
+                        <a:t>74</a:t>
+                      </a:r>
+                    </a:p>
+                  </a:txBody>
+                  <a:tcPr/>
+                </a:tc>
+                <a:tc>
+                  <a:txBody>
+                    <a:bodyPr/>
+                    <a:lstStyle/>
+                    <a:p>
+                      <a:pPr>
+                        <a:defRPr sz="1100" b="0"/>
+                      </a:pPr>
+                      <a:r>
+                        <a:t>1.00</a:t>
+                      </a:r>
+                    </a:p>
+                  </a:txBody>
+                  <a:tcPr/>
+                </a:tc>
+                <a:tc>
+                  <a:txBody>
+                    <a:bodyPr/>
+                    <a:lstStyle/>
+                    <a:p>
+                      <a:pPr>
+                        <a:defRPr sz="1100" b="0"/>
+                      </a:pPr>
+                      <a:r>
+                        <a:t>10.8</a:t>
+                      </a:r>
+                    </a:p>
+                  </a:txBody>
+                  <a:tcPr/>
+                </a:tc>
+                <a:tc>
+                  <a:txBody>
+                    <a:bodyPr/>
+                    <a:lstStyle/>
+                    <a:p>
+                      <a:pPr>
+                        <a:defRPr sz="1100" b="0"/>
+                      </a:pPr>
+                      <a:r>
+                        <a:t>55.9%</a:t>
+                      </a:r>
+                    </a:p>
+                  </a:txBody>
+                  <a:tcPr/>
+                </a:tc>
+                <a:tc>
+                  <a:txBody>
+                    <a:bodyPr/>
+                    <a:lstStyle/>
+                    <a:p>
+                      <a:pPr>
+                        <a:defRPr sz="1100" b="0"/>
+                      </a:pPr>
+                      <a:r>
+                        <a:t>$1,822k</a:t>
+                      </a:r>
+                    </a:p>
+                  </a:txBody>
+                  <a:tcPr/>
+                </a:tc>
+                <a:tc>
+                  <a:txBody>
+                    <a:bodyPr/>
+                    <a:lstStyle/>
+                    <a:p>
+                      <a:pPr>
+                        <a:defRPr sz="1100" b="0"/>
+                      </a:pPr>
+                      <a:r>
+                        <a:t>20</a:t>
+                      </a:r>
+                    </a:p>
+                  </a:txBody>
+                  <a:tcPr/>
+                </a:tc>
+              </a:tr>
+              <a:tr h="365760">
+                <a:tc>
+                  <a:txBody>
+                    <a:bodyPr/>
+                    <a:lstStyle/>
+                    <a:p>
+                      <a:pPr>
+                        <a:defRPr sz="1100" b="0"/>
+                      </a:pPr>
+                      <a:r>
+                        <a:t>Base (0.59)</a:t>
+                      </a:r>
+                    </a:p>
+                  </a:txBody>
+                  <a:tcPr/>
+                </a:tc>
+                <a:tc>
+                  <a:txBody>
+                    <a:bodyPr/>
+                    <a:lstStyle/>
+                    <a:p>
+                      <a:pPr>
+                        <a:defRPr sz="1100" b="0"/>
+                      </a:pPr>
+                      <a:r>
+                        <a:t>178</a:t>
+                      </a:r>
+                    </a:p>
+                  </a:txBody>
+                  <a:tcPr/>
+                </a:tc>
+                <a:tc>
+                  <a:txBody>
+                    <a:bodyPr/>
+                    <a:lstStyle/>
+                    <a:p>
+                      <a:pPr>
+                        <a:defRPr sz="1100" b="0"/>
+                      </a:pPr>
+                      <a:r>
+                        <a:t>0.59</a:t>
+                      </a:r>
+                    </a:p>
+                  </a:txBody>
+                  <a:tcPr/>
+                </a:tc>
+                <a:tc>
+                  <a:txBody>
+                    <a:bodyPr/>
+                    <a:lstStyle/>
+                    <a:p>
+                      <a:pPr>
+                        <a:defRPr sz="1100" b="0"/>
+                      </a:pPr>
+                      <a:r>
+                        <a:t>7.5</a:t>
+                      </a:r>
+                    </a:p>
+                  </a:txBody>
+                  <a:tcPr/>
+                </a:tc>
+                <a:tc>
+                  <a:txBody>
+                    <a:bodyPr/>
+                    <a:lstStyle/>
+                    <a:p>
+                      <a:pPr>
+                        <a:defRPr sz="1100" b="0"/>
+                      </a:pPr>
+                      <a:r>
+                        <a:t>23.6%</a:t>
+                      </a:r>
+                    </a:p>
+                  </a:txBody>
+                  <a:tcPr/>
+                </a:tc>
+                <a:tc>
+                  <a:txBody>
+                    <a:bodyPr/>
+                    <a:lstStyle/>
+                    <a:p>
+                      <a:pPr>
+                        <a:defRPr sz="1100" b="0"/>
+                      </a:pPr>
+                      <a:r>
+                        <a:t>-$325k</a:t>
+                      </a:r>
+                    </a:p>
+                  </a:txBody>
+                  <a:tcPr/>
+                </a:tc>
+                <a:tc>
+                  <a:txBody>
+                    <a:bodyPr/>
+                    <a:lstStyle/>
+                    <a:p>
+                      <a:pPr>
+                        <a:defRPr sz="1100" b="0"/>
+                      </a:pPr>
+                      <a:r>
+                        <a:t>130</a:t>
+                      </a:r>
+                    </a:p>
+                  </a:txBody>
+                  <a:tcPr/>
+                </a:tc>
+              </a:tr>
+              <a:tr h="365760">
+                <a:tc>
+                  <a:txBody>
+                    <a:bodyPr/>
+                    <a:lstStyle/>
+                    <a:p>
+                      <a:pPr>
+                        <a:defRPr sz="1100" b="0"/>
+                      </a:pPr>
+                      <a:r>
+                        <a:t>Township (0.53)</a:t>
+                      </a:r>
+                    </a:p>
+                  </a:txBody>
+                  <a:tcPr/>
+                </a:tc>
+                <a:tc>
+                  <a:txBody>
+                    <a:bodyPr/>
+                    <a:lstStyle/>
+                    <a:p>
+                      <a:pPr>
+                        <a:defRPr sz="1100" b="0"/>
+                      </a:pPr>
+                      <a:r>
+                        <a:t>33</a:t>
+                      </a:r>
+                    </a:p>
+                  </a:txBody>
+                  <a:tcPr/>
+                </a:tc>
+                <a:tc>
+                  <a:txBody>
+                    <a:bodyPr/>
+                    <a:lstStyle/>
+                    <a:p>
+                      <a:pPr>
+                        <a:defRPr sz="1100" b="0"/>
+                      </a:pPr>
+                      <a:r>
+                        <a:t>0.53</a:t>
+                      </a:r>
+                    </a:p>
+                  </a:txBody>
+                  <a:tcPr/>
+                </a:tc>
+                <a:tc>
+                  <a:txBody>
+                    <a:bodyPr/>
+                    <a:lstStyle/>
+                    <a:p>
+                      <a:pPr>
+                        <a:defRPr sz="1100" b="0"/>
+                      </a:pPr>
+                      <a:r>
+                        <a:t>6.5</a:t>
+                      </a:r>
+                    </a:p>
+                  </a:txBody>
+                  <a:tcPr/>
+                </a:tc>
+                <a:tc>
+                  <a:txBody>
+                    <a:bodyPr/>
+                    <a:lstStyle/>
+                    <a:p>
+                      <a:pPr>
+                        <a:defRPr sz="1100" b="0"/>
+                      </a:pPr>
+                      <a:r>
+                        <a:t>16.5%</a:t>
+                      </a:r>
+                    </a:p>
+                  </a:txBody>
+                  <a:tcPr/>
+                </a:tc>
+                <a:tc>
+                  <a:txBody>
+                    <a:bodyPr/>
+                    <a:lstStyle/>
+                    <a:p>
+                      <a:pPr>
+                        <a:defRPr sz="1100" b="0"/>
+                      </a:pPr>
+                      <a:r>
+                        <a:t>-$64k</a:t>
+                      </a:r>
+                    </a:p>
+                  </a:txBody>
+                  <a:tcPr/>
+                </a:tc>
+                <a:tc>
+                  <a:txBody>
+                    <a:bodyPr/>
+                    <a:lstStyle/>
+                    <a:p>
+                      <a:pPr>
+                        <a:defRPr sz="1100" b="0"/>
+                      </a:pPr>
+                      <a:r>
+                        <a:t>31</a:t>
+                      </a:r>
+                    </a:p>
+                  </a:txBody>
+                  <a:tcPr/>
+                </a:tc>
+              </a:tr>
+            </a:tbl>
           </a:graphicData>
         </a:graphic>
       </p:graphicFrame>
@@ -9792,8 +10823,8 @@
         </p:nvSpPr>
         <p:spPr>
           <a:xfrm>
-            <a:off x="6583680" y="1371600"/>
-            <a:ext cx="5394960" cy="5029200"/>
+            <a:off x="365760" y="3017520"/>
+            <a:ext cx="11430000" cy="3566160"/>
           </a:xfrm>
           <a:prstGeom prst="rect">
             <a:avLst/>
@@ -9808,89 +10839,56 @@
           <a:p>
             <a:pPr>
               <a:spcAft>
-                <a:spcPts val="600"/>
+                <a:spcPts val="500"/>
               </a:spcAft>
-              <a:defRPr sz="1300"/>
+              <a:defRPr sz="1400"/>
             </a:pPr>
             <a:r>
-              <a:t>• Total 2022 Net Sales +$1.22M = +$1.16M volume (+9.6% units) + $0.06M price</a:t>
+              <a:t>• Each product's markup over landed cost is identical in every month of 2019-2022 — except Furniture in 2022 (next slide)</a:t>
             </a:r>
           </a:p>
           <a:p>
             <a:pPr>
               <a:spcAft>
-                <a:spcPts val="600"/>
+                <a:spcPts val="500"/>
               </a:spcAft>
-              <a:defRPr sz="1300"/>
+              <a:defRPr sz="1400"/>
             </a:pPr>
             <a:r>
-              <a:t>• Existing stores delivered +$1.12M; 14 new stores only $0.09M</a:t>
+              <a:t>• List price moved exactly with cost: Household/Kitchen/Dining/Sports +2.9% vs cost +2.9% in 2022; Electronics -7.0% vs -7.0%</a:t>
             </a:r>
           </a:p>
           <a:p>
             <a:pPr>
               <a:spcAft>
-                <a:spcPts val="600"/>
+                <a:spcPts val="500"/>
               </a:spcAft>
-              <a:defRPr sz="1300"/>
+              <a:defRPr sz="1400"/>
             </a:pPr>
             <a:r>
-              <a:t>• Price derivatives:</a:t>
-            </a:r>
-          </a:p>
-          <a:p>
-            <a:pPr lvl="1">
+              <a:t>• Price lists: all 74 California stores on 1.00; 178 stores on 0.59; all 33 Township stores on 0.53; 2 one-offs</a:t>
+            </a:r>
+          </a:p>
+          <a:p>
+            <a:pPr>
               <a:spcAft>
-                <a:spcPts val="600"/>
+                <a:spcPts val="500"/>
               </a:spcAft>
-              <a:defRPr sz="1100"/>
+              <a:defRPr sz="1400"/>
             </a:pPr>
             <a:r>
-              <a:t>– ASP growth decelerating: +5.0% (2020), +2.5%, +1.0% (2022)</a:t>
-            </a:r>
-          </a:p>
-          <a:p>
-            <a:pPr lvl="1">
+              <a:t>• Promotions in Jan, May, Sep, Dec only: ~12% of units in those months sold below the store's list</a:t>
+            </a:r>
+          </a:p>
+          <a:p>
+            <a:pPr>
               <a:spcAft>
-                <a:spcPts val="600"/>
+                <a:spcPts val="500"/>
               </a:spcAft>
-              <a:defRPr sz="1100"/>
+              <a:defRPr sz="1400"/>
             </a:pPr>
             <a:r>
-              <a:t>– Electronics cut prices 5-7% in line with 7% cost decline -&gt; GM% held, volume +12%</a:t>
-            </a:r>
-          </a:p>
-          <a:p>
-            <a:pPr lvl="1">
-              <a:spcAft>
-                <a:spcPts val="600"/>
-              </a:spcAft>
-              <a:defRPr sz="1100"/>
-            </a:pPr>
-            <a:r>
-              <a:t>– Household/Kitchen/Dining/Sports: price +3-4% vs landed cost +2.9% -&gt; healthy price-cost spread</a:t>
-            </a:r>
-          </a:p>
-          <a:p>
-            <a:pPr lvl="1">
-              <a:spcAft>
-                <a:spcPts val="600"/>
-              </a:spcAft>
-              <a:defRPr sz="1100"/>
-            </a:pPr>
-            <a:r>
-              <a:t>– Furniture: price -0.3% vs cost +36% -&gt; spread turned to ~zero</a:t>
-            </a:r>
-          </a:p>
-          <a:p>
-            <a:pPr lvl="1">
-              <a:spcAft>
-                <a:spcPts val="600"/>
-              </a:spcAft>
-              <a:defRPr sz="1100"/>
-            </a:pPr>
-            <a:r>
-              <a:t>– GM per unit 2022 vs 2021: Furniture fell most; track 'price-cost spread' monthly per category</a:t>
+              <a:t>• California sells 43% more units per sq ft than base stores at ~1.7x the price, every year since 2019 -&gt; no sign that price is holding volume back (California demand may differ: test, don't assume)</a:t>
             </a:r>
           </a:p>
         </p:txBody>

--- a/deliverables/ceo_sales_review.pptx
+++ b/deliverables/ceo_sales_review.pptx
@@ -6754,7 +6754,7 @@
               </a:defRPr>
             </a:pPr>
             <a:r>
-              <a:t>uv run dbt build: 17 models, 38 tests, all passing (incl. reconciliation tests)</a:t>
+              <a:t>uv run dbt build: 17 models, 40 tests, all passing (incl. reconciliation tests)</a:t>
             </a:r>
           </a:p>
         </p:txBody>
@@ -8081,7 +8081,7 @@
               <a:defRPr sz="1500"/>
             </a:pPr>
             <a:r>
-              <a:t>• Dimensions taken out of the repeated attributes: dim_product (17 + unknown), dim_store (287 + unknown)</a:t>
+              <a:t>• Dimensions taken out of the repeated attributes: dim_product (16 + unknown), dim_store (287 + unknown)</a:t>
             </a:r>
           </a:p>
           <a:p>
@@ -8136,7 +8136,7 @@
               <a:defRPr sz="1500"/>
             </a:pPr>
             <a:r>
-              <a:t>• Tests: keys, relationships, accepted values; source -&gt; fact and fact -&gt; mart reconciliation; bridge sums exactly; assumption tests (duplicates agree, one landed cost per product-month, list price = California price)</a:t>
+              <a:t>• Tests: keys, relationships, accepted values; source -&gt; fact and fact -&gt; mart reconciliation; bridge sums exactly; assumption tests (duplicates agree, name lookups map to one id, one landed cost per product-month, list price = California price)</a:t>
             </a:r>
           </a:p>
           <a:p>
